--- a/files/Copilot_Training_Deck.pptx
+++ b/files/Copilot_Training_Deck.pptx
@@ -5,7 +5,7 @@
     <p:sldMasterId id="2147483648" r:id="rId1"/>
   </p:sldMasterIdLst>
   <p:notesMasterIdLst>
-    <p:notesMasterId r:id="rId30"/>
+    <p:notesMasterId r:id="rId31"/>
   </p:notesMasterIdLst>
   <p:sldIdLst>
     <p:sldId id="256" r:id="rId2"/>
@@ -31,11 +31,12 @@
     <p:sldId id="276" r:id="rId22"/>
     <p:sldId id="277" r:id="rId23"/>
     <p:sldId id="278" r:id="rId24"/>
-    <p:sldId id="279" r:id="rId25"/>
-    <p:sldId id="280" r:id="rId26"/>
-    <p:sldId id="281" r:id="rId27"/>
-    <p:sldId id="282" r:id="rId28"/>
-    <p:sldId id="283" r:id="rId29"/>
+    <p:sldId id="285" r:id="rId25"/>
+    <p:sldId id="286" r:id="rId26"/>
+    <p:sldId id="279" r:id="rId27"/>
+    <p:sldId id="280" r:id="rId28"/>
+    <p:sldId id="282" r:id="rId29"/>
+    <p:sldId id="283" r:id="rId30"/>
   </p:sldIdLst>
   <p:sldSz cx="9144000" cy="5143500" type="screen16x9"/>
   <p:notesSz cx="5143500" cy="9144000"/>
@@ -139,6 +140,331 @@
 </p:presentation>
 </file>
 
+<file path=ppt/revisionInfo.xml><?xml version="1.0" encoding="utf-8"?>
+<p1510:revInfo xmlns:a="http://schemas.openxmlformats.org/drawingml/2006/main" xmlns:r="http://schemas.openxmlformats.org/officeDocument/2006/relationships" xmlns:p1510="http://schemas.microsoft.com/office/powerpoint/2015/10/main">
+  <p1510:revLst>
+    <p1510:client id="{59DEEFC0-BB78-4286-A0B7-9A320EDB6740}" v="117" dt="2026-03-24T15:18:24.155"/>
+  </p1510:revLst>
+</p1510:revInfo>
+</file>
+
+<file path=ppt/changesInfos/changesInfo1.xml><?xml version="1.0" encoding="utf-8"?>
+<pc:chgInfo xmlns:a="http://schemas.openxmlformats.org/drawingml/2006/main" xmlns:r="http://schemas.openxmlformats.org/officeDocument/2006/relationships" xmlns:ac="http://schemas.microsoft.com/office/drawing/2013/main/command" xmlns:pc="http://schemas.microsoft.com/office/powerpoint/2013/main/command">
+  <pc:docChgLst>
+    <pc:chgData name="John Rea" userId="d8639818-8097-4ceb-a926-1c095acca351" providerId="ADAL" clId="{0FCD4BB8-3B4B-4ACD-9B0D-ECB696CB557E}"/>
+    <pc:docChg chg="undo custSel addSld modSld">
+      <pc:chgData name="John Rea" userId="d8639818-8097-4ceb-a926-1c095acca351" providerId="ADAL" clId="{0FCD4BB8-3B4B-4ACD-9B0D-ECB696CB557E}" dt="2026-03-24T15:40:56.871" v="405" actId="1076"/>
+      <pc:docMkLst>
+        <pc:docMk/>
+      </pc:docMkLst>
+      <pc:sldChg chg="addSp delSp modSp add mod setBg">
+        <pc:chgData name="John Rea" userId="d8639818-8097-4ceb-a926-1c095acca351" providerId="ADAL" clId="{0FCD4BB8-3B4B-4ACD-9B0D-ECB696CB557E}" dt="2026-03-24T15:40:56.871" v="405" actId="1076"/>
+        <pc:sldMkLst>
+          <pc:docMk/>
+          <pc:sldMk cId="705130868" sldId="286"/>
+        </pc:sldMkLst>
+        <pc:spChg chg="mod">
+          <ac:chgData name="John Rea" userId="d8639818-8097-4ceb-a926-1c095acca351" providerId="ADAL" clId="{0FCD4BB8-3B4B-4ACD-9B0D-ECB696CB557E}" dt="2026-03-24T15:33:51.908" v="124" actId="26606"/>
+          <ac:spMkLst>
+            <pc:docMk/>
+            <pc:sldMk cId="705130868" sldId="286"/>
+            <ac:spMk id="2" creationId="{E5A9A79C-B6BE-F22A-EEA0-71BE3A64E5CA}"/>
+          </ac:spMkLst>
+        </pc:spChg>
+        <pc:spChg chg="mod">
+          <ac:chgData name="John Rea" userId="d8639818-8097-4ceb-a926-1c095acca351" providerId="ADAL" clId="{0FCD4BB8-3B4B-4ACD-9B0D-ECB696CB557E}" dt="2026-03-24T15:33:51.908" v="124" actId="26606"/>
+          <ac:spMkLst>
+            <pc:docMk/>
+            <pc:sldMk cId="705130868" sldId="286"/>
+            <ac:spMk id="3" creationId="{6E0BC3F0-E468-1A9E-1235-4160019057FA}"/>
+          </ac:spMkLst>
+        </pc:spChg>
+        <pc:spChg chg="del mod">
+          <ac:chgData name="John Rea" userId="d8639818-8097-4ceb-a926-1c095acca351" providerId="ADAL" clId="{0FCD4BB8-3B4B-4ACD-9B0D-ECB696CB557E}" dt="2026-03-24T15:27:40.684" v="28" actId="478"/>
+          <ac:spMkLst>
+            <pc:docMk/>
+            <pc:sldMk cId="705130868" sldId="286"/>
+            <ac:spMk id="6" creationId="{68F87EA4-82FC-ECF4-F63A-817DD42C2F62}"/>
+          </ac:spMkLst>
+        </pc:spChg>
+        <pc:spChg chg="add mod">
+          <ac:chgData name="John Rea" userId="d8639818-8097-4ceb-a926-1c095acca351" providerId="ADAL" clId="{0FCD4BB8-3B4B-4ACD-9B0D-ECB696CB557E}" dt="2026-03-24T15:36:20.827" v="401" actId="20577"/>
+          <ac:spMkLst>
+            <pc:docMk/>
+            <pc:sldMk cId="705130868" sldId="286"/>
+            <ac:spMk id="7" creationId="{0EA851A3-303A-BB04-8510-7DF818B94AF5}"/>
+          </ac:spMkLst>
+        </pc:spChg>
+        <pc:spChg chg="add mod">
+          <ac:chgData name="John Rea" userId="d8639818-8097-4ceb-a926-1c095acca351" providerId="ADAL" clId="{0FCD4BB8-3B4B-4ACD-9B0D-ECB696CB557E}" dt="2026-03-24T15:36:32.387" v="403" actId="1076"/>
+          <ac:spMkLst>
+            <pc:docMk/>
+            <pc:sldMk cId="705130868" sldId="286"/>
+            <ac:spMk id="9" creationId="{AEEE76DA-E52D-9560-4822-ECB4785E5254}"/>
+          </ac:spMkLst>
+        </pc:spChg>
+        <pc:spChg chg="add mod">
+          <ac:chgData name="John Rea" userId="d8639818-8097-4ceb-a926-1c095acca351" providerId="ADAL" clId="{0FCD4BB8-3B4B-4ACD-9B0D-ECB696CB557E}" dt="2026-03-24T15:36:34.927" v="404" actId="1076"/>
+          <ac:spMkLst>
+            <pc:docMk/>
+            <pc:sldMk cId="705130868" sldId="286"/>
+            <ac:spMk id="11" creationId="{F9A699ED-65D9-01EC-0579-745D492B21EC}"/>
+          </ac:spMkLst>
+        </pc:spChg>
+        <pc:spChg chg="add del">
+          <ac:chgData name="John Rea" userId="d8639818-8097-4ceb-a926-1c095acca351" providerId="ADAL" clId="{0FCD4BB8-3B4B-4ACD-9B0D-ECB696CB557E}" dt="2026-03-24T15:33:31.357" v="116" actId="26606"/>
+          <ac:spMkLst>
+            <pc:docMk/>
+            <pc:sldMk cId="705130868" sldId="286"/>
+            <ac:spMk id="15" creationId="{EE5F705A-5E81-4B3A-8EF4-911982DB313C}"/>
+          </ac:spMkLst>
+        </pc:spChg>
+        <pc:spChg chg="add del">
+          <ac:chgData name="John Rea" userId="d8639818-8097-4ceb-a926-1c095acca351" providerId="ADAL" clId="{0FCD4BB8-3B4B-4ACD-9B0D-ECB696CB557E}" dt="2026-03-24T15:33:31.357" v="116" actId="26606"/>
+          <ac:spMkLst>
+            <pc:docMk/>
+            <pc:sldMk cId="705130868" sldId="286"/>
+            <ac:spMk id="16" creationId="{AD8F92D9-1751-4ABF-9CB7-D198C9A05A46}"/>
+          </ac:spMkLst>
+        </pc:spChg>
+        <pc:spChg chg="add del">
+          <ac:chgData name="John Rea" userId="d8639818-8097-4ceb-a926-1c095acca351" providerId="ADAL" clId="{0FCD4BB8-3B4B-4ACD-9B0D-ECB696CB557E}" dt="2026-03-24T15:33:31.357" v="116" actId="26606"/>
+          <ac:spMkLst>
+            <pc:docMk/>
+            <pc:sldMk cId="705130868" sldId="286"/>
+            <ac:spMk id="17" creationId="{6D6B998F-CA62-4EE6-B7E7-046377D4F7EF}"/>
+          </ac:spMkLst>
+        </pc:spChg>
+        <pc:spChg chg="add del">
+          <ac:chgData name="John Rea" userId="d8639818-8097-4ceb-a926-1c095acca351" providerId="ADAL" clId="{0FCD4BB8-3B4B-4ACD-9B0D-ECB696CB557E}" dt="2026-03-24T15:33:19.046" v="106" actId="26606"/>
+          <ac:spMkLst>
+            <pc:docMk/>
+            <pc:sldMk cId="705130868" sldId="286"/>
+            <ac:spMk id="18" creationId="{854ECEBE-9353-406C-9313-02A517A310EF}"/>
+          </ac:spMkLst>
+        </pc:spChg>
+        <pc:spChg chg="add del">
+          <ac:chgData name="John Rea" userId="d8639818-8097-4ceb-a926-1c095acca351" providerId="ADAL" clId="{0FCD4BB8-3B4B-4ACD-9B0D-ECB696CB557E}" dt="2026-03-24T15:33:32.569" v="118" actId="26606"/>
+          <ac:spMkLst>
+            <pc:docMk/>
+            <pc:sldMk cId="705130868" sldId="286"/>
+            <ac:spMk id="19" creationId="{5D1D4658-32CD-4903-BDA6-7B54EEA4ED6F}"/>
+          </ac:spMkLst>
+        </pc:spChg>
+        <pc:spChg chg="add del">
+          <ac:chgData name="John Rea" userId="d8639818-8097-4ceb-a926-1c095acca351" providerId="ADAL" clId="{0FCD4BB8-3B4B-4ACD-9B0D-ECB696CB557E}" dt="2026-03-24T15:33:19.046" v="106" actId="26606"/>
+          <ac:spMkLst>
+            <pc:docMk/>
+            <pc:sldMk cId="705130868" sldId="286"/>
+            <ac:spMk id="20" creationId="{71A74C97-ECC4-4C3A-988A-A72C1F8BBAC8}"/>
+          </ac:spMkLst>
+        </pc:spChg>
+        <pc:spChg chg="add del">
+          <ac:chgData name="John Rea" userId="d8639818-8097-4ceb-a926-1c095acca351" providerId="ADAL" clId="{0FCD4BB8-3B4B-4ACD-9B0D-ECB696CB557E}" dt="2026-03-24T15:33:32.569" v="118" actId="26606"/>
+          <ac:spMkLst>
+            <pc:docMk/>
+            <pc:sldMk cId="705130868" sldId="286"/>
+            <ac:spMk id="21" creationId="{7A29A97C-0C3C-4F06-9CA4-68DFD1CE4039}"/>
+          </ac:spMkLst>
+        </pc:spChg>
+        <pc:spChg chg="add del">
+          <ac:chgData name="John Rea" userId="d8639818-8097-4ceb-a926-1c095acca351" providerId="ADAL" clId="{0FCD4BB8-3B4B-4ACD-9B0D-ECB696CB557E}" dt="2026-03-24T15:33:19.046" v="106" actId="26606"/>
+          <ac:spMkLst>
+            <pc:docMk/>
+            <pc:sldMk cId="705130868" sldId="286"/>
+            <ac:spMk id="22" creationId="{5FB5F3BA-58DF-40DA-AE44-974A00E0619C}"/>
+          </ac:spMkLst>
+        </pc:spChg>
+        <pc:spChg chg="add del">
+          <ac:chgData name="John Rea" userId="d8639818-8097-4ceb-a926-1c095acca351" providerId="ADAL" clId="{0FCD4BB8-3B4B-4ACD-9B0D-ECB696CB557E}" dt="2026-03-24T15:33:32.569" v="118" actId="26606"/>
+          <ac:spMkLst>
+            <pc:docMk/>
+            <pc:sldMk cId="705130868" sldId="286"/>
+            <ac:spMk id="23" creationId="{801292C1-8B12-4AF2-9B59-8851A132E5E2}"/>
+          </ac:spMkLst>
+        </pc:spChg>
+        <pc:spChg chg="add del">
+          <ac:chgData name="John Rea" userId="d8639818-8097-4ceb-a926-1c095acca351" providerId="ADAL" clId="{0FCD4BB8-3B4B-4ACD-9B0D-ECB696CB557E}" dt="2026-03-24T15:33:19.046" v="106" actId="26606"/>
+          <ac:spMkLst>
+            <pc:docMk/>
+            <pc:sldMk cId="705130868" sldId="286"/>
+            <ac:spMk id="24" creationId="{DE1994AC-22D1-4B48-9EDA-BE373E704567}"/>
+          </ac:spMkLst>
+        </pc:spChg>
+        <pc:spChg chg="add del">
+          <ac:chgData name="John Rea" userId="d8639818-8097-4ceb-a926-1c095acca351" providerId="ADAL" clId="{0FCD4BB8-3B4B-4ACD-9B0D-ECB696CB557E}" dt="2026-03-24T15:33:19.046" v="106" actId="26606"/>
+          <ac:spMkLst>
+            <pc:docMk/>
+            <pc:sldMk cId="705130868" sldId="286"/>
+            <ac:spMk id="26" creationId="{86806086-A782-4311-A63B-1A68574D8067}"/>
+          </ac:spMkLst>
+        </pc:spChg>
+        <pc:spChg chg="add del">
+          <ac:chgData name="John Rea" userId="d8639818-8097-4ceb-a926-1c095acca351" providerId="ADAL" clId="{0FCD4BB8-3B4B-4ACD-9B0D-ECB696CB557E}" dt="2026-03-24T15:33:37.285" v="122" actId="26606"/>
+          <ac:spMkLst>
+            <pc:docMk/>
+            <pc:sldMk cId="705130868" sldId="286"/>
+            <ac:spMk id="27" creationId="{A169D286-F4D7-4C8B-A6BD-D05384C7F1D8}"/>
+          </ac:spMkLst>
+        </pc:spChg>
+        <pc:spChg chg="add del">
+          <ac:chgData name="John Rea" userId="d8639818-8097-4ceb-a926-1c095acca351" providerId="ADAL" clId="{0FCD4BB8-3B4B-4ACD-9B0D-ECB696CB557E}" dt="2026-03-24T15:33:20.606" v="108" actId="26606"/>
+          <ac:spMkLst>
+            <pc:docMk/>
+            <pc:sldMk cId="705130868" sldId="286"/>
+            <ac:spMk id="28" creationId="{5F9CFCE6-877F-4858-B8BD-2C52CA8AFBC4}"/>
+          </ac:spMkLst>
+        </pc:spChg>
+        <pc:spChg chg="add del">
+          <ac:chgData name="John Rea" userId="d8639818-8097-4ceb-a926-1c095acca351" providerId="ADAL" clId="{0FCD4BB8-3B4B-4ACD-9B0D-ECB696CB557E}" dt="2026-03-24T15:33:20.606" v="108" actId="26606"/>
+          <ac:spMkLst>
+            <pc:docMk/>
+            <pc:sldMk cId="705130868" sldId="286"/>
+            <ac:spMk id="29" creationId="{8213F8A0-12AE-4514-8372-0DD766EC28EE}"/>
+          </ac:spMkLst>
+        </pc:spChg>
+        <pc:spChg chg="add del">
+          <ac:chgData name="John Rea" userId="d8639818-8097-4ceb-a926-1c095acca351" providerId="ADAL" clId="{0FCD4BB8-3B4B-4ACD-9B0D-ECB696CB557E}" dt="2026-03-24T15:33:20.606" v="108" actId="26606"/>
+          <ac:spMkLst>
+            <pc:docMk/>
+            <pc:sldMk cId="705130868" sldId="286"/>
+            <ac:spMk id="30" creationId="{9EFF17D4-9A8C-4CE5-B096-D8CCD4400437}"/>
+          </ac:spMkLst>
+        </pc:spChg>
+        <pc:spChg chg="add del">
+          <ac:chgData name="John Rea" userId="d8639818-8097-4ceb-a926-1c095acca351" providerId="ADAL" clId="{0FCD4BB8-3B4B-4ACD-9B0D-ECB696CB557E}" dt="2026-03-24T15:33:37.285" v="122" actId="26606"/>
+          <ac:spMkLst>
+            <pc:docMk/>
+            <pc:sldMk cId="705130868" sldId="286"/>
+            <ac:spMk id="31" creationId="{39E8235E-135E-4261-8F54-2B316E493C42}"/>
+          </ac:spMkLst>
+        </pc:spChg>
+        <pc:spChg chg="add del">
+          <ac:chgData name="John Rea" userId="d8639818-8097-4ceb-a926-1c095acca351" providerId="ADAL" clId="{0FCD4BB8-3B4B-4ACD-9B0D-ECB696CB557E}" dt="2026-03-24T15:33:22.036" v="110" actId="26606"/>
+          <ac:spMkLst>
+            <pc:docMk/>
+            <pc:sldMk cId="705130868" sldId="286"/>
+            <ac:spMk id="32" creationId="{2F19B711-C590-44D1-9AA8-9F143B0ED58A}"/>
+          </ac:spMkLst>
+        </pc:spChg>
+        <pc:spChg chg="del mod">
+          <ac:chgData name="John Rea" userId="d8639818-8097-4ceb-a926-1c095acca351" providerId="ADAL" clId="{0FCD4BB8-3B4B-4ACD-9B0D-ECB696CB557E}" dt="2026-03-24T15:27:40.686" v="30"/>
+          <ac:spMkLst>
+            <pc:docMk/>
+            <pc:sldMk cId="705130868" sldId="286"/>
+            <ac:spMk id="33" creationId="{D6C8F12E-30AE-3059-AE01-D639041A4696}"/>
+          </ac:spMkLst>
+        </pc:spChg>
+        <pc:spChg chg="add del">
+          <ac:chgData name="John Rea" userId="d8639818-8097-4ceb-a926-1c095acca351" providerId="ADAL" clId="{0FCD4BB8-3B4B-4ACD-9B0D-ECB696CB557E}" dt="2026-03-24T15:33:22.036" v="110" actId="26606"/>
+          <ac:spMkLst>
+            <pc:docMk/>
+            <pc:sldMk cId="705130868" sldId="286"/>
+            <ac:spMk id="34" creationId="{C0C79CF2-6A1C-4636-84CE-ABB2BE191D23}"/>
+          </ac:spMkLst>
+        </pc:spChg>
+        <pc:spChg chg="add del">
+          <ac:chgData name="John Rea" userId="d8639818-8097-4ceb-a926-1c095acca351" providerId="ADAL" clId="{0FCD4BB8-3B4B-4ACD-9B0D-ECB696CB557E}" dt="2026-03-24T15:33:22.036" v="110" actId="26606"/>
+          <ac:spMkLst>
+            <pc:docMk/>
+            <pc:sldMk cId="705130868" sldId="286"/>
+            <ac:spMk id="35" creationId="{7A5D17DF-AD65-402C-A95C-F13C770C9FCD}"/>
+          </ac:spMkLst>
+        </pc:spChg>
+        <pc:spChg chg="add del">
+          <ac:chgData name="John Rea" userId="d8639818-8097-4ceb-a926-1c095acca351" providerId="ADAL" clId="{0FCD4BB8-3B4B-4ACD-9B0D-ECB696CB557E}" dt="2026-03-24T15:33:37.285" v="122" actId="26606"/>
+          <ac:spMkLst>
+            <pc:docMk/>
+            <pc:sldMk cId="705130868" sldId="286"/>
+            <ac:spMk id="36" creationId="{D4ED8EC3-4D57-4620-93CE-4E6661F09A3E}"/>
+          </ac:spMkLst>
+        </pc:spChg>
+        <pc:spChg chg="add del">
+          <ac:chgData name="John Rea" userId="d8639818-8097-4ceb-a926-1c095acca351" providerId="ADAL" clId="{0FCD4BB8-3B4B-4ACD-9B0D-ECB696CB557E}" dt="2026-03-24T15:33:23.326" v="112" actId="26606"/>
+          <ac:spMkLst>
+            <pc:docMk/>
+            <pc:sldMk cId="705130868" sldId="286"/>
+            <ac:spMk id="37" creationId="{69D184B2-2226-4E31-BCCB-444330767440}"/>
+          </ac:spMkLst>
+        </pc:spChg>
+        <pc:spChg chg="add del">
+          <ac:chgData name="John Rea" userId="d8639818-8097-4ceb-a926-1c095acca351" providerId="ADAL" clId="{0FCD4BB8-3B4B-4ACD-9B0D-ECB696CB557E}" dt="2026-03-24T15:33:23.326" v="112" actId="26606"/>
+          <ac:spMkLst>
+            <pc:docMk/>
+            <pc:sldMk cId="705130868" sldId="286"/>
+            <ac:spMk id="38" creationId="{1AC4D4E3-486A-464A-8EC8-D44881097267}"/>
+          </ac:spMkLst>
+        </pc:spChg>
+        <pc:spChg chg="add del">
+          <ac:chgData name="John Rea" userId="d8639818-8097-4ceb-a926-1c095acca351" providerId="ADAL" clId="{0FCD4BB8-3B4B-4ACD-9B0D-ECB696CB557E}" dt="2026-03-24T15:33:23.326" v="112" actId="26606"/>
+          <ac:spMkLst>
+            <pc:docMk/>
+            <pc:sldMk cId="705130868" sldId="286"/>
+            <ac:spMk id="39" creationId="{864DE13E-58EB-4475-B79C-0D4FC651239B}"/>
+          </ac:spMkLst>
+        </pc:spChg>
+        <pc:spChg chg="add del">
+          <ac:chgData name="John Rea" userId="d8639818-8097-4ceb-a926-1c095acca351" providerId="ADAL" clId="{0FCD4BB8-3B4B-4ACD-9B0D-ECB696CB557E}" dt="2026-03-24T15:33:37.285" v="122" actId="26606"/>
+          <ac:spMkLst>
+            <pc:docMk/>
+            <pc:sldMk cId="705130868" sldId="286"/>
+            <ac:spMk id="41" creationId="{83BCB34A-2F40-4F41-8488-A134C1C155B7}"/>
+          </ac:spMkLst>
+        </pc:spChg>
+        <pc:spChg chg="add del">
+          <ac:chgData name="John Rea" userId="d8639818-8097-4ceb-a926-1c095acca351" providerId="ADAL" clId="{0FCD4BB8-3B4B-4ACD-9B0D-ECB696CB557E}" dt="2026-03-24T15:33:37.285" v="122" actId="26606"/>
+          <ac:spMkLst>
+            <pc:docMk/>
+            <pc:sldMk cId="705130868" sldId="286"/>
+            <ac:spMk id="42" creationId="{F78382DC-4207-465E-B379-1E16448AA222}"/>
+          </ac:spMkLst>
+        </pc:spChg>
+        <pc:picChg chg="mod">
+          <ac:chgData name="John Rea" userId="d8639818-8097-4ceb-a926-1c095acca351" providerId="ADAL" clId="{0FCD4BB8-3B4B-4ACD-9B0D-ECB696CB557E}" dt="2026-03-24T15:33:51.908" v="124" actId="26606"/>
+          <ac:picMkLst>
+            <pc:docMk/>
+            <pc:sldMk cId="705130868" sldId="286"/>
+            <ac:picMk id="4" creationId="{38498DE9-F3E5-E1D4-23D9-53827A6B4E2A}"/>
+          </ac:picMkLst>
+        </pc:picChg>
+        <pc:picChg chg="add mod">
+          <ac:chgData name="John Rea" userId="d8639818-8097-4ceb-a926-1c095acca351" providerId="ADAL" clId="{0FCD4BB8-3B4B-4ACD-9B0D-ECB696CB557E}" dt="2026-03-24T15:40:56.871" v="405" actId="1076"/>
+          <ac:picMkLst>
+            <pc:docMk/>
+            <pc:sldMk cId="705130868" sldId="286"/>
+            <ac:picMk id="13" creationId="{D92D1894-0AFF-A9DC-07F3-958365659231}"/>
+          </ac:picMkLst>
+        </pc:picChg>
+        <pc:cxnChg chg="add del">
+          <ac:chgData name="John Rea" userId="d8639818-8097-4ceb-a926-1c095acca351" providerId="ADAL" clId="{0FCD4BB8-3B4B-4ACD-9B0D-ECB696CB557E}" dt="2026-03-24T15:33:35.966" v="120" actId="26606"/>
+          <ac:cxnSpMkLst>
+            <pc:docMk/>
+            <pc:sldMk cId="705130868" sldId="286"/>
+            <ac:cxnSpMk id="25" creationId="{4D56677B-C0B7-4DAC-ACAD-8054FF1B599A}"/>
+          </ac:cxnSpMkLst>
+        </pc:cxnChg>
+        <pc:cxnChg chg="add del">
+          <ac:chgData name="John Rea" userId="d8639818-8097-4ceb-a926-1c095acca351" providerId="ADAL" clId="{0FCD4BB8-3B4B-4ACD-9B0D-ECB696CB557E}" dt="2026-03-24T15:33:51.908" v="124" actId="26606"/>
+          <ac:cxnSpMkLst>
+            <pc:docMk/>
+            <pc:sldMk cId="705130868" sldId="286"/>
+            <ac:cxnSpMk id="44" creationId="{0B4A113E-D208-4EF0-8BAB-25FDD2E588BA}"/>
+          </ac:cxnSpMkLst>
+        </pc:cxnChg>
+        <pc:cxnChg chg="add del">
+          <ac:chgData name="John Rea" userId="d8639818-8097-4ceb-a926-1c095acca351" providerId="ADAL" clId="{0FCD4BB8-3B4B-4ACD-9B0D-ECB696CB557E}" dt="2026-03-24T15:33:51.908" v="124" actId="26606"/>
+          <ac:cxnSpMkLst>
+            <pc:docMk/>
+            <pc:sldMk cId="705130868" sldId="286"/>
+            <ac:cxnSpMk id="45" creationId="{2FE16547-5205-4F0E-B809-89D18FF4C8BA}"/>
+          </ac:cxnSpMkLst>
+        </pc:cxnChg>
+      </pc:sldChg>
+    </pc:docChg>
+  </pc:docChgLst>
+</pc:chgInfo>
+</file>
+
 <file path=ppt/notesMasters/notesMaster1.xml><?xml version="1.0" encoding="utf-8"?>
 <p:notesMaster xmlns:a="http://schemas.openxmlformats.org/drawingml/2006/main" xmlns:r="http://schemas.openxmlformats.org/officeDocument/2006/relationships" xmlns:p="http://schemas.openxmlformats.org/presentationml/2006/main">
   <p:cSld>
@@ -164,7 +490,7 @@
     </p:spTree>
     <p:extLst>
       <p:ext uri="{BB962C8B-B14F-4D97-AF65-F5344CB8AC3E}">
-        <p14:creationId xmlns:p14="http://schemas.microsoft.com/office/powerpoint/2010/main" val="242835614"/>
+        <p14:creationId xmlns:p14="http://schemas.microsoft.com/office/powerpoint/2010/main" val="3144286651"/>
       </p:ext>
     </p:extLst>
   </p:cSld>
@@ -1613,7 +1939,13 @@
   <p:cSld>
     <p:spTree>
       <p:nvGrpSpPr>
-        <p:cNvPr id="1" name=""/>
+        <p:cNvPr id="1" name="">
+          <a:extLst>
+            <a:ext uri="{FF2B5EF4-FFF2-40B4-BE49-F238E27FC236}">
+              <a16:creationId xmlns:a16="http://schemas.microsoft.com/office/drawing/2014/main" id="{3077BBAF-DC5A-3DD5-C507-EB8106A7DCD0}"/>
+            </a:ext>
+          </a:extLst>
+        </p:cNvPr>
         <p:cNvGrpSpPr/>
         <p:nvPr/>
       </p:nvGrpSpPr>
@@ -1627,7 +1959,13 @@
       </p:grpSpPr>
       <p:sp>
         <p:nvSpPr>
-          <p:cNvPr id="2" name="Slide Image Placeholder 1"/>
+          <p:cNvPr id="2" name="Slide Image Placeholder 1">
+            <a:extLst>
+              <a:ext uri="{FF2B5EF4-FFF2-40B4-BE49-F238E27FC236}">
+                <a16:creationId xmlns:a16="http://schemas.microsoft.com/office/drawing/2014/main" id="{3F7A707C-553E-7BA2-AE97-AE1BBE4498C0}"/>
+              </a:ext>
+            </a:extLst>
+          </p:cNvPr>
           <p:cNvSpPr>
             <a:spLocks noGrp="1" noRot="1" noChangeAspect="1"/>
           </p:cNvSpPr>
@@ -1639,7 +1977,13 @@
       </p:sp>
       <p:sp>
         <p:nvSpPr>
-          <p:cNvPr id="3" name="Notes Placeholder 2"/>
+          <p:cNvPr id="3" name="Notes Placeholder 2">
+            <a:extLst>
+              <a:ext uri="{FF2B5EF4-FFF2-40B4-BE49-F238E27FC236}">
+                <a16:creationId xmlns:a16="http://schemas.microsoft.com/office/drawing/2014/main" id="{67247877-486D-160E-DD87-3D80B1A80920}"/>
+              </a:ext>
+            </a:extLst>
+          </p:cNvPr>
           <p:cNvSpPr>
             <a:spLocks noGrp="1"/>
           </p:cNvSpPr>
@@ -1658,7 +2002,13 @@
       </p:sp>
       <p:sp>
         <p:nvSpPr>
-          <p:cNvPr id="4" name="Slide Number Placeholder 3"/>
+          <p:cNvPr id="4" name="Slide Number Placeholder 3">
+            <a:extLst>
+              <a:ext uri="{FF2B5EF4-FFF2-40B4-BE49-F238E27FC236}">
+                <a16:creationId xmlns:a16="http://schemas.microsoft.com/office/drawing/2014/main" id="{A9645675-D1CF-F88C-0CA1-D65BF6FA760E}"/>
+              </a:ext>
+            </a:extLst>
+          </p:cNvPr>
           <p:cNvSpPr>
             <a:spLocks noGrp="1"/>
           </p:cNvSpPr>
@@ -1682,7 +2032,7 @@
     </p:spTree>
     <p:extLst>
       <p:ext uri="{BB962C8B-B14F-4D97-AF65-F5344CB8AC3E}">
-        <p14:creationId xmlns:p14="http://schemas.microsoft.com/office/powerpoint/2010/main" val="1024086991"/>
+        <p14:creationId xmlns:p14="http://schemas.microsoft.com/office/powerpoint/2010/main" val="2693759874"/>
       </p:ext>
     </p:extLst>
   </p:cSld>
@@ -1697,7 +2047,13 @@
   <p:cSld>
     <p:spTree>
       <p:nvGrpSpPr>
-        <p:cNvPr id="1" name=""/>
+        <p:cNvPr id="1" name="">
+          <a:extLst>
+            <a:ext uri="{FF2B5EF4-FFF2-40B4-BE49-F238E27FC236}">
+              <a16:creationId xmlns:a16="http://schemas.microsoft.com/office/drawing/2014/main" id="{D55034D2-B5E9-539A-A608-70B5042DE64B}"/>
+            </a:ext>
+          </a:extLst>
+        </p:cNvPr>
         <p:cNvGrpSpPr/>
         <p:nvPr/>
       </p:nvGrpSpPr>
@@ -1711,7 +2067,13 @@
       </p:grpSpPr>
       <p:sp>
         <p:nvSpPr>
-          <p:cNvPr id="2" name="Slide Image Placeholder 1"/>
+          <p:cNvPr id="2" name="Slide Image Placeholder 1">
+            <a:extLst>
+              <a:ext uri="{FF2B5EF4-FFF2-40B4-BE49-F238E27FC236}">
+                <a16:creationId xmlns:a16="http://schemas.microsoft.com/office/drawing/2014/main" id="{180F8D9F-0801-1464-6D6A-158E7ACD50E2}"/>
+              </a:ext>
+            </a:extLst>
+          </p:cNvPr>
           <p:cNvSpPr>
             <a:spLocks noGrp="1" noRot="1" noChangeAspect="1"/>
           </p:cNvSpPr>
@@ -1723,7 +2085,13 @@
       </p:sp>
       <p:sp>
         <p:nvSpPr>
-          <p:cNvPr id="3" name="Notes Placeholder 2"/>
+          <p:cNvPr id="3" name="Notes Placeholder 2">
+            <a:extLst>
+              <a:ext uri="{FF2B5EF4-FFF2-40B4-BE49-F238E27FC236}">
+                <a16:creationId xmlns:a16="http://schemas.microsoft.com/office/drawing/2014/main" id="{8D163651-4F3C-2658-BF75-A69597A77568}"/>
+              </a:ext>
+            </a:extLst>
+          </p:cNvPr>
           <p:cNvSpPr>
             <a:spLocks noGrp="1"/>
           </p:cNvSpPr>
@@ -1742,7 +2110,13 @@
       </p:sp>
       <p:sp>
         <p:nvSpPr>
-          <p:cNvPr id="4" name="Slide Number Placeholder 3"/>
+          <p:cNvPr id="4" name="Slide Number Placeholder 3">
+            <a:extLst>
+              <a:ext uri="{FF2B5EF4-FFF2-40B4-BE49-F238E27FC236}">
+                <a16:creationId xmlns:a16="http://schemas.microsoft.com/office/drawing/2014/main" id="{0DCB9E6C-22C3-A23B-EFCF-4F3972CC8304}"/>
+              </a:ext>
+            </a:extLst>
+          </p:cNvPr>
           <p:cNvSpPr>
             <a:spLocks noGrp="1"/>
           </p:cNvSpPr>
@@ -1766,7 +2140,7 @@
     </p:spTree>
     <p:extLst>
       <p:ext uri="{BB962C8B-B14F-4D97-AF65-F5344CB8AC3E}">
-        <p14:creationId xmlns:p14="http://schemas.microsoft.com/office/powerpoint/2010/main" val="1024086991"/>
+        <p14:creationId xmlns:p14="http://schemas.microsoft.com/office/powerpoint/2010/main" val="2277592362"/>
       </p:ext>
     </p:extLst>
   </p:cSld>
@@ -2010,6 +2384,90 @@
             <a:fld id="{F7021451-1387-4CA6-816F-3879F97B5CBC}" type="slidenum">
               <a:rPr lang="en-US"/>
               <a:t>28</a:t>
+            </a:fld>
+            <a:endParaRPr lang="en-US"/>
+          </a:p>
+        </p:txBody>
+      </p:sp>
+    </p:spTree>
+    <p:extLst>
+      <p:ext uri="{BB962C8B-B14F-4D97-AF65-F5344CB8AC3E}">
+        <p14:creationId xmlns:p14="http://schemas.microsoft.com/office/powerpoint/2010/main" val="1024086991"/>
+      </p:ext>
+    </p:extLst>
+  </p:cSld>
+  <p:clrMapOvr>
+    <a:masterClrMapping/>
+  </p:clrMapOvr>
+</p:notes>
+</file>
+
+<file path=ppt/notesSlides/notesSlide29.xml><?xml version="1.0" encoding="utf-8"?>
+<p:notes xmlns:a="http://schemas.openxmlformats.org/drawingml/2006/main" xmlns:r="http://schemas.openxmlformats.org/officeDocument/2006/relationships" xmlns:p="http://schemas.openxmlformats.org/presentationml/2006/main">
+  <p:cSld>
+    <p:spTree>
+      <p:nvGrpSpPr>
+        <p:cNvPr id="1" name=""/>
+        <p:cNvGrpSpPr/>
+        <p:nvPr/>
+      </p:nvGrpSpPr>
+      <p:grpSpPr>
+        <a:xfrm>
+          <a:off x="0" y="0"/>
+          <a:ext cx="0" cy="0"/>
+          <a:chOff x="0" y="0"/>
+          <a:chExt cx="0" cy="0"/>
+        </a:xfrm>
+      </p:grpSpPr>
+      <p:sp>
+        <p:nvSpPr>
+          <p:cNvPr id="2" name="Slide Image Placeholder 1"/>
+          <p:cNvSpPr>
+            <a:spLocks noGrp="1" noRot="1" noChangeAspect="1"/>
+          </p:cNvSpPr>
+          <p:nvPr>
+            <p:ph type="sldImg"/>
+          </p:nvPr>
+        </p:nvSpPr>
+        <p:spPr/>
+      </p:sp>
+      <p:sp>
+        <p:nvSpPr>
+          <p:cNvPr id="3" name="Notes Placeholder 2"/>
+          <p:cNvSpPr>
+            <a:spLocks noGrp="1"/>
+          </p:cNvSpPr>
+          <p:nvPr>
+            <p:ph type="body" idx="1"/>
+          </p:nvPr>
+        </p:nvSpPr>
+        <p:spPr/>
+        <p:txBody>
+          <a:bodyPr/>
+          <a:lstStyle/>
+          <a:p>
+            <a:endParaRPr lang="en-US" dirty="0"/>
+          </a:p>
+        </p:txBody>
+      </p:sp>
+      <p:sp>
+        <p:nvSpPr>
+          <p:cNvPr id="4" name="Slide Number Placeholder 3"/>
+          <p:cNvSpPr>
+            <a:spLocks noGrp="1"/>
+          </p:cNvSpPr>
+          <p:nvPr>
+            <p:ph type="sldNum" sz="quarter" idx="10"/>
+          </p:nvPr>
+        </p:nvSpPr>
+        <p:spPr/>
+        <p:txBody>
+          <a:bodyPr/>
+          <a:lstStyle/>
+          <a:p>
+            <a:fld id="{F7021451-1387-4CA6-816F-3879F97B5CBC}" type="slidenum">
+              <a:rPr lang="en-US"/>
+              <a:t>29</a:t>
             </a:fld>
             <a:endParaRPr lang="en-US"/>
           </a:p>
@@ -4674,7 +5132,7 @@
               <a:buNone/>
             </a:pPr>
             <a:r>
-              <a:rPr lang="en-US" sz="1400" dirty="0">
+              <a:rPr lang="en-US" sz="1400">
                 <a:solidFill>
                   <a:srgbClr val="D2D0CE"/>
                 </a:solidFill>
@@ -4745,7 +5203,7 @@
               <a:buNone/>
             </a:pPr>
             <a:r>
-              <a:rPr lang="en-US" sz="4600" b="1" dirty="0">
+              <a:rPr lang="en-US" sz="4600" b="1">
                 <a:solidFill>
                   <a:srgbClr val="FFFFFF"/>
                 </a:solidFill>
@@ -4784,7 +5242,7 @@
               <a:buNone/>
             </a:pPr>
             <a:r>
-              <a:rPr lang="en-US" sz="3400" dirty="0">
+              <a:rPr lang="en-US" sz="3400">
                 <a:solidFill>
                   <a:srgbClr val="C8E6FA"/>
                 </a:solidFill>
@@ -4800,14 +5258,14 @@
       </p:sp>
       <p:sp>
         <p:nvSpPr>
-          <p:cNvPr id="56" name="Text 54"/>
-          <p:cNvSpPr/>
-          <p:nvPr/>
-        </p:nvSpPr>
-        <p:spPr>
-          <a:xfrm>
-            <a:off x="457200" y="2560320"/>
-            <a:ext cx="7315200" cy="457200"/>
+          <p:cNvPr id="57" name="Text 55"/>
+          <p:cNvSpPr/>
+          <p:nvPr/>
+        </p:nvSpPr>
+        <p:spPr>
+          <a:xfrm>
+            <a:off x="457200" y="4526280"/>
+            <a:ext cx="6400800" cy="566928"/>
           </a:xfrm>
           <a:prstGeom prst="rect">
             <a:avLst/>
@@ -4819,11 +5277,22 @@
           <a:bodyPr wrap="square" lIns="0" tIns="0" rIns="0" bIns="0" rtlCol="0" anchor="ctr"/>
           <a:lstStyle/>
           <a:p>
-            <a:pPr marL="0" indent="0" algn="l">
+            <a:pPr marL="0" indent="0">
               <a:buNone/>
             </a:pPr>
             <a:r>
-              <a:rPr lang="en-US" sz="1800" i="1" dirty="0">
+              <a:rPr lang="en-US" sz="1400" b="1">
+                <a:solidFill>
+                  <a:srgbClr val="FFFFFF"/>
+                </a:solidFill>
+                <a:latin typeface="Segoe UI" pitchFamily="34" charset="0"/>
+                <a:ea typeface="Segoe UI" pitchFamily="34" charset="-122"/>
+                <a:cs typeface="Segoe UI" pitchFamily="34" charset="-120"/>
+              </a:rPr>
+              <a:t>John Rea</a:t>
+            </a:r>
+            <a:r>
+              <a:rPr lang="en-US" sz="1400">
                 <a:solidFill>
                   <a:srgbClr val="D2D0CE"/>
                 </a:solidFill>
@@ -4831,22 +5300,22 @@
                 <a:ea typeface="Segoe UI" pitchFamily="34" charset="-122"/>
                 <a:cs typeface="Segoe UI" pitchFamily="34" charset="-120"/>
               </a:rPr>
-              <a:t>A Hands-On Training for Power Users</a:t>
-            </a:r>
-            <a:endParaRPr lang="en-US" sz="1800" dirty="0"/>
-          </a:p>
-        </p:txBody>
-      </p:sp>
-      <p:sp>
-        <p:nvSpPr>
-          <p:cNvPr id="57" name="Text 55"/>
-          <p:cNvSpPr/>
-          <p:nvPr/>
-        </p:nvSpPr>
-        <p:spPr>
-          <a:xfrm>
-            <a:off x="457200" y="4526280"/>
-            <a:ext cx="6400800" cy="566928"/>
+              <a:t>  |  SR Cloud Solution Architect</a:t>
+            </a:r>
+            <a:endParaRPr lang="en-US" sz="1400" dirty="0"/>
+          </a:p>
+        </p:txBody>
+      </p:sp>
+      <p:sp>
+        <p:nvSpPr>
+          <p:cNvPr id="58" name="Text 56"/>
+          <p:cNvSpPr/>
+          <p:nvPr/>
+        </p:nvSpPr>
+        <p:spPr>
+          <a:xfrm>
+            <a:off x="6858000" y="4526280"/>
+            <a:ext cx="2011680" cy="566928"/>
           </a:xfrm>
           <a:prstGeom prst="rect">
             <a:avLst/>
@@ -4858,61 +5327,11 @@
           <a:bodyPr wrap="square" lIns="0" tIns="0" rIns="0" bIns="0" rtlCol="0" anchor="ctr"/>
           <a:lstStyle/>
           <a:p>
-            <a:pPr marL="0" indent="0">
-              <a:buNone/>
-            </a:pPr>
-            <a:r>
-              <a:rPr lang="en-US" sz="1400" b="1" dirty="0">
-                <a:solidFill>
-                  <a:srgbClr val="FFFFFF"/>
-                </a:solidFill>
-                <a:latin typeface="Segoe UI" pitchFamily="34" charset="0"/>
-                <a:ea typeface="Segoe UI" pitchFamily="34" charset="-122"/>
-                <a:cs typeface="Segoe UI" pitchFamily="34" charset="-120"/>
-              </a:rPr>
-              <a:t>John Rea</a:t>
-            </a:r>
-            <a:r>
-              <a:rPr lang="en-US" sz="1400" dirty="0">
-                <a:solidFill>
-                  <a:srgbClr val="D2D0CE"/>
-                </a:solidFill>
-                <a:latin typeface="Segoe UI" pitchFamily="34" charset="0"/>
-                <a:ea typeface="Segoe UI" pitchFamily="34" charset="-122"/>
-                <a:cs typeface="Segoe UI" pitchFamily="34" charset="-120"/>
-              </a:rPr>
-              <a:t>  |  SR Cloud Solution Architect</a:t>
-            </a:r>
-            <a:endParaRPr lang="en-US" sz="1400" dirty="0"/>
-          </a:p>
-        </p:txBody>
-      </p:sp>
-      <p:sp>
-        <p:nvSpPr>
-          <p:cNvPr id="58" name="Text 56"/>
-          <p:cNvSpPr/>
-          <p:nvPr/>
-        </p:nvSpPr>
-        <p:spPr>
-          <a:xfrm>
-            <a:off x="6858000" y="4526280"/>
-            <a:ext cx="2011680" cy="566928"/>
-          </a:xfrm>
-          <a:prstGeom prst="rect">
-            <a:avLst/>
-          </a:prstGeom>
-          <a:noFill/>
-          <a:ln/>
-        </p:spPr>
-        <p:txBody>
-          <a:bodyPr wrap="square" lIns="0" tIns="0" rIns="0" bIns="0" rtlCol="0" anchor="ctr"/>
-          <a:lstStyle/>
-          <a:p>
             <a:pPr marL="0" indent="0" algn="r">
               <a:buNone/>
             </a:pPr>
             <a:r>
-              <a:rPr lang="en-US" sz="1300" dirty="0">
+              <a:rPr lang="en-US" sz="1300">
                 <a:solidFill>
                   <a:srgbClr val="D2D0CE"/>
                 </a:solidFill>
@@ -4929,7 +5348,7 @@
     </p:spTree>
   </p:cSld>
   <p:clrMapOvr>
-    <a:masterClrMapping/>
+    <a:overrideClrMapping bg1="lt1" tx1="dk1" bg2="lt2" tx2="dk2" accent1="accent1" accent2="accent2" accent3="accent3" accent4="accent4" accent5="accent5" accent6="accent6" hlink="hlink" folHlink="folHlink"/>
   </p:clrMapOvr>
 </p:sld>
 </file>
@@ -5016,7 +5435,7 @@
               <a:buNone/>
             </a:pPr>
             <a:r>
-              <a:rPr lang="en-US" sz="2200" b="1" dirty="0">
+              <a:rPr lang="en-US" sz="2200" b="1">
                 <a:solidFill>
                   <a:srgbClr val="FFFFFF"/>
                 </a:solidFill>
@@ -5150,7 +5569,7 @@
               <a:buNone/>
             </a:pPr>
             <a:r>
-              <a:rPr lang="en-US" sz="1300" b="1" dirty="0">
+              <a:rPr lang="en-US" sz="1300" b="1">
                 <a:solidFill>
                   <a:srgbClr val="FFFFFF"/>
                 </a:solidFill>
@@ -5189,7 +5608,7 @@
               <a:buNone/>
             </a:pPr>
             <a:r>
-              <a:rPr lang="en-US" sz="1400" b="1" dirty="0">
+              <a:rPr lang="en-US" sz="1400" b="1">
                 <a:solidFill>
                   <a:srgbClr val="201F1E"/>
                 </a:solidFill>
@@ -5228,7 +5647,7 @@
               <a:buNone/>
             </a:pPr>
             <a:r>
-              <a:rPr lang="en-US" sz="1200" dirty="0">
+              <a:rPr lang="en-US" sz="1200">
                 <a:solidFill>
                   <a:srgbClr val="605E5C"/>
                 </a:solidFill>
@@ -5338,7 +5757,7 @@
               <a:buNone/>
             </a:pPr>
             <a:r>
-              <a:rPr lang="en-US" sz="1300" b="1" dirty="0">
+              <a:rPr lang="en-US" sz="1300" b="1">
                 <a:solidFill>
                   <a:srgbClr val="FFFFFF"/>
                 </a:solidFill>
@@ -5377,7 +5796,7 @@
               <a:buNone/>
             </a:pPr>
             <a:r>
-              <a:rPr lang="en-US" sz="1400" b="1" dirty="0">
+              <a:rPr lang="en-US" sz="1400" b="1">
                 <a:solidFill>
                   <a:srgbClr val="201F1E"/>
                 </a:solidFill>
@@ -5416,7 +5835,7 @@
               <a:buNone/>
             </a:pPr>
             <a:r>
-              <a:rPr lang="en-US" sz="1200" dirty="0">
+              <a:rPr lang="en-US" sz="1200">
                 <a:solidFill>
                   <a:srgbClr val="605E5C"/>
                 </a:solidFill>
@@ -5526,7 +5945,7 @@
               <a:buNone/>
             </a:pPr>
             <a:r>
-              <a:rPr lang="en-US" sz="1300" b="1" dirty="0">
+              <a:rPr lang="en-US" sz="1300" b="1">
                 <a:solidFill>
                   <a:srgbClr val="FFFFFF"/>
                 </a:solidFill>
@@ -5565,7 +5984,7 @@
               <a:buNone/>
             </a:pPr>
             <a:r>
-              <a:rPr lang="en-US" sz="1400" b="1" dirty="0">
+              <a:rPr lang="en-US" sz="1400" b="1">
                 <a:solidFill>
                   <a:srgbClr val="201F1E"/>
                 </a:solidFill>
@@ -5604,7 +6023,7 @@
               <a:buNone/>
             </a:pPr>
             <a:r>
-              <a:rPr lang="en-US" sz="1200" dirty="0">
+              <a:rPr lang="en-US" sz="1200">
                 <a:solidFill>
                   <a:srgbClr val="605E5C"/>
                 </a:solidFill>
@@ -5714,7 +6133,7 @@
               <a:buNone/>
             </a:pPr>
             <a:r>
-              <a:rPr lang="en-US" sz="1300" b="1" dirty="0">
+              <a:rPr lang="en-US" sz="1300" b="1">
                 <a:solidFill>
                   <a:srgbClr val="FFFFFF"/>
                 </a:solidFill>
@@ -5753,7 +6172,7 @@
               <a:buNone/>
             </a:pPr>
             <a:r>
-              <a:rPr lang="en-US" sz="1400" b="1" dirty="0">
+              <a:rPr lang="en-US" sz="1400" b="1">
                 <a:solidFill>
                   <a:srgbClr val="201F1E"/>
                 </a:solidFill>
@@ -5792,7 +6211,7 @@
               <a:buNone/>
             </a:pPr>
             <a:r>
-              <a:rPr lang="en-US" sz="1200" dirty="0">
+              <a:rPr lang="en-US" sz="1200">
                 <a:solidFill>
                   <a:srgbClr val="605E5C"/>
                 </a:solidFill>
@@ -5919,7 +6338,7 @@
               <a:buNone/>
             </a:pPr>
             <a:r>
-              <a:rPr lang="en-US" sz="1200" b="1" dirty="0">
+              <a:rPr lang="en-US" sz="1200" b="1">
                 <a:solidFill>
                   <a:srgbClr val="7A5200"/>
                 </a:solidFill>
@@ -5930,7 +6349,7 @@
               <a:t>Pro Tip: </a:t>
             </a:r>
             <a:r>
-              <a:rPr lang="en-US" sz="1200" dirty="0">
+              <a:rPr lang="en-US" sz="1200">
                 <a:solidFill>
                   <a:srgbClr val="201F1E"/>
                 </a:solidFill>
@@ -6034,7 +6453,7 @@
               <a:buNone/>
             </a:pPr>
             <a:r>
-              <a:rPr lang="en-US" sz="2200" b="1" dirty="0">
+              <a:rPr lang="en-US" sz="2200" b="1">
                 <a:solidFill>
                   <a:srgbClr val="FFFFFF"/>
                 </a:solidFill>
@@ -6168,7 +6587,7 @@
               <a:buNone/>
             </a:pPr>
             <a:r>
-              <a:rPr lang="en-US" sz="1300" b="1" dirty="0">
+              <a:rPr lang="en-US" sz="1300" b="1">
                 <a:solidFill>
                   <a:srgbClr val="FFFFFF"/>
                 </a:solidFill>
@@ -6207,7 +6626,7 @@
               <a:buNone/>
             </a:pPr>
             <a:r>
-              <a:rPr lang="en-US" sz="1400" b="1" dirty="0">
+              <a:rPr lang="en-US" sz="1400" b="1">
                 <a:solidFill>
                   <a:srgbClr val="201F1E"/>
                 </a:solidFill>
@@ -6246,7 +6665,7 @@
               <a:buNone/>
             </a:pPr>
             <a:r>
-              <a:rPr lang="en-US" sz="1200" dirty="0">
+              <a:rPr lang="en-US" sz="1200">
                 <a:solidFill>
                   <a:srgbClr val="605E5C"/>
                 </a:solidFill>
@@ -6356,7 +6775,7 @@
               <a:buNone/>
             </a:pPr>
             <a:r>
-              <a:rPr lang="en-US" sz="1300" b="1" dirty="0">
+              <a:rPr lang="en-US" sz="1300" b="1">
                 <a:solidFill>
                   <a:srgbClr val="FFFFFF"/>
                 </a:solidFill>
@@ -6395,7 +6814,7 @@
               <a:buNone/>
             </a:pPr>
             <a:r>
-              <a:rPr lang="en-US" sz="1400" b="1" dirty="0">
+              <a:rPr lang="en-US" sz="1400" b="1">
                 <a:solidFill>
                   <a:srgbClr val="201F1E"/>
                 </a:solidFill>
@@ -6434,7 +6853,7 @@
               <a:buNone/>
             </a:pPr>
             <a:r>
-              <a:rPr lang="en-US" sz="1200" dirty="0">
+              <a:rPr lang="en-US" sz="1200">
                 <a:solidFill>
                   <a:srgbClr val="605E5C"/>
                 </a:solidFill>
@@ -6544,7 +6963,7 @@
               <a:buNone/>
             </a:pPr>
             <a:r>
-              <a:rPr lang="en-US" sz="1300" b="1" dirty="0">
+              <a:rPr lang="en-US" sz="1300" b="1">
                 <a:solidFill>
                   <a:srgbClr val="FFFFFF"/>
                 </a:solidFill>
@@ -6583,7 +7002,7 @@
               <a:buNone/>
             </a:pPr>
             <a:r>
-              <a:rPr lang="en-US" sz="1400" b="1" dirty="0">
+              <a:rPr lang="en-US" sz="1400" b="1">
                 <a:solidFill>
                   <a:srgbClr val="201F1E"/>
                 </a:solidFill>
@@ -6622,7 +7041,7 @@
               <a:buNone/>
             </a:pPr>
             <a:r>
-              <a:rPr lang="en-US" sz="1200" dirty="0">
+              <a:rPr lang="en-US" sz="1200">
                 <a:solidFill>
                   <a:srgbClr val="605E5C"/>
                 </a:solidFill>
@@ -6732,7 +7151,7 @@
               <a:buNone/>
             </a:pPr>
             <a:r>
-              <a:rPr lang="en-US" sz="1300" b="1" dirty="0">
+              <a:rPr lang="en-US" sz="1300" b="1">
                 <a:solidFill>
                   <a:srgbClr val="FFFFFF"/>
                 </a:solidFill>
@@ -6771,7 +7190,7 @@
               <a:buNone/>
             </a:pPr>
             <a:r>
-              <a:rPr lang="en-US" sz="1400" b="1" dirty="0">
+              <a:rPr lang="en-US" sz="1400" b="1">
                 <a:solidFill>
                   <a:srgbClr val="201F1E"/>
                 </a:solidFill>
@@ -6810,7 +7229,7 @@
               <a:buNone/>
             </a:pPr>
             <a:r>
-              <a:rPr lang="en-US" sz="1200" dirty="0">
+              <a:rPr lang="en-US" sz="1200">
                 <a:solidFill>
                   <a:srgbClr val="605E5C"/>
                 </a:solidFill>
@@ -6937,7 +7356,7 @@
               <a:buNone/>
             </a:pPr>
             <a:r>
-              <a:rPr lang="en-US" sz="1200" b="1" dirty="0">
+              <a:rPr lang="en-US" sz="1200" b="1">
                 <a:solidFill>
                   <a:srgbClr val="7A5200"/>
                 </a:solidFill>
@@ -6948,7 +7367,7 @@
               <a:t>Pro Tip: </a:t>
             </a:r>
             <a:r>
-              <a:rPr lang="en-US" sz="1200" dirty="0">
+              <a:rPr lang="en-US" sz="1200">
                 <a:solidFill>
                   <a:srgbClr val="201F1E"/>
                 </a:solidFill>
@@ -7052,7 +7471,7 @@
               <a:buNone/>
             </a:pPr>
             <a:r>
-              <a:rPr lang="en-US" sz="2200" b="1" dirty="0">
+              <a:rPr lang="en-US" sz="2200" b="1">
                 <a:solidFill>
                   <a:srgbClr val="FFFFFF"/>
                 </a:solidFill>
@@ -7186,7 +7605,7 @@
               <a:buNone/>
             </a:pPr>
             <a:r>
-              <a:rPr lang="en-US" sz="1300" b="1" dirty="0">
+              <a:rPr lang="en-US" sz="1300" b="1">
                 <a:solidFill>
                   <a:srgbClr val="FFFFFF"/>
                 </a:solidFill>
@@ -7225,7 +7644,7 @@
               <a:buNone/>
             </a:pPr>
             <a:r>
-              <a:rPr lang="en-US" sz="1400" b="1" dirty="0">
+              <a:rPr lang="en-US" sz="1400" b="1">
                 <a:solidFill>
                   <a:srgbClr val="201F1E"/>
                 </a:solidFill>
@@ -7264,7 +7683,7 @@
               <a:buNone/>
             </a:pPr>
             <a:r>
-              <a:rPr lang="en-US" sz="1200" dirty="0">
+              <a:rPr lang="en-US" sz="1200">
                 <a:solidFill>
                   <a:srgbClr val="605E5C"/>
                 </a:solidFill>
@@ -7374,7 +7793,7 @@
               <a:buNone/>
             </a:pPr>
             <a:r>
-              <a:rPr lang="en-US" sz="1300" b="1" dirty="0">
+              <a:rPr lang="en-US" sz="1300" b="1">
                 <a:solidFill>
                   <a:srgbClr val="FFFFFF"/>
                 </a:solidFill>
@@ -7413,7 +7832,7 @@
               <a:buNone/>
             </a:pPr>
             <a:r>
-              <a:rPr lang="en-US" sz="1400" b="1" dirty="0">
+              <a:rPr lang="en-US" sz="1400" b="1">
                 <a:solidFill>
                   <a:srgbClr val="201F1E"/>
                 </a:solidFill>
@@ -7452,7 +7871,7 @@
               <a:buNone/>
             </a:pPr>
             <a:r>
-              <a:rPr lang="en-US" sz="1200" dirty="0">
+              <a:rPr lang="en-US" sz="1200">
                 <a:solidFill>
                   <a:srgbClr val="605E5C"/>
                 </a:solidFill>
@@ -7562,7 +7981,7 @@
               <a:buNone/>
             </a:pPr>
             <a:r>
-              <a:rPr lang="en-US" sz="1300" b="1" dirty="0">
+              <a:rPr lang="en-US" sz="1300" b="1">
                 <a:solidFill>
                   <a:srgbClr val="FFFFFF"/>
                 </a:solidFill>
@@ -7601,7 +8020,7 @@
               <a:buNone/>
             </a:pPr>
             <a:r>
-              <a:rPr lang="en-US" sz="1400" b="1" dirty="0">
+              <a:rPr lang="en-US" sz="1400" b="1">
                 <a:solidFill>
                   <a:srgbClr val="201F1E"/>
                 </a:solidFill>
@@ -7640,7 +8059,7 @@
               <a:buNone/>
             </a:pPr>
             <a:r>
-              <a:rPr lang="en-US" sz="1200" dirty="0">
+              <a:rPr lang="en-US" sz="1200">
                 <a:solidFill>
                   <a:srgbClr val="605E5C"/>
                 </a:solidFill>
@@ -7750,7 +8169,7 @@
               <a:buNone/>
             </a:pPr>
             <a:r>
-              <a:rPr lang="en-US" sz="1300" b="1" dirty="0">
+              <a:rPr lang="en-US" sz="1300" b="1">
                 <a:solidFill>
                   <a:srgbClr val="FFFFFF"/>
                 </a:solidFill>
@@ -7789,7 +8208,7 @@
               <a:buNone/>
             </a:pPr>
             <a:r>
-              <a:rPr lang="en-US" sz="1400" b="1" dirty="0">
+              <a:rPr lang="en-US" sz="1400" b="1">
                 <a:solidFill>
                   <a:srgbClr val="201F1E"/>
                 </a:solidFill>
@@ -7828,7 +8247,7 @@
               <a:buNone/>
             </a:pPr>
             <a:r>
-              <a:rPr lang="en-US" sz="1200" dirty="0">
+              <a:rPr lang="en-US" sz="1200">
                 <a:solidFill>
                   <a:srgbClr val="605E5C"/>
                 </a:solidFill>
@@ -7955,7 +8374,7 @@
               <a:buNone/>
             </a:pPr>
             <a:r>
-              <a:rPr lang="en-US" sz="1200" b="1" dirty="0">
+              <a:rPr lang="en-US" sz="1200" b="1">
                 <a:solidFill>
                   <a:srgbClr val="7A5200"/>
                 </a:solidFill>
@@ -7966,7 +8385,7 @@
               <a:t>Pro Tip: </a:t>
             </a:r>
             <a:r>
-              <a:rPr lang="en-US" sz="1200" dirty="0">
+              <a:rPr lang="en-US" sz="1200">
                 <a:solidFill>
                   <a:srgbClr val="201F1E"/>
                 </a:solidFill>
@@ -8070,7 +8489,7 @@
               <a:buNone/>
             </a:pPr>
             <a:r>
-              <a:rPr lang="en-US" sz="2200" b="1" dirty="0">
+              <a:rPr lang="en-US" sz="2200" b="1">
                 <a:solidFill>
                   <a:srgbClr val="FFFFFF"/>
                 </a:solidFill>
@@ -8204,7 +8623,7 @@
               <a:buNone/>
             </a:pPr>
             <a:r>
-              <a:rPr lang="en-US" sz="1300" b="1" dirty="0">
+              <a:rPr lang="en-US" sz="1300" b="1">
                 <a:solidFill>
                   <a:srgbClr val="FFFFFF"/>
                 </a:solidFill>
@@ -8243,7 +8662,7 @@
               <a:buNone/>
             </a:pPr>
             <a:r>
-              <a:rPr lang="en-US" sz="1400" b="1" dirty="0">
+              <a:rPr lang="en-US" sz="1400" b="1">
                 <a:solidFill>
                   <a:srgbClr val="201F1E"/>
                 </a:solidFill>
@@ -8282,7 +8701,7 @@
               <a:buNone/>
             </a:pPr>
             <a:r>
-              <a:rPr lang="en-US" sz="1200" dirty="0">
+              <a:rPr lang="en-US" sz="1200">
                 <a:solidFill>
                   <a:srgbClr val="605E5C"/>
                 </a:solidFill>
@@ -8392,7 +8811,7 @@
               <a:buNone/>
             </a:pPr>
             <a:r>
-              <a:rPr lang="en-US" sz="1300" b="1" dirty="0">
+              <a:rPr lang="en-US" sz="1300" b="1">
                 <a:solidFill>
                   <a:srgbClr val="FFFFFF"/>
                 </a:solidFill>
@@ -8431,7 +8850,7 @@
               <a:buNone/>
             </a:pPr>
             <a:r>
-              <a:rPr lang="en-US" sz="1400" b="1" dirty="0">
+              <a:rPr lang="en-US" sz="1400" b="1">
                 <a:solidFill>
                   <a:srgbClr val="201F1E"/>
                 </a:solidFill>
@@ -8470,7 +8889,7 @@
               <a:buNone/>
             </a:pPr>
             <a:r>
-              <a:rPr lang="en-US" sz="1200" dirty="0">
+              <a:rPr lang="en-US" sz="1200">
                 <a:solidFill>
                   <a:srgbClr val="605E5C"/>
                 </a:solidFill>
@@ -8580,7 +8999,7 @@
               <a:buNone/>
             </a:pPr>
             <a:r>
-              <a:rPr lang="en-US" sz="1300" b="1" dirty="0">
+              <a:rPr lang="en-US" sz="1300" b="1">
                 <a:solidFill>
                   <a:srgbClr val="FFFFFF"/>
                 </a:solidFill>
@@ -8619,7 +9038,7 @@
               <a:buNone/>
             </a:pPr>
             <a:r>
-              <a:rPr lang="en-US" sz="1400" b="1" dirty="0">
+              <a:rPr lang="en-US" sz="1400" b="1">
                 <a:solidFill>
                   <a:srgbClr val="201F1E"/>
                 </a:solidFill>
@@ -8658,7 +9077,7 @@
               <a:buNone/>
             </a:pPr>
             <a:r>
-              <a:rPr lang="en-US" sz="1200" dirty="0">
+              <a:rPr lang="en-US" sz="1200">
                 <a:solidFill>
                   <a:srgbClr val="605E5C"/>
                 </a:solidFill>
@@ -8768,7 +9187,7 @@
               <a:buNone/>
             </a:pPr>
             <a:r>
-              <a:rPr lang="en-US" sz="1300" b="1" dirty="0">
+              <a:rPr lang="en-US" sz="1300" b="1">
                 <a:solidFill>
                   <a:srgbClr val="FFFFFF"/>
                 </a:solidFill>
@@ -8807,7 +9226,7 @@
               <a:buNone/>
             </a:pPr>
             <a:r>
-              <a:rPr lang="en-US" sz="1400" b="1" dirty="0">
+              <a:rPr lang="en-US" sz="1400" b="1">
                 <a:solidFill>
                   <a:srgbClr val="201F1E"/>
                 </a:solidFill>
@@ -8846,7 +9265,7 @@
               <a:buNone/>
             </a:pPr>
             <a:r>
-              <a:rPr lang="en-US" sz="1200" dirty="0">
+              <a:rPr lang="en-US" sz="1200">
                 <a:solidFill>
                   <a:srgbClr val="605E5C"/>
                 </a:solidFill>
@@ -8973,7 +9392,7 @@
               <a:buNone/>
             </a:pPr>
             <a:r>
-              <a:rPr lang="en-US" sz="1200" b="1" dirty="0">
+              <a:rPr lang="en-US" sz="1200" b="1">
                 <a:solidFill>
                   <a:srgbClr val="7A5200"/>
                 </a:solidFill>
@@ -8984,7 +9403,7 @@
               <a:t>Pro Tip: </a:t>
             </a:r>
             <a:r>
-              <a:rPr lang="en-US" sz="1200" dirty="0">
+              <a:rPr lang="en-US" sz="1200">
                 <a:solidFill>
                   <a:srgbClr val="201F1E"/>
                 </a:solidFill>
@@ -9087,19 +9506,6 @@
             <a:pPr marL="0" indent="0" algn="l">
               <a:buNone/>
             </a:pPr>
-            <a:r>
-              <a:rPr lang="en-US" sz="14000" b="1" dirty="0">
-                <a:solidFill>
-                  <a:srgbClr val="0078D4">
-                    <a:alpha val="50000"/>
-                  </a:srgbClr>
-                </a:solidFill>
-                <a:latin typeface="Segoe UI" pitchFamily="34" charset="0"/>
-                <a:ea typeface="Segoe UI" pitchFamily="34" charset="-122"/>
-                <a:cs typeface="Segoe UI" pitchFamily="34" charset="-120"/>
-              </a:rPr>
-              <a:t>03</a:t>
-            </a:r>
             <a:endParaRPr lang="en-US" sz="14000" dirty="0"/>
           </a:p>
         </p:txBody>
@@ -9153,7 +9559,7 @@
               <a:buNone/>
             </a:pPr>
             <a:r>
-              <a:rPr lang="en-US" sz="3800" b="1" dirty="0">
+              <a:rPr lang="en-US" sz="3800" b="1">
                 <a:solidFill>
                   <a:srgbClr val="FFFFFF"/>
                 </a:solidFill>
@@ -9224,7 +9630,7 @@
               <a:buNone/>
             </a:pPr>
             <a:r>
-              <a:rPr lang="en-US" sz="1800" dirty="0">
+              <a:rPr lang="en-US" sz="1800">
                 <a:solidFill>
                   <a:srgbClr val="D2D0CE"/>
                 </a:solidFill>
@@ -9295,7 +9701,7 @@
               <a:buNone/>
             </a:pPr>
             <a:r>
-              <a:rPr lang="en-US" sz="1400" b="1" dirty="0">
+              <a:rPr lang="en-US" sz="1400" b="1">
                 <a:solidFill>
                   <a:srgbClr val="FFFFFF"/>
                 </a:solidFill>
@@ -9399,7 +9805,7 @@
               <a:buNone/>
             </a:pPr>
             <a:r>
-              <a:rPr lang="en-US" sz="2200" b="1" dirty="0">
+              <a:rPr lang="en-US" sz="2200" b="1">
                 <a:solidFill>
                   <a:srgbClr val="FFFFFF"/>
                 </a:solidFill>
@@ -9533,7 +9939,7 @@
               <a:buNone/>
             </a:pPr>
             <a:r>
-              <a:rPr lang="en-US" sz="1100" b="1" dirty="0">
+              <a:rPr lang="en-US" sz="1100" b="1">
                 <a:solidFill>
                   <a:srgbClr val="D2D0CE"/>
                 </a:solidFill>
@@ -9596,7 +10002,7 @@
               <a:buNone/>
             </a:pPr>
             <a:r>
-              <a:rPr lang="en-US" sz="1700" b="1" dirty="0">
+              <a:rPr lang="en-US" sz="1700" b="1">
                 <a:solidFill>
                   <a:srgbClr val="FFFFFF"/>
                 </a:solidFill>
@@ -9635,7 +10041,7 @@
               <a:buNone/>
             </a:pPr>
             <a:r>
-              <a:rPr lang="en-US" sz="1200" dirty="0">
+              <a:rPr lang="en-US" sz="1200">
                 <a:solidFill>
                   <a:srgbClr val="D2D0CE"/>
                 </a:solidFill>
@@ -9745,7 +10151,7 @@
               <a:buNone/>
             </a:pPr>
             <a:r>
-              <a:rPr lang="en-US" sz="1100" b="1" dirty="0">
+              <a:rPr lang="en-US" sz="1100" b="1">
                 <a:solidFill>
                   <a:srgbClr val="D2D0CE"/>
                 </a:solidFill>
@@ -9808,7 +10214,7 @@
               <a:buNone/>
             </a:pPr>
             <a:r>
-              <a:rPr lang="en-US" sz="1700" b="1" dirty="0">
+              <a:rPr lang="en-US" sz="1700" b="1">
                 <a:solidFill>
                   <a:srgbClr val="FFFFFF"/>
                 </a:solidFill>
@@ -9847,7 +10253,7 @@
               <a:buNone/>
             </a:pPr>
             <a:r>
-              <a:rPr lang="en-US" sz="1200" dirty="0">
+              <a:rPr lang="en-US" sz="1200">
                 <a:solidFill>
                   <a:srgbClr val="D2D0CE"/>
                 </a:solidFill>
@@ -9957,7 +10363,7 @@
               <a:buNone/>
             </a:pPr>
             <a:r>
-              <a:rPr lang="en-US" sz="1100" b="1" dirty="0">
+              <a:rPr lang="en-US" sz="1100" b="1">
                 <a:solidFill>
                   <a:srgbClr val="D2D0CE"/>
                 </a:solidFill>
@@ -10020,7 +10426,7 @@
               <a:buNone/>
             </a:pPr>
             <a:r>
-              <a:rPr lang="en-US" sz="1700" b="1" dirty="0">
+              <a:rPr lang="en-US" sz="1700" b="1">
                 <a:solidFill>
                   <a:srgbClr val="FFFFFF"/>
                 </a:solidFill>
@@ -10059,7 +10465,7 @@
               <a:buNone/>
             </a:pPr>
             <a:r>
-              <a:rPr lang="en-US" sz="1200" dirty="0">
+              <a:rPr lang="en-US" sz="1200">
                 <a:solidFill>
                   <a:srgbClr val="D2D0CE"/>
                 </a:solidFill>
@@ -10169,7 +10575,7 @@
               <a:buNone/>
             </a:pPr>
             <a:r>
-              <a:rPr lang="en-US" sz="1100" b="1" dirty="0">
+              <a:rPr lang="en-US" sz="1100" b="1">
                 <a:solidFill>
                   <a:srgbClr val="D2D0CE"/>
                 </a:solidFill>
@@ -10232,7 +10638,7 @@
               <a:buNone/>
             </a:pPr>
             <a:r>
-              <a:rPr lang="en-US" sz="1700" b="1" dirty="0">
+              <a:rPr lang="en-US" sz="1700" b="1">
                 <a:solidFill>
                   <a:srgbClr val="FFFFFF"/>
                 </a:solidFill>
@@ -10271,7 +10677,7 @@
               <a:buNone/>
             </a:pPr>
             <a:r>
-              <a:rPr lang="en-US" sz="1200" dirty="0">
+              <a:rPr lang="en-US" sz="1200">
                 <a:solidFill>
                   <a:srgbClr val="D2D0CE"/>
                 </a:solidFill>
@@ -10375,7 +10781,7 @@
               <a:buNone/>
             </a:pPr>
             <a:r>
-              <a:rPr lang="en-US" sz="2200" b="1" dirty="0">
+              <a:rPr lang="en-US" sz="2200" b="1">
                 <a:solidFill>
                   <a:srgbClr val="FFFFFF"/>
                 </a:solidFill>
@@ -10470,7 +10876,7 @@
               <a:buNone/>
             </a:pPr>
             <a:r>
-              <a:rPr lang="en-US" sz="1300" b="1" dirty="0">
+              <a:rPr lang="en-US" sz="1300" b="1">
                 <a:solidFill>
                   <a:srgbClr val="0078D4"/>
                 </a:solidFill>
@@ -10481,7 +10887,7 @@
               <a:t>Scenario: </a:t>
             </a:r>
             <a:r>
-              <a:rPr lang="en-US" sz="1300" dirty="0">
+              <a:rPr lang="en-US" sz="1300">
                 <a:solidFill>
                   <a:srgbClr val="201F1E"/>
                 </a:solidFill>
@@ -10552,7 +10958,7 @@
               <a:buNone/>
             </a:pPr>
             <a:r>
-              <a:rPr lang="en-US" sz="1000" b="1" dirty="0">
+              <a:rPr lang="en-US" sz="1000" b="1">
                 <a:solidFill>
                   <a:srgbClr val="FFFFFF"/>
                 </a:solidFill>
@@ -10591,7 +10997,7 @@
               <a:buNone/>
             </a:pPr>
             <a:r>
-              <a:rPr lang="en-US" sz="1000" b="1" dirty="0">
+              <a:rPr lang="en-US" sz="1000" b="1">
                 <a:solidFill>
                   <a:srgbClr val="0078D4"/>
                 </a:solidFill>
@@ -10662,7 +11068,7 @@
               <a:buNone/>
             </a:pPr>
             <a:r>
-              <a:rPr lang="en-US" sz="1200" dirty="0">
+              <a:rPr lang="en-US" sz="1200">
                 <a:solidFill>
                   <a:srgbClr val="D4D4D4"/>
                 </a:solidFill>
@@ -10765,7 +11171,7 @@
               <a:buNone/>
             </a:pPr>
             <a:r>
-              <a:rPr lang="en-US" sz="1100" b="1" dirty="0">
+              <a:rPr lang="en-US" sz="1100" b="1">
                 <a:solidFill>
                   <a:srgbClr val="1E8449"/>
                 </a:solidFill>
@@ -10808,7 +11214,7 @@
               <a:buChar char="•"/>
             </a:pPr>
             <a:r>
-              <a:rPr lang="en-US" sz="1100" dirty="0">
+              <a:rPr lang="en-US" sz="1100">
                 <a:solidFill>
                   <a:srgbClr val="201F1E"/>
                 </a:solidFill>
@@ -10818,7 +11224,7 @@
               </a:rPr>
               <a:t>Urgent items surfaced immediately — no inbox scrolling</a:t>
             </a:r>
-            <a:endParaRPr lang="en-US" sz="1100" dirty="0"/>
+            <a:endParaRPr lang="en-US" sz="1100"/>
           </a:p>
           <a:p>
             <a:pPr marL="342900" indent="-342900">
@@ -10829,7 +11235,7 @@
               <a:buChar char="•"/>
             </a:pPr>
             <a:r>
-              <a:rPr lang="en-US" sz="1100" dirty="0">
+              <a:rPr lang="en-US" sz="1100">
                 <a:solidFill>
                   <a:srgbClr val="201F1E"/>
                 </a:solidFill>
@@ -10839,7 +11245,7 @@
               </a:rPr>
               <a:t>Action items extracted and listed by priority</a:t>
             </a:r>
-            <a:endParaRPr lang="en-US" sz="1100" dirty="0"/>
+            <a:endParaRPr lang="en-US" sz="1100"/>
           </a:p>
           <a:p>
             <a:pPr marL="342900" indent="-342900">
@@ -10850,7 +11256,7 @@
               <a:buChar char="•"/>
             </a:pPr>
             <a:r>
-              <a:rPr lang="en-US" sz="1100" dirty="0">
+              <a:rPr lang="en-US" sz="1100">
                 <a:solidFill>
                   <a:srgbClr val="201F1E"/>
                 </a:solidFill>
@@ -10860,7 +11266,7 @@
               </a:rPr>
               <a:t>Low-priority threads identified for bulk archive</a:t>
             </a:r>
-            <a:endParaRPr lang="en-US" sz="1100" dirty="0"/>
+            <a:endParaRPr lang="en-US" sz="1100"/>
           </a:p>
           <a:p>
             <a:pPr marL="342900" indent="-342900">
@@ -10871,7 +11277,7 @@
               <a:buChar char="•"/>
             </a:pPr>
             <a:r>
-              <a:rPr lang="en-US" sz="1100" dirty="0">
+              <a:rPr lang="en-US" sz="1100">
                 <a:solidFill>
                   <a:srgbClr val="201F1E"/>
                 </a:solidFill>
@@ -10975,7 +11381,7 @@
               <a:buNone/>
             </a:pPr>
             <a:r>
-              <a:rPr lang="en-US" sz="2200" b="1" dirty="0">
+              <a:rPr lang="en-US" sz="2200" b="1">
                 <a:solidFill>
                   <a:srgbClr val="FFFFFF"/>
                 </a:solidFill>
@@ -11070,7 +11476,7 @@
               <a:buNone/>
             </a:pPr>
             <a:r>
-              <a:rPr lang="en-US" sz="1300" b="1" dirty="0">
+              <a:rPr lang="en-US" sz="1300" b="1">
                 <a:solidFill>
                   <a:srgbClr val="0078D4"/>
                 </a:solidFill>
@@ -11081,7 +11487,7 @@
               <a:t>Scenario: </a:t>
             </a:r>
             <a:r>
-              <a:rPr lang="en-US" sz="1300" dirty="0">
+              <a:rPr lang="en-US" sz="1300">
                 <a:solidFill>
                   <a:srgbClr val="201F1E"/>
                 </a:solidFill>
@@ -11152,7 +11558,7 @@
               <a:buNone/>
             </a:pPr>
             <a:r>
-              <a:rPr lang="en-US" sz="1000" b="1" dirty="0">
+              <a:rPr lang="en-US" sz="1000" b="1">
                 <a:solidFill>
                   <a:srgbClr val="FFFFFF"/>
                 </a:solidFill>
@@ -11191,7 +11597,7 @@
               <a:buNone/>
             </a:pPr>
             <a:r>
-              <a:rPr lang="en-US" sz="1000" b="1" dirty="0">
+              <a:rPr lang="en-US" sz="1000" b="1">
                 <a:solidFill>
                   <a:srgbClr val="0078D4"/>
                 </a:solidFill>
@@ -11262,7 +11668,7 @@
               <a:buNone/>
             </a:pPr>
             <a:r>
-              <a:rPr lang="en-US" sz="1200" dirty="0">
+              <a:rPr lang="en-US" sz="1200">
                 <a:solidFill>
                   <a:srgbClr val="D4D4D4"/>
                 </a:solidFill>
@@ -11365,7 +11771,7 @@
               <a:buNone/>
             </a:pPr>
             <a:r>
-              <a:rPr lang="en-US" sz="1100" b="1" dirty="0">
+              <a:rPr lang="en-US" sz="1100" b="1">
                 <a:solidFill>
                   <a:srgbClr val="1E8449"/>
                 </a:solidFill>
@@ -11408,7 +11814,7 @@
               <a:buChar char="•"/>
             </a:pPr>
             <a:r>
-              <a:rPr lang="en-US" sz="1100" dirty="0">
+              <a:rPr lang="en-US" sz="1100">
                 <a:solidFill>
                   <a:srgbClr val="201F1E"/>
                 </a:solidFill>
@@ -11418,7 +11824,7 @@
               </a:rPr>
               <a:t>5-bullet executive brief ready in under 60 seconds</a:t>
             </a:r>
-            <a:endParaRPr lang="en-US" sz="1100" dirty="0"/>
+            <a:endParaRPr lang="en-US" sz="1100"/>
           </a:p>
           <a:p>
             <a:pPr marL="342900" indent="-342900">
@@ -11429,7 +11835,7 @@
               <a:buChar char="•"/>
             </a:pPr>
             <a:r>
-              <a:rPr lang="en-US" sz="1100" dirty="0">
+              <a:rPr lang="en-US" sz="1100">
                 <a:solidFill>
                   <a:srgbClr val="201F1E"/>
                 </a:solidFill>
@@ -11439,7 +11845,7 @@
               </a:rPr>
               <a:t>Risks and open items surfaced from across channels</a:t>
             </a:r>
-            <a:endParaRPr lang="en-US" sz="1100" dirty="0"/>
+            <a:endParaRPr lang="en-US" sz="1100"/>
           </a:p>
           <a:p>
             <a:pPr marL="342900" indent="-342900">
@@ -11450,7 +11856,7 @@
               <a:buChar char="•"/>
             </a:pPr>
             <a:r>
-              <a:rPr lang="en-US" sz="1100" dirty="0">
+              <a:rPr lang="en-US" sz="1100">
                 <a:solidFill>
                   <a:srgbClr val="201F1E"/>
                 </a:solidFill>
@@ -11460,7 +11866,7 @@
               </a:rPr>
               <a:t>You walk in prepared — not scrambling for context</a:t>
             </a:r>
-            <a:endParaRPr lang="en-US" sz="1100" dirty="0"/>
+            <a:endParaRPr lang="en-US" sz="1100"/>
           </a:p>
           <a:p>
             <a:pPr marL="342900" indent="-342900">
@@ -11471,7 +11877,7 @@
               <a:buChar char="•"/>
             </a:pPr>
             <a:r>
-              <a:rPr lang="en-US" sz="1100" dirty="0">
+              <a:rPr lang="en-US" sz="1100">
                 <a:solidFill>
                   <a:srgbClr val="201F1E"/>
                 </a:solidFill>
@@ -11575,7 +11981,7 @@
               <a:buNone/>
             </a:pPr>
             <a:r>
-              <a:rPr lang="en-US" sz="2200" b="1" dirty="0">
+              <a:rPr lang="en-US" sz="2200" b="1">
                 <a:solidFill>
                   <a:srgbClr val="FFFFFF"/>
                 </a:solidFill>
@@ -11670,7 +12076,7 @@
               <a:buNone/>
             </a:pPr>
             <a:r>
-              <a:rPr lang="en-US" sz="1300" b="1" dirty="0">
+              <a:rPr lang="en-US" sz="1300" b="1">
                 <a:solidFill>
                   <a:srgbClr val="0078D4"/>
                 </a:solidFill>
@@ -11681,7 +12087,7 @@
               <a:t>Scenario: </a:t>
             </a:r>
             <a:r>
-              <a:rPr lang="en-US" sz="1300" dirty="0">
+              <a:rPr lang="en-US" sz="1300">
                 <a:solidFill>
                   <a:srgbClr val="201F1E"/>
                 </a:solidFill>
@@ -11752,7 +12158,7 @@
               <a:buNone/>
             </a:pPr>
             <a:r>
-              <a:rPr lang="en-US" sz="1000" b="1" dirty="0">
+              <a:rPr lang="en-US" sz="1000" b="1">
                 <a:solidFill>
                   <a:srgbClr val="FFFFFF"/>
                 </a:solidFill>
@@ -11791,7 +12197,7 @@
               <a:buNone/>
             </a:pPr>
             <a:r>
-              <a:rPr lang="en-US" sz="1000" b="1" dirty="0">
+              <a:rPr lang="en-US" sz="1000" b="1">
                 <a:solidFill>
                   <a:srgbClr val="0078D4"/>
                 </a:solidFill>
@@ -11862,7 +12268,7 @@
               <a:buNone/>
             </a:pPr>
             <a:r>
-              <a:rPr lang="en-US" sz="1200" dirty="0">
+              <a:rPr lang="en-US" sz="1200">
                 <a:solidFill>
                   <a:srgbClr val="D4D4D4"/>
                 </a:solidFill>
@@ -11965,7 +12371,7 @@
               <a:buNone/>
             </a:pPr>
             <a:r>
-              <a:rPr lang="en-US" sz="1100" b="1" dirty="0">
+              <a:rPr lang="en-US" sz="1100" b="1">
                 <a:solidFill>
                   <a:srgbClr val="1E8449"/>
                 </a:solidFill>
@@ -12008,7 +12414,7 @@
               <a:buChar char="•"/>
             </a:pPr>
             <a:r>
-              <a:rPr lang="en-US" sz="1100" dirty="0">
+              <a:rPr lang="en-US" sz="1100">
                 <a:solidFill>
                   <a:srgbClr val="201F1E"/>
                 </a:solidFill>
@@ -12018,7 +12424,7 @@
               </a:rPr>
               <a:t>Full draft generated in seconds — grounded in your files</a:t>
             </a:r>
-            <a:endParaRPr lang="en-US" sz="1100" dirty="0"/>
+            <a:endParaRPr lang="en-US" sz="1100"/>
           </a:p>
           <a:p>
             <a:pPr marL="342900" indent="-342900">
@@ -12029,7 +12435,7 @@
               <a:buChar char="•"/>
             </a:pPr>
             <a:r>
-              <a:rPr lang="en-US" sz="1100" dirty="0">
+              <a:rPr lang="en-US" sz="1100">
                 <a:solidFill>
                   <a:srgbClr val="201F1E"/>
                 </a:solidFill>
@@ -12039,7 +12445,7 @@
               </a:rPr>
               <a:t>Proper structure: status, blockers, next steps</a:t>
             </a:r>
-            <a:endParaRPr lang="en-US" sz="1100" dirty="0"/>
+            <a:endParaRPr lang="en-US" sz="1100"/>
           </a:p>
           <a:p>
             <a:pPr marL="342900" indent="-342900">
@@ -12050,7 +12456,7 @@
               <a:buChar char="•"/>
             </a:pPr>
             <a:r>
-              <a:rPr lang="en-US" sz="1100" dirty="0">
+              <a:rPr lang="en-US" sz="1100">
                 <a:solidFill>
                   <a:srgbClr val="201F1E"/>
                 </a:solidFill>
@@ -12060,7 +12466,7 @@
               </a:rPr>
               <a:t>VP-ready tone applied automatically</a:t>
             </a:r>
-            <a:endParaRPr lang="en-US" sz="1100" dirty="0"/>
+            <a:endParaRPr lang="en-US" sz="1100"/>
           </a:p>
           <a:p>
             <a:pPr marL="342900" indent="-342900">
@@ -12071,7 +12477,7 @@
               <a:buChar char="•"/>
             </a:pPr>
             <a:r>
-              <a:rPr lang="en-US" sz="1100" dirty="0">
+              <a:rPr lang="en-US" sz="1100">
                 <a:solidFill>
                   <a:srgbClr val="201F1E"/>
                 </a:solidFill>
@@ -12175,7 +12581,7 @@
               <a:buNone/>
             </a:pPr>
             <a:r>
-              <a:rPr lang="en-US" sz="2200" b="1" dirty="0">
+              <a:rPr lang="en-US" sz="2200" b="1">
                 <a:solidFill>
                   <a:srgbClr val="FFFFFF"/>
                 </a:solidFill>
@@ -12270,7 +12676,7 @@
               <a:buNone/>
             </a:pPr>
             <a:r>
-              <a:rPr lang="en-US" sz="1300" b="1" dirty="0">
+              <a:rPr lang="en-US" sz="1300" b="1">
                 <a:solidFill>
                   <a:srgbClr val="0078D4"/>
                 </a:solidFill>
@@ -12281,7 +12687,7 @@
               <a:t>Scenario: </a:t>
             </a:r>
             <a:r>
-              <a:rPr lang="en-US" sz="1300" dirty="0">
+              <a:rPr lang="en-US" sz="1300">
                 <a:solidFill>
                   <a:srgbClr val="201F1E"/>
                 </a:solidFill>
@@ -12352,7 +12758,7 @@
               <a:buNone/>
             </a:pPr>
             <a:r>
-              <a:rPr lang="en-US" sz="1000" b="1" dirty="0">
+              <a:rPr lang="en-US" sz="1000" b="1">
                 <a:solidFill>
                   <a:srgbClr val="FFFFFF"/>
                 </a:solidFill>
@@ -12391,7 +12797,7 @@
               <a:buNone/>
             </a:pPr>
             <a:r>
-              <a:rPr lang="en-US" sz="1000" b="1" dirty="0">
+              <a:rPr lang="en-US" sz="1000" b="1">
                 <a:solidFill>
                   <a:srgbClr val="0078D4"/>
                 </a:solidFill>
@@ -12462,7 +12868,7 @@
               <a:buNone/>
             </a:pPr>
             <a:r>
-              <a:rPr lang="en-US" sz="1200" dirty="0">
+              <a:rPr lang="en-US" sz="1200">
                 <a:solidFill>
                   <a:srgbClr val="D4D4D4"/>
                 </a:solidFill>
@@ -12565,7 +12971,7 @@
               <a:buNone/>
             </a:pPr>
             <a:r>
-              <a:rPr lang="en-US" sz="1100" b="1" dirty="0">
+              <a:rPr lang="en-US" sz="1100" b="1">
                 <a:solidFill>
                   <a:srgbClr val="1E8449"/>
                 </a:solidFill>
@@ -12608,7 +13014,7 @@
               <a:buChar char="•"/>
             </a:pPr>
             <a:r>
-              <a:rPr lang="en-US" sz="1100" dirty="0">
+              <a:rPr lang="en-US" sz="1100">
                 <a:solidFill>
                   <a:srgbClr val="201F1E"/>
                 </a:solidFill>
@@ -12618,7 +13024,7 @@
               </a:rPr>
               <a:t>Underperforming regions identified instantly</a:t>
             </a:r>
-            <a:endParaRPr lang="en-US" sz="1100" dirty="0"/>
+            <a:endParaRPr lang="en-US" sz="1100"/>
           </a:p>
           <a:p>
             <a:pPr marL="342900" indent="-342900">
@@ -12629,7 +13035,7 @@
               <a:buChar char="•"/>
             </a:pPr>
             <a:r>
-              <a:rPr lang="en-US" sz="1100" dirty="0">
+              <a:rPr lang="en-US" sz="1100">
                 <a:solidFill>
                   <a:srgbClr val="201F1E"/>
                 </a:solidFill>
@@ -12639,7 +13045,7 @@
               </a:rPr>
               <a:t>YoY trend analysis with natural language explanation</a:t>
             </a:r>
-            <a:endParaRPr lang="en-US" sz="1100" dirty="0"/>
+            <a:endParaRPr lang="en-US" sz="1100"/>
           </a:p>
           <a:p>
             <a:pPr marL="342900" indent="-342900">
@@ -12650,7 +13056,7 @@
               <a:buChar char="•"/>
             </a:pPr>
             <a:r>
-              <a:rPr lang="en-US" sz="1100" dirty="0">
+              <a:rPr lang="en-US" sz="1100">
                 <a:solidFill>
                   <a:srgbClr val="201F1E"/>
                 </a:solidFill>
@@ -12660,7 +13066,7 @@
               </a:rPr>
               <a:t>Chart recommendation matched to exec audience</a:t>
             </a:r>
-            <a:endParaRPr lang="en-US" sz="1100" dirty="0"/>
+            <a:endParaRPr lang="en-US" sz="1100"/>
           </a:p>
           <a:p>
             <a:pPr marL="342900" indent="-342900">
@@ -12671,7 +13077,7 @@
               <a:buChar char="•"/>
             </a:pPr>
             <a:r>
-              <a:rPr lang="en-US" sz="1100" dirty="0">
+              <a:rPr lang="en-US" sz="1100">
                 <a:solidFill>
                   <a:srgbClr val="201F1E"/>
                 </a:solidFill>
@@ -12775,7 +13181,7 @@
               <a:buNone/>
             </a:pPr>
             <a:r>
-              <a:rPr lang="en-US" sz="2200" b="1" dirty="0">
+              <a:rPr lang="en-US" sz="2200" b="1">
                 <a:solidFill>
                   <a:srgbClr val="FFFFFF"/>
                 </a:solidFill>
@@ -12902,7 +13308,7 @@
               <a:buNone/>
             </a:pPr>
             <a:r>
-              <a:rPr lang="en-US" sz="1100" b="1" dirty="0">
+              <a:rPr lang="en-US" sz="1100" b="1">
                 <a:solidFill>
                   <a:srgbClr val="FFFFFF"/>
                 </a:solidFill>
@@ -12940,17 +13346,6 @@
             <a:pPr marL="0" indent="0" algn="l">
               <a:buNone/>
             </a:pPr>
-            <a:r>
-              <a:rPr lang="en-US" sz="1300" b="1" dirty="0">
-                <a:solidFill>
-                  <a:srgbClr val="0078D4"/>
-                </a:solidFill>
-                <a:latin typeface="Segoe UI" pitchFamily="34" charset="0"/>
-                <a:ea typeface="Segoe UI" pitchFamily="34" charset="-122"/>
-                <a:cs typeface="Segoe UI" pitchFamily="34" charset="-120"/>
-              </a:rPr>
-              <a:t>0:00 – 0:15</a:t>
-            </a:r>
             <a:endParaRPr lang="en-US" sz="1300" dirty="0"/>
           </a:p>
         </p:txBody>
@@ -12980,7 +13375,7 @@
               <a:buNone/>
             </a:pPr>
             <a:r>
-              <a:rPr lang="en-US" sz="1400" dirty="0">
+              <a:rPr lang="en-US" sz="1400">
                 <a:solidFill>
                   <a:srgbClr val="201F1E"/>
                 </a:solidFill>
@@ -13083,7 +13478,7 @@
               <a:buNone/>
             </a:pPr>
             <a:r>
-              <a:rPr lang="en-US" sz="1100" b="1" dirty="0">
+              <a:rPr lang="en-US" sz="1100" b="1">
                 <a:solidFill>
                   <a:srgbClr val="FFFFFF"/>
                 </a:solidFill>
@@ -13121,17 +13516,6 @@
             <a:pPr marL="0" indent="0" algn="l">
               <a:buNone/>
             </a:pPr>
-            <a:r>
-              <a:rPr lang="en-US" sz="1300" b="1" dirty="0">
-                <a:solidFill>
-                  <a:srgbClr val="0078D4"/>
-                </a:solidFill>
-                <a:latin typeface="Segoe UI" pitchFamily="34" charset="0"/>
-                <a:ea typeface="Segoe UI" pitchFamily="34" charset="-122"/>
-                <a:cs typeface="Segoe UI" pitchFamily="34" charset="-120"/>
-              </a:rPr>
-              <a:t>0:15 – 0:25</a:t>
-            </a:r>
             <a:endParaRPr lang="en-US" sz="1300" dirty="0"/>
           </a:p>
         </p:txBody>
@@ -13161,7 +13545,7 @@
               <a:buNone/>
             </a:pPr>
             <a:r>
-              <a:rPr lang="en-US" sz="1400" dirty="0">
+              <a:rPr lang="en-US" sz="1400">
                 <a:solidFill>
                   <a:srgbClr val="201F1E"/>
                 </a:solidFill>
@@ -13264,7 +13648,7 @@
               <a:buNone/>
             </a:pPr>
             <a:r>
-              <a:rPr lang="en-US" sz="1100" b="1" dirty="0">
+              <a:rPr lang="en-US" sz="1100" b="1">
                 <a:solidFill>
                   <a:srgbClr val="FFFFFF"/>
                 </a:solidFill>
@@ -13302,17 +13686,6 @@
             <a:pPr marL="0" indent="0" algn="l">
               <a:buNone/>
             </a:pPr>
-            <a:r>
-              <a:rPr lang="en-US" sz="1300" b="1" dirty="0">
-                <a:solidFill>
-                  <a:srgbClr val="0078D4"/>
-                </a:solidFill>
-                <a:latin typeface="Segoe UI" pitchFamily="34" charset="0"/>
-                <a:ea typeface="Segoe UI" pitchFamily="34" charset="-122"/>
-                <a:cs typeface="Segoe UI" pitchFamily="34" charset="-120"/>
-              </a:rPr>
-              <a:t>0:25 – 0:40</a:t>
-            </a:r>
             <a:endParaRPr lang="en-US" sz="1300" dirty="0"/>
           </a:p>
         </p:txBody>
@@ -13342,7 +13715,7 @@
               <a:buNone/>
             </a:pPr>
             <a:r>
-              <a:rPr lang="en-US" sz="1400" dirty="0">
+              <a:rPr lang="en-US" sz="1400">
                 <a:solidFill>
                   <a:srgbClr val="201F1E"/>
                 </a:solidFill>
@@ -13445,7 +13818,7 @@
               <a:buNone/>
             </a:pPr>
             <a:r>
-              <a:rPr lang="en-US" sz="1100" b="1" dirty="0">
+              <a:rPr lang="en-US" sz="1100" b="1">
                 <a:solidFill>
                   <a:srgbClr val="FFFFFF"/>
                 </a:solidFill>
@@ -13483,17 +13856,6 @@
             <a:pPr marL="0" indent="0" algn="l">
               <a:buNone/>
             </a:pPr>
-            <a:r>
-              <a:rPr lang="en-US" sz="1300" b="1" dirty="0">
-                <a:solidFill>
-                  <a:srgbClr val="0078D4"/>
-                </a:solidFill>
-                <a:latin typeface="Segoe UI" pitchFamily="34" charset="0"/>
-                <a:ea typeface="Segoe UI" pitchFamily="34" charset="-122"/>
-                <a:cs typeface="Segoe UI" pitchFamily="34" charset="-120"/>
-              </a:rPr>
-              <a:t>0:40 – 0:50</a:t>
-            </a:r>
             <a:endParaRPr lang="en-US" sz="1300" dirty="0"/>
           </a:p>
         </p:txBody>
@@ -13523,7 +13885,7 @@
               <a:buNone/>
             </a:pPr>
             <a:r>
-              <a:rPr lang="en-US" sz="1400" dirty="0">
+              <a:rPr lang="en-US" sz="1400">
                 <a:solidFill>
                   <a:srgbClr val="201F1E"/>
                 </a:solidFill>
@@ -13626,7 +13988,7 @@
               <a:buNone/>
             </a:pPr>
             <a:r>
-              <a:rPr lang="en-US" sz="1100" b="1" dirty="0">
+              <a:rPr lang="en-US" sz="1100" b="1">
                 <a:solidFill>
                   <a:srgbClr val="FFFFFF"/>
                 </a:solidFill>
@@ -13664,17 +14026,6 @@
             <a:pPr marL="0" indent="0" algn="l">
               <a:buNone/>
             </a:pPr>
-            <a:r>
-              <a:rPr lang="en-US" sz="1300" b="1" dirty="0">
-                <a:solidFill>
-                  <a:srgbClr val="0078D4"/>
-                </a:solidFill>
-                <a:latin typeface="Segoe UI" pitchFamily="34" charset="0"/>
-                <a:ea typeface="Segoe UI" pitchFamily="34" charset="-122"/>
-                <a:cs typeface="Segoe UI" pitchFamily="34" charset="-120"/>
-              </a:rPr>
-              <a:t>0:50 – 1:00</a:t>
-            </a:r>
             <a:endParaRPr lang="en-US" sz="1300" dirty="0"/>
           </a:p>
         </p:txBody>
@@ -13712,7 +14063,7 @@
                 <a:ea typeface="Segoe UI" pitchFamily="34" charset="-122"/>
                 <a:cs typeface="Segoe UI" pitchFamily="34" charset="-120"/>
               </a:rPr>
-              <a:t>New &amp; Coming Soon: Edit with Copilot + Cowork</a:t>
+              <a:t>New &amp; Coming Soon: Edit with Copilot</a:t>
             </a:r>
             <a:endParaRPr lang="en-US" sz="1400" dirty="0"/>
           </a:p>
@@ -13743,7 +14094,7 @@
               <a:buNone/>
             </a:pPr>
             <a:r>
-              <a:rPr lang="en-US" sz="1100" i="1" dirty="0">
+              <a:rPr lang="en-US" sz="1100" i="1">
                 <a:solidFill>
                   <a:srgbClr val="A19F9D"/>
                 </a:solidFill>
@@ -13846,19 +14197,6 @@
             <a:pPr marL="0" indent="0" algn="l">
               <a:buNone/>
             </a:pPr>
-            <a:r>
-              <a:rPr lang="en-US" sz="14000" b="1" dirty="0">
-                <a:solidFill>
-                  <a:srgbClr val="0078D4">
-                    <a:alpha val="50000"/>
-                  </a:srgbClr>
-                </a:solidFill>
-                <a:latin typeface="Segoe UI" pitchFamily="34" charset="0"/>
-                <a:ea typeface="Segoe UI" pitchFamily="34" charset="-122"/>
-                <a:cs typeface="Segoe UI" pitchFamily="34" charset="-120"/>
-              </a:rPr>
-              <a:t>04</a:t>
-            </a:r>
             <a:endParaRPr lang="en-US" sz="14000" dirty="0"/>
           </a:p>
         </p:txBody>
@@ -13912,7 +14250,7 @@
               <a:buNone/>
             </a:pPr>
             <a:r>
-              <a:rPr lang="en-US" sz="3800" b="1" dirty="0">
+              <a:rPr lang="en-US" sz="3800" b="1">
                 <a:solidFill>
                   <a:srgbClr val="FFFFFF"/>
                 </a:solidFill>
@@ -13922,14 +14260,14 @@
               </a:rPr>
               <a:t>Best Practices &amp;</a:t>
             </a:r>
-            <a:endParaRPr lang="en-US" sz="3800" dirty="0"/>
+            <a:endParaRPr lang="en-US" sz="3800"/>
           </a:p>
           <a:p>
             <a:pPr marL="0" indent="0" algn="l">
               <a:buNone/>
             </a:pPr>
             <a:r>
-              <a:rPr lang="en-US" sz="3800" b="1" dirty="0">
+              <a:rPr lang="en-US" sz="3800" b="1">
                 <a:solidFill>
                   <a:srgbClr val="FFFFFF"/>
                 </a:solidFill>
@@ -14000,7 +14338,7 @@
               <a:buNone/>
             </a:pPr>
             <a:r>
-              <a:rPr lang="en-US" sz="1800" dirty="0">
+              <a:rPr lang="en-US" sz="1800">
                 <a:solidFill>
                   <a:srgbClr val="D2D0CE"/>
                 </a:solidFill>
@@ -14104,7 +14442,7 @@
               <a:buNone/>
             </a:pPr>
             <a:r>
-              <a:rPr lang="en-US" sz="2200" b="1" dirty="0">
+              <a:rPr lang="en-US" sz="2200" b="1">
                 <a:solidFill>
                   <a:srgbClr val="FFFFFF"/>
                 </a:solidFill>
@@ -14263,7 +14601,7 @@
               <a:buNone/>
             </a:pPr>
             <a:r>
-              <a:rPr lang="en-US" sz="1300" b="1" dirty="0">
+              <a:rPr lang="en-US" sz="1300" b="1">
                 <a:solidFill>
                   <a:srgbClr val="FFFFFF"/>
                 </a:solidFill>
@@ -14302,7 +14640,7 @@
               <a:buNone/>
             </a:pPr>
             <a:r>
-              <a:rPr lang="en-US" sz="1250" dirty="0">
+              <a:rPr lang="en-US" sz="1250">
                 <a:solidFill>
                   <a:srgbClr val="201F1E"/>
                 </a:solidFill>
@@ -14437,7 +14775,7 @@
               <a:buNone/>
             </a:pPr>
             <a:r>
-              <a:rPr lang="en-US" sz="1300" b="1" dirty="0">
+              <a:rPr lang="en-US" sz="1300" b="1">
                 <a:solidFill>
                   <a:srgbClr val="FFFFFF"/>
                 </a:solidFill>
@@ -14476,7 +14814,7 @@
               <a:buNone/>
             </a:pPr>
             <a:r>
-              <a:rPr lang="en-US" sz="1250" dirty="0">
+              <a:rPr lang="en-US" sz="1250">
                 <a:solidFill>
                   <a:srgbClr val="201F1E"/>
                 </a:solidFill>
@@ -14611,7 +14949,7 @@
               <a:buNone/>
             </a:pPr>
             <a:r>
-              <a:rPr lang="en-US" sz="1300" b="1" dirty="0">
+              <a:rPr lang="en-US" sz="1300" b="1">
                 <a:solidFill>
                   <a:srgbClr val="FFFFFF"/>
                 </a:solidFill>
@@ -14650,7 +14988,7 @@
               <a:buNone/>
             </a:pPr>
             <a:r>
-              <a:rPr lang="en-US" sz="1250" dirty="0">
+              <a:rPr lang="en-US" sz="1250">
                 <a:solidFill>
                   <a:srgbClr val="201F1E"/>
                 </a:solidFill>
@@ -14785,7 +15123,7 @@
               <a:buNone/>
             </a:pPr>
             <a:r>
-              <a:rPr lang="en-US" sz="1300" b="1" dirty="0">
+              <a:rPr lang="en-US" sz="1300" b="1">
                 <a:solidFill>
                   <a:srgbClr val="FFFFFF"/>
                 </a:solidFill>
@@ -14824,7 +15162,7 @@
               <a:buNone/>
             </a:pPr>
             <a:r>
-              <a:rPr lang="en-US" sz="1250" dirty="0">
+              <a:rPr lang="en-US" sz="1250">
                 <a:solidFill>
                   <a:srgbClr val="201F1E"/>
                 </a:solidFill>
@@ -14959,7 +15297,7 @@
               <a:buNone/>
             </a:pPr>
             <a:r>
-              <a:rPr lang="en-US" sz="1300" b="1" dirty="0">
+              <a:rPr lang="en-US" sz="1300" b="1">
                 <a:solidFill>
                   <a:srgbClr val="FFFFFF"/>
                 </a:solidFill>
@@ -14998,7 +15336,7 @@
               <a:buNone/>
             </a:pPr>
             <a:r>
-              <a:rPr lang="en-US" sz="1250" dirty="0">
+              <a:rPr lang="en-US" sz="1250">
                 <a:solidFill>
                   <a:srgbClr val="201F1E"/>
                 </a:solidFill>
@@ -15133,7 +15471,7 @@
               <a:buNone/>
             </a:pPr>
             <a:r>
-              <a:rPr lang="en-US" sz="1300" b="1" dirty="0">
+              <a:rPr lang="en-US" sz="1300" b="1">
                 <a:solidFill>
                   <a:srgbClr val="FFFFFF"/>
                 </a:solidFill>
@@ -15172,7 +15510,7 @@
               <a:buNone/>
             </a:pPr>
             <a:r>
-              <a:rPr lang="en-US" sz="1250" dirty="0">
+              <a:rPr lang="en-US" sz="1250">
                 <a:solidFill>
                   <a:srgbClr val="201F1E"/>
                 </a:solidFill>
@@ -15307,7 +15645,7 @@
               <a:buNone/>
             </a:pPr>
             <a:r>
-              <a:rPr lang="en-US" sz="1300" b="1" dirty="0">
+              <a:rPr lang="en-US" sz="1300" b="1">
                 <a:solidFill>
                   <a:srgbClr val="FFFFFF"/>
                 </a:solidFill>
@@ -15346,7 +15684,7 @@
               <a:buNone/>
             </a:pPr>
             <a:r>
-              <a:rPr lang="en-US" sz="1250" dirty="0">
+              <a:rPr lang="en-US" sz="1250">
                 <a:solidFill>
                   <a:srgbClr val="201F1E"/>
                 </a:solidFill>
@@ -15481,7 +15819,7 @@
               <a:buNone/>
             </a:pPr>
             <a:r>
-              <a:rPr lang="en-US" sz="1300" b="1" dirty="0">
+              <a:rPr lang="en-US" sz="1300" b="1">
                 <a:solidFill>
                   <a:srgbClr val="FFFFFF"/>
                 </a:solidFill>
@@ -15520,7 +15858,7 @@
               <a:buNone/>
             </a:pPr>
             <a:r>
-              <a:rPr lang="en-US" sz="1250" dirty="0">
+              <a:rPr lang="en-US" sz="1250">
                 <a:solidFill>
                   <a:srgbClr val="201F1E"/>
                 </a:solidFill>
@@ -15624,7 +15962,7 @@
               <a:buNone/>
             </a:pPr>
             <a:r>
-              <a:rPr lang="en-US" sz="2200" b="1" dirty="0">
+              <a:rPr lang="en-US" sz="2200" b="1">
                 <a:solidFill>
                   <a:srgbClr val="FFFFFF"/>
                 </a:solidFill>
@@ -15678,7 +16016,7 @@
         </p:nvGraphicFramePr>
         <p:xfrm>
           <a:off x="457200" y="960120"/>
-          <a:ext cx="8229600" cy="3886200"/>
+          <a:ext cx="8229600" cy="3291840"/>
         </p:xfrm>
         <a:graphic>
           <a:graphicData uri="http://schemas.openxmlformats.org/drawingml/2006/table">
@@ -16568,7 +16906,7 @@
               <a:buNone/>
             </a:pPr>
             <a:r>
-              <a:rPr lang="en-US" sz="2200" b="1" dirty="0">
+              <a:rPr lang="en-US" sz="2200" b="1">
                 <a:solidFill>
                   <a:srgbClr val="FFFFFF"/>
                 </a:solidFill>
@@ -16670,7 +17008,7 @@
               <a:buNone/>
             </a:pPr>
             <a:r>
-              <a:rPr lang="en-US" sz="5200" b="1" dirty="0">
+              <a:rPr lang="en-US" sz="5200" b="1">
                 <a:solidFill>
                   <a:srgbClr val="FFFFFF">
                     <a:alpha val="80000"/>
@@ -16711,7 +17049,7 @@
               <a:buNone/>
             </a:pPr>
             <a:r>
-              <a:rPr lang="en-US" sz="1300" b="1" kern="0" spc="400" dirty="0">
+              <a:rPr lang="en-US" sz="1300" b="1" kern="0" spc="400">
                 <a:solidFill>
                   <a:srgbClr val="FFFFFF"/>
                 </a:solidFill>
@@ -16750,7 +17088,7 @@
               <a:buNone/>
             </a:pPr>
             <a:r>
-              <a:rPr lang="en-US" sz="1300" dirty="0">
+              <a:rPr lang="en-US" sz="1300">
                 <a:solidFill>
                   <a:srgbClr val="FFFFFF"/>
                 </a:solidFill>
@@ -16760,14 +17098,14 @@
               </a:rPr>
               <a:t>Replace 1 manual</a:t>
             </a:r>
-            <a:endParaRPr lang="en-US" sz="1300" dirty="0"/>
+            <a:endParaRPr lang="en-US" sz="1300"/>
           </a:p>
           <a:p>
             <a:pPr marL="0" indent="0" algn="ctr">
               <a:buNone/>
             </a:pPr>
             <a:r>
-              <a:rPr lang="en-US" sz="1300" dirty="0">
+              <a:rPr lang="en-US" sz="1300">
                 <a:solidFill>
                   <a:srgbClr val="FFFFFF"/>
                 </a:solidFill>
@@ -16806,7 +17144,7 @@
               <a:buNone/>
             </a:pPr>
             <a:r>
-              <a:rPr lang="en-US" sz="2400" b="1" dirty="0">
+              <a:rPr lang="en-US" sz="2400" b="1">
                 <a:solidFill>
                   <a:srgbClr val="0078D4"/>
                 </a:solidFill>
@@ -16884,7 +17222,7 @@
               <a:buNone/>
             </a:pPr>
             <a:r>
-              <a:rPr lang="en-US" sz="5200" b="1" dirty="0">
+              <a:rPr lang="en-US" sz="5200" b="1">
                 <a:solidFill>
                   <a:srgbClr val="FFFFFF">
                     <a:alpha val="80000"/>
@@ -16925,7 +17263,7 @@
               <a:buNone/>
             </a:pPr>
             <a:r>
-              <a:rPr lang="en-US" sz="1300" b="1" kern="0" spc="400" dirty="0">
+              <a:rPr lang="en-US" sz="1300" b="1" kern="0" spc="400">
                 <a:solidFill>
                   <a:srgbClr val="FFFFFF"/>
                 </a:solidFill>
@@ -16964,7 +17302,7 @@
               <a:buNone/>
             </a:pPr>
             <a:r>
-              <a:rPr lang="en-US" sz="1300" dirty="0">
+              <a:rPr lang="en-US" sz="1300">
                 <a:solidFill>
                   <a:srgbClr val="FFFFFF"/>
                 </a:solidFill>
@@ -16974,14 +17312,14 @@
               </a:rPr>
               <a:t>Create a personal</a:t>
             </a:r>
-            <a:endParaRPr lang="en-US" sz="1300" dirty="0"/>
+            <a:endParaRPr lang="en-US" sz="1300"/>
           </a:p>
           <a:p>
             <a:pPr marL="0" indent="0" algn="ctr">
               <a:buNone/>
             </a:pPr>
             <a:r>
-              <a:rPr lang="en-US" sz="1300" dirty="0">
+              <a:rPr lang="en-US" sz="1300">
                 <a:solidFill>
                   <a:srgbClr val="FFFFFF"/>
                 </a:solidFill>
@@ -17020,7 +17358,7 @@
               <a:buNone/>
             </a:pPr>
             <a:r>
-              <a:rPr lang="en-US" sz="2400" b="1" dirty="0">
+              <a:rPr lang="en-US" sz="2400" b="1">
                 <a:solidFill>
                   <a:srgbClr val="0078D4"/>
                 </a:solidFill>
@@ -17098,7 +17436,7 @@
               <a:buNone/>
             </a:pPr>
             <a:r>
-              <a:rPr lang="en-US" sz="5200" b="1" dirty="0">
+              <a:rPr lang="en-US" sz="5200" b="1">
                 <a:solidFill>
                   <a:srgbClr val="FFFFFF">
                     <a:alpha val="80000"/>
@@ -17139,7 +17477,7 @@
               <a:buNone/>
             </a:pPr>
             <a:r>
-              <a:rPr lang="en-US" sz="1300" b="1" kern="0" spc="400" dirty="0">
+              <a:rPr lang="en-US" sz="1300" b="1" kern="0" spc="400">
                 <a:solidFill>
                   <a:srgbClr val="FFFFFF"/>
                 </a:solidFill>
@@ -17178,7 +17516,7 @@
               <a:buNone/>
             </a:pPr>
             <a:r>
-              <a:rPr lang="en-US" sz="1300" dirty="0">
+              <a:rPr lang="en-US" sz="1300">
                 <a:solidFill>
                   <a:srgbClr val="FFFFFF"/>
                 </a:solidFill>
@@ -17188,14 +17526,14 @@
               </a:rPr>
               <a:t>Share wins,</a:t>
             </a:r>
-            <a:endParaRPr lang="en-US" sz="1300" dirty="0"/>
+            <a:endParaRPr lang="en-US" sz="1300"/>
           </a:p>
           <a:p>
             <a:pPr marL="0" indent="0" algn="ctr">
               <a:buNone/>
             </a:pPr>
             <a:r>
-              <a:rPr lang="en-US" sz="1300" dirty="0">
+              <a:rPr lang="en-US" sz="1300">
                 <a:solidFill>
                   <a:srgbClr val="FFFFFF"/>
                 </a:solidFill>
@@ -17322,7 +17660,7 @@
               <a:buNone/>
             </a:pPr>
             <a:r>
-              <a:rPr lang="en-US" sz="1500" i="1" dirty="0">
+              <a:rPr lang="en-US" sz="1500" i="1">
                 <a:solidFill>
                   <a:srgbClr val="201F1E"/>
                 </a:solidFill>
@@ -17332,14 +17670,14 @@
               </a:rPr>
               <a:t>The teams that win with AI aren't the ones with the fanciest tools.</a:t>
             </a:r>
-            <a:endParaRPr lang="en-US" sz="1500" dirty="0"/>
+            <a:endParaRPr lang="en-US" sz="1500"/>
           </a:p>
           <a:p>
             <a:pPr marL="0" indent="0" algn="l">
               <a:buNone/>
             </a:pPr>
             <a:r>
-              <a:rPr lang="en-US" sz="1500" i="1" dirty="0">
+              <a:rPr lang="en-US" sz="1500" i="1">
                 <a:solidFill>
                   <a:srgbClr val="201F1E"/>
                 </a:solidFill>
@@ -17362,6 +17700,1209 @@
 </file>
 
 <file path=ppt/slides/slide24.xml><?xml version="1.0" encoding="utf-8"?>
+<p:sld xmlns:a="http://schemas.openxmlformats.org/drawingml/2006/main" xmlns:r="http://schemas.openxmlformats.org/officeDocument/2006/relationships" xmlns:p="http://schemas.openxmlformats.org/presentationml/2006/main">
+  <p:cSld>
+    <p:bg>
+      <p:bgPr>
+        <a:solidFill>
+          <a:srgbClr val="FFFFFF"/>
+        </a:solidFill>
+        <a:effectLst/>
+      </p:bgPr>
+    </p:bg>
+    <p:spTree>
+      <p:nvGrpSpPr>
+        <p:cNvPr id="1" name="">
+          <a:extLst>
+            <a:ext uri="{FF2B5EF4-FFF2-40B4-BE49-F238E27FC236}">
+              <a16:creationId xmlns:a16="http://schemas.microsoft.com/office/drawing/2014/main" id="{24C3E315-BF0F-24A3-B4ED-CAB48342A773}"/>
+            </a:ext>
+          </a:extLst>
+        </p:cNvPr>
+        <p:cNvGrpSpPr/>
+        <p:nvPr/>
+      </p:nvGrpSpPr>
+      <p:grpSpPr>
+        <a:xfrm>
+          <a:off x="0" y="0"/>
+          <a:ext cx="0" cy="0"/>
+          <a:chOff x="0" y="0"/>
+          <a:chExt cx="0" cy="0"/>
+        </a:xfrm>
+      </p:grpSpPr>
+      <p:sp>
+        <p:nvSpPr>
+          <p:cNvPr id="2" name="Shape 0">
+            <a:extLst>
+              <a:ext uri="{FF2B5EF4-FFF2-40B4-BE49-F238E27FC236}">
+                <a16:creationId xmlns:a16="http://schemas.microsoft.com/office/drawing/2014/main" id="{4C9F1A22-0E06-AA2D-9F72-D8E214B4F9A1}"/>
+              </a:ext>
+            </a:extLst>
+          </p:cNvPr>
+          <p:cNvSpPr/>
+          <p:nvPr/>
+        </p:nvSpPr>
+        <p:spPr>
+          <a:xfrm>
+            <a:off x="0" y="0"/>
+            <a:ext cx="9144000" cy="777240"/>
+          </a:xfrm>
+          <a:prstGeom prst="rect">
+            <a:avLst/>
+          </a:prstGeom>
+          <a:solidFill>
+            <a:srgbClr val="0078D4"/>
+          </a:solidFill>
+          <a:ln w="12700">
+            <a:solidFill>
+              <a:srgbClr val="0078D4"/>
+            </a:solidFill>
+            <a:prstDash val="solid"/>
+          </a:ln>
+        </p:spPr>
+        <p:txBody>
+          <a:bodyPr/>
+          <a:lstStyle/>
+          <a:p>
+            <a:endParaRPr lang="en-US"/>
+          </a:p>
+        </p:txBody>
+      </p:sp>
+      <p:sp>
+        <p:nvSpPr>
+          <p:cNvPr id="3" name="Text 1">
+            <a:extLst>
+              <a:ext uri="{FF2B5EF4-FFF2-40B4-BE49-F238E27FC236}">
+                <a16:creationId xmlns:a16="http://schemas.microsoft.com/office/drawing/2014/main" id="{63B229C4-F1B7-523C-E09D-F851C26168F7}"/>
+              </a:ext>
+            </a:extLst>
+          </p:cNvPr>
+          <p:cNvSpPr/>
+          <p:nvPr/>
+        </p:nvSpPr>
+        <p:spPr>
+          <a:xfrm>
+            <a:off x="502920" y="0"/>
+            <a:ext cx="8046720" cy="777240"/>
+          </a:xfrm>
+          <a:prstGeom prst="rect">
+            <a:avLst/>
+          </a:prstGeom>
+          <a:noFill/>
+          <a:ln/>
+        </p:spPr>
+        <p:txBody>
+          <a:bodyPr wrap="square" lIns="0" tIns="0" rIns="0" bIns="0" rtlCol="0" anchor="ctr"/>
+          <a:lstStyle/>
+          <a:p>
+            <a:pPr marL="0" indent="0" algn="l">
+              <a:buNone/>
+            </a:pPr>
+            <a:r>
+              <a:rPr lang="en-US" sz="2200" b="1" dirty="0">
+                <a:solidFill>
+                  <a:srgbClr val="FFFFFF"/>
+                </a:solidFill>
+                <a:latin typeface="Segoe UI" pitchFamily="34" charset="0"/>
+                <a:ea typeface="Segoe UI" pitchFamily="34" charset="-122"/>
+                <a:cs typeface="Segoe UI" pitchFamily="34" charset="-120"/>
+              </a:rPr>
+              <a:t>Memory &amp; Custom Instructions</a:t>
+            </a:r>
+          </a:p>
+          <a:p>
+            <a:pPr marL="0" indent="0" algn="l">
+              <a:buNone/>
+            </a:pPr>
+            <a:r>
+              <a:rPr lang="en-US" sz="800" b="1" dirty="0">
+                <a:solidFill>
+                  <a:srgbClr val="FFFFFF"/>
+                </a:solidFill>
+                <a:latin typeface="Segoe UI" pitchFamily="34" charset="0"/>
+                <a:cs typeface="Segoe UI" pitchFamily="34" charset="-120"/>
+              </a:rPr>
+              <a:t>Access Custom Instructions in Settings - Personalization</a:t>
+            </a:r>
+            <a:endParaRPr lang="en-US" sz="800" dirty="0"/>
+          </a:p>
+        </p:txBody>
+      </p:sp>
+      <p:pic>
+        <p:nvPicPr>
+          <p:cNvPr id="4" name="Image 0" descr="preencoded.png">
+            <a:extLst>
+              <a:ext uri="{FF2B5EF4-FFF2-40B4-BE49-F238E27FC236}">
+                <a16:creationId xmlns:a16="http://schemas.microsoft.com/office/drawing/2014/main" id="{F8F8CEAF-0EC6-984C-0CB6-99C249272CA5}"/>
+              </a:ext>
+            </a:extLst>
+          </p:cNvPr>
+          <p:cNvPicPr>
+            <a:picLocks noChangeAspect="1"/>
+          </p:cNvPicPr>
+          <p:nvPr/>
+        </p:nvPicPr>
+        <p:blipFill>
+          <a:blip r:embed="rId3"/>
+          <a:stretch>
+            <a:fillRect/>
+          </a:stretch>
+        </p:blipFill>
+        <p:spPr>
+          <a:xfrm>
+            <a:off x="8503920" y="137160"/>
+            <a:ext cx="502920" cy="502920"/>
+          </a:xfrm>
+          <a:prstGeom prst="rect">
+            <a:avLst/>
+          </a:prstGeom>
+        </p:spPr>
+      </p:pic>
+      <p:sp>
+        <p:nvSpPr>
+          <p:cNvPr id="33" name="TextBox 32">
+            <a:extLst>
+              <a:ext uri="{FF2B5EF4-FFF2-40B4-BE49-F238E27FC236}">
+                <a16:creationId xmlns:a16="http://schemas.microsoft.com/office/drawing/2014/main" id="{04DECBF4-E5B2-F0D3-B611-54D1022AB654}"/>
+              </a:ext>
+            </a:extLst>
+          </p:cNvPr>
+          <p:cNvSpPr txBox="1"/>
+          <p:nvPr/>
+        </p:nvSpPr>
+        <p:spPr>
+          <a:xfrm>
+            <a:off x="69056" y="914400"/>
+            <a:ext cx="4579144" cy="4078039"/>
+          </a:xfrm>
+          <a:prstGeom prst="rect">
+            <a:avLst/>
+          </a:prstGeom>
+          <a:noFill/>
+        </p:spPr>
+        <p:txBody>
+          <a:bodyPr wrap="square">
+            <a:spAutoFit/>
+          </a:bodyPr>
+          <a:lstStyle/>
+          <a:p>
+            <a:pPr marL="171450" indent="-171450">
+              <a:buFont typeface="Arial" panose="020B0604020202020204" pitchFamily="34" charset="0"/>
+              <a:buChar char="•"/>
+            </a:pPr>
+            <a:r>
+              <a:rPr lang="en-US" sz="700" dirty="0"/>
+              <a:t>Copilot prioritizes accuracy, clarity, and trust.</a:t>
+            </a:r>
+          </a:p>
+          <a:p>
+            <a:pPr marL="171450" indent="-171450">
+              <a:buFont typeface="Arial" panose="020B0604020202020204" pitchFamily="34" charset="0"/>
+              <a:buChar char="•"/>
+            </a:pPr>
+            <a:r>
+              <a:rPr lang="en-US" sz="700" dirty="0"/>
+              <a:t>Always distinguish verified facts from inferred reasoning.</a:t>
+            </a:r>
+          </a:p>
+          <a:p>
+            <a:pPr marL="171450" indent="-171450">
+              <a:buFont typeface="Arial" panose="020B0604020202020204" pitchFamily="34" charset="0"/>
+              <a:buChar char="•"/>
+            </a:pPr>
+            <a:r>
+              <a:rPr lang="en-US" sz="700" dirty="0"/>
+              <a:t>Never present assumptions or context-based reasoning as fact.</a:t>
+            </a:r>
+          </a:p>
+          <a:p>
+            <a:pPr marL="171450" indent="-171450">
+              <a:buFont typeface="Arial" panose="020B0604020202020204" pitchFamily="34" charset="0"/>
+              <a:buChar char="•"/>
+            </a:pPr>
+            <a:r>
+              <a:rPr lang="en-US" sz="700" dirty="0"/>
+              <a:t>Avoid cascade errors by rechecking each step before responding.</a:t>
+            </a:r>
+          </a:p>
+          <a:p>
+            <a:pPr marL="171450" indent="-171450">
+              <a:buFont typeface="Arial" panose="020B0604020202020204" pitchFamily="34" charset="0"/>
+              <a:buChar char="•"/>
+            </a:pPr>
+            <a:r>
+              <a:rPr lang="en-US" sz="700" dirty="0"/>
+              <a:t>Think deeply before answering.</a:t>
+            </a:r>
+          </a:p>
+          <a:p>
+            <a:pPr marL="171450" indent="-171450">
+              <a:buFont typeface="Arial" panose="020B0604020202020204" pitchFamily="34" charset="0"/>
+              <a:buChar char="•"/>
+            </a:pPr>
+            <a:r>
+              <a:rPr lang="en-US" sz="700" dirty="0">
+                <a:highlight>
+                  <a:srgbClr val="FFFF00"/>
+                </a:highlight>
+              </a:rPr>
+              <a:t>When uncertain, ask clarifying questions or present two to three vetted options with pros and cons.</a:t>
+            </a:r>
+          </a:p>
+          <a:p>
+            <a:endParaRPr lang="en-US" sz="700" dirty="0"/>
+          </a:p>
+          <a:p>
+            <a:r>
+              <a:rPr lang="en-US" sz="700" dirty="0"/>
+              <a:t>Internal or Collaborative Audience</a:t>
+            </a:r>
+          </a:p>
+          <a:p>
+            <a:pPr marL="171450" indent="-171450">
+              <a:buFont typeface="Arial" panose="020B0604020202020204" pitchFamily="34" charset="0"/>
+              <a:buChar char="•"/>
+            </a:pPr>
+            <a:r>
+              <a:rPr lang="en-US" sz="700" dirty="0"/>
+              <a:t>Collaborative and supportive.</a:t>
+            </a:r>
+          </a:p>
+          <a:p>
+            <a:pPr marL="171450" indent="-171450">
+              <a:buFont typeface="Arial" panose="020B0604020202020204" pitchFamily="34" charset="0"/>
+              <a:buChar char="•"/>
+            </a:pPr>
+            <a:r>
+              <a:rPr lang="en-US" sz="700" dirty="0"/>
+              <a:t>Slightly informal and pragmatic.</a:t>
+            </a:r>
+          </a:p>
+          <a:p>
+            <a:pPr marL="171450" indent="-171450">
+              <a:buFont typeface="Arial" panose="020B0604020202020204" pitchFamily="34" charset="0"/>
+              <a:buChar char="•"/>
+            </a:pPr>
+            <a:r>
+              <a:rPr lang="en-US" sz="700" dirty="0"/>
+              <a:t>Quick confirmations and concise language.</a:t>
+            </a:r>
+          </a:p>
+          <a:p>
+            <a:pPr marL="171450" indent="-171450">
+              <a:buFont typeface="Arial" panose="020B0604020202020204" pitchFamily="34" charset="0"/>
+              <a:buChar char="•"/>
+            </a:pPr>
+            <a:r>
+              <a:rPr lang="en-US" sz="700" dirty="0"/>
+              <a:t>Use only when the audience is clearly internal.</a:t>
+            </a:r>
+          </a:p>
+          <a:p>
+            <a:r>
+              <a:rPr lang="en-US" sz="700" dirty="0"/>
+              <a:t>Example language</a:t>
+            </a:r>
+          </a:p>
+          <a:p>
+            <a:pPr marL="171450" indent="-171450">
+              <a:buFont typeface="Arial" panose="020B0604020202020204" pitchFamily="34" charset="0"/>
+              <a:buChar char="•"/>
+            </a:pPr>
+            <a:r>
+              <a:rPr lang="en-US" sz="700" dirty="0"/>
+              <a:t>Thanks for sharing.</a:t>
+            </a:r>
+          </a:p>
+          <a:p>
+            <a:pPr marL="171450" indent="-171450">
+              <a:buFont typeface="Arial" panose="020B0604020202020204" pitchFamily="34" charset="0"/>
+              <a:buChar char="•"/>
+            </a:pPr>
+            <a:r>
+              <a:rPr lang="en-US" sz="700" dirty="0"/>
+              <a:t>Would it work to proceed this way?</a:t>
+            </a:r>
+          </a:p>
+          <a:p>
+            <a:pPr marL="171450" indent="-171450">
+              <a:buFont typeface="Arial" panose="020B0604020202020204" pitchFamily="34" charset="0"/>
+              <a:buChar char="•"/>
+            </a:pPr>
+            <a:r>
+              <a:rPr lang="en-US" sz="700" dirty="0"/>
+              <a:t>Appreciate your support.</a:t>
+            </a:r>
+          </a:p>
+          <a:p>
+            <a:r>
+              <a:rPr lang="en-US" sz="700" dirty="0"/>
+              <a:t>Customer or External Audience</a:t>
+            </a:r>
+          </a:p>
+          <a:p>
+            <a:pPr marL="171450" indent="-171450">
+              <a:buFont typeface="Arial" panose="020B0604020202020204" pitchFamily="34" charset="0"/>
+              <a:buChar char="•"/>
+            </a:pPr>
+            <a:r>
+              <a:rPr lang="en-US" sz="700" dirty="0"/>
+              <a:t>Professional, courteous, and reassuring.</a:t>
+            </a:r>
+          </a:p>
+          <a:p>
+            <a:pPr marL="171450" indent="-171450">
+              <a:buFont typeface="Arial" panose="020B0604020202020204" pitchFamily="34" charset="0"/>
+              <a:buChar char="•"/>
+            </a:pPr>
+            <a:r>
+              <a:rPr lang="en-US" sz="700" dirty="0"/>
+              <a:t>Formal greetings and closings.</a:t>
+            </a:r>
+          </a:p>
+          <a:p>
+            <a:pPr marL="171450" indent="-171450">
+              <a:buFont typeface="Arial" panose="020B0604020202020204" pitchFamily="34" charset="0"/>
+              <a:buChar char="•"/>
+            </a:pPr>
+            <a:r>
+              <a:rPr lang="en-US" sz="700" dirty="0"/>
+              <a:t>Avoid jargon unless contextually relevant and explained.</a:t>
+            </a:r>
+          </a:p>
+          <a:p>
+            <a:pPr marL="171450" indent="-171450">
+              <a:buFont typeface="Arial" panose="020B0604020202020204" pitchFamily="34" charset="0"/>
+              <a:buChar char="•"/>
+            </a:pPr>
+            <a:r>
+              <a:rPr lang="en-US" sz="700" dirty="0"/>
+              <a:t>No slang or overly casual language.</a:t>
+            </a:r>
+          </a:p>
+          <a:p>
+            <a:pPr marL="171450" indent="-171450">
+              <a:buFont typeface="Arial" panose="020B0604020202020204" pitchFamily="34" charset="0"/>
+              <a:buChar char="•"/>
+            </a:pPr>
+            <a:r>
+              <a:rPr lang="en-US" sz="700" dirty="0"/>
+              <a:t>Provide clear next steps and timelines.</a:t>
+            </a:r>
+          </a:p>
+          <a:p>
+            <a:r>
+              <a:rPr lang="en-US" sz="700" dirty="0"/>
+              <a:t>Example language</a:t>
+            </a:r>
+          </a:p>
+          <a:p>
+            <a:pPr marL="171450" indent="-171450">
+              <a:buFont typeface="Arial" panose="020B0604020202020204" pitchFamily="34" charset="0"/>
+              <a:buChar char="•"/>
+            </a:pPr>
+            <a:r>
+              <a:rPr lang="en-US" sz="700" dirty="0"/>
+              <a:t>Looking forward to discussing the way forward.</a:t>
+            </a:r>
+          </a:p>
+          <a:p>
+            <a:pPr marL="171450" indent="-171450">
+              <a:buFont typeface="Arial" panose="020B0604020202020204" pitchFamily="34" charset="0"/>
+              <a:buChar char="•"/>
+            </a:pPr>
+            <a:r>
+              <a:rPr lang="en-US" sz="700" dirty="0"/>
+              <a:t>We completely understand the need to address this carefully.</a:t>
+            </a:r>
+          </a:p>
+          <a:p>
+            <a:pPr marL="171450" indent="-171450">
+              <a:buFont typeface="Arial" panose="020B0604020202020204" pitchFamily="34" charset="0"/>
+              <a:buChar char="•"/>
+            </a:pPr>
+            <a:r>
+              <a:rPr lang="en-US" sz="700" dirty="0"/>
+              <a:t>Sounds like a great opportunity.</a:t>
+            </a:r>
+          </a:p>
+          <a:p>
+            <a:endParaRPr lang="en-US" sz="700" dirty="0"/>
+          </a:p>
+          <a:p>
+            <a:r>
+              <a:rPr lang="en-US" sz="700" dirty="0">
+                <a:highlight>
+                  <a:srgbClr val="FFFF00"/>
+                </a:highlight>
+              </a:rPr>
+              <a:t>Use explicit labels consistently.</a:t>
+            </a:r>
+          </a:p>
+          <a:p>
+            <a:pPr marL="171450" indent="-171450">
+              <a:buFont typeface="Arial" panose="020B0604020202020204" pitchFamily="34" charset="0"/>
+              <a:buChar char="•"/>
+            </a:pPr>
+            <a:r>
+              <a:rPr lang="en-US" sz="700" dirty="0">
+                <a:highlight>
+                  <a:srgbClr val="FFFF00"/>
+                </a:highlight>
+              </a:rPr>
+              <a:t>[Verified] Facts confirmed by authoritative sources.</a:t>
+            </a:r>
+          </a:p>
+          <a:p>
+            <a:pPr marL="171450" indent="-171450">
+              <a:buFont typeface="Arial" panose="020B0604020202020204" pitchFamily="34" charset="0"/>
+              <a:buChar char="•"/>
+            </a:pPr>
+            <a:r>
+              <a:rPr lang="en-US" sz="700" dirty="0">
+                <a:highlight>
+                  <a:srgbClr val="FFFF00"/>
+                </a:highlight>
+              </a:rPr>
+              <a:t>[Inference] Logical conclusions based on context.</a:t>
+            </a:r>
+          </a:p>
+          <a:p>
+            <a:pPr marL="171450" indent="-171450">
+              <a:buFont typeface="Arial" panose="020B0604020202020204" pitchFamily="34" charset="0"/>
+              <a:buChar char="•"/>
+            </a:pPr>
+            <a:r>
+              <a:rPr lang="en-US" sz="700" dirty="0">
+                <a:highlight>
+                  <a:srgbClr val="FFFF00"/>
+                </a:highlight>
+              </a:rPr>
+              <a:t>[Confidence] Confidence cues for inferred content such as Likely or Based on observed patterns.</a:t>
+            </a:r>
+          </a:p>
+          <a:p>
+            <a:pPr marL="171450" indent="-171450">
+              <a:buFont typeface="Arial" panose="020B0604020202020204" pitchFamily="34" charset="0"/>
+              <a:buChar char="•"/>
+            </a:pPr>
+            <a:r>
+              <a:rPr lang="en-US" sz="700" dirty="0">
+                <a:highlight>
+                  <a:srgbClr val="FFFF00"/>
+                </a:highlight>
+              </a:rPr>
+              <a:t>[Unverified] Claims not yet confirmed.</a:t>
+            </a:r>
+          </a:p>
+          <a:p>
+            <a:pPr marL="171450" indent="-171450">
+              <a:buFont typeface="Arial" panose="020B0604020202020204" pitchFamily="34" charset="0"/>
+              <a:buChar char="•"/>
+            </a:pPr>
+            <a:r>
+              <a:rPr lang="en-US" sz="700" dirty="0">
+                <a:highlight>
+                  <a:srgbClr val="FFFF00"/>
+                </a:highlight>
+              </a:rPr>
+              <a:t>[Glossary] Acronyms clarified on first use.</a:t>
+            </a:r>
+          </a:p>
+          <a:p>
+            <a:br>
+              <a:rPr lang="en-US" sz="700" dirty="0"/>
+            </a:br>
+            <a:r>
+              <a:rPr lang="en-US" sz="700" dirty="0"/>
+              <a:t>When mixing content, present verified facts first, then clearly disclose inferred content with this disclaimer.</a:t>
+            </a:r>
+          </a:p>
+          <a:p>
+            <a:pPr marL="171450" indent="-171450">
+              <a:buFont typeface="Arial" panose="020B0604020202020204" pitchFamily="34" charset="0"/>
+              <a:buChar char="•"/>
+            </a:pPr>
+            <a:r>
+              <a:rPr lang="en-US" sz="700" dirty="0"/>
+              <a:t>The following points are inferred based on available context and may require validation.</a:t>
+            </a:r>
+          </a:p>
+        </p:txBody>
+      </p:sp>
+      <p:sp>
+        <p:nvSpPr>
+          <p:cNvPr id="6" name="TextBox 5">
+            <a:extLst>
+              <a:ext uri="{FF2B5EF4-FFF2-40B4-BE49-F238E27FC236}">
+                <a16:creationId xmlns:a16="http://schemas.microsoft.com/office/drawing/2014/main" id="{E1D9CFCC-6D52-849A-BAB1-BB4EACA2F72C}"/>
+              </a:ext>
+            </a:extLst>
+          </p:cNvPr>
+          <p:cNvSpPr txBox="1"/>
+          <p:nvPr/>
+        </p:nvSpPr>
+        <p:spPr>
+          <a:xfrm>
+            <a:off x="5109211" y="914400"/>
+            <a:ext cx="3646169" cy="3754874"/>
+          </a:xfrm>
+          <a:prstGeom prst="rect">
+            <a:avLst/>
+          </a:prstGeom>
+          <a:noFill/>
+        </p:spPr>
+        <p:txBody>
+          <a:bodyPr wrap="square">
+            <a:spAutoFit/>
+          </a:bodyPr>
+          <a:lstStyle/>
+          <a:p>
+            <a:pPr marL="171450" indent="-171450">
+              <a:buFont typeface="Arial" panose="020B0604020202020204" pitchFamily="34" charset="0"/>
+              <a:buChar char="•"/>
+            </a:pPr>
+            <a:r>
+              <a:rPr lang="en-US" sz="700" dirty="0"/>
+              <a:t>Search enterprise content first. Files. Emails. Chats. Meetings. Transcripts.</a:t>
+            </a:r>
+          </a:p>
+          <a:p>
+            <a:pPr marL="171450" indent="-171450">
+              <a:buFont typeface="Arial" panose="020B0604020202020204" pitchFamily="34" charset="0"/>
+              <a:buChar char="•"/>
+            </a:pPr>
+            <a:r>
+              <a:rPr lang="en-US" sz="700" dirty="0"/>
+              <a:t>Resolve contradictions before responding.</a:t>
+            </a:r>
+          </a:p>
+          <a:p>
+            <a:pPr marL="171450" indent="-171450">
+              <a:buFont typeface="Arial" panose="020B0604020202020204" pitchFamily="34" charset="0"/>
+              <a:buChar char="•"/>
+            </a:pPr>
+            <a:r>
+              <a:rPr lang="en-US" sz="700" dirty="0"/>
+              <a:t>Preserve critical qualifiers in summaries.</a:t>
+            </a:r>
+          </a:p>
+          <a:p>
+            <a:pPr marL="171450" indent="-171450">
+              <a:buFont typeface="Arial" panose="020B0604020202020204" pitchFamily="34" charset="0"/>
+              <a:buChar char="•"/>
+            </a:pPr>
+            <a:r>
+              <a:rPr lang="en-US" sz="700" dirty="0"/>
+              <a:t>Never fabricate citations quotes or references.</a:t>
+            </a:r>
+          </a:p>
+          <a:p>
+            <a:pPr marL="171450" indent="-171450">
+              <a:buFont typeface="Arial" panose="020B0604020202020204" pitchFamily="34" charset="0"/>
+              <a:buChar char="•"/>
+            </a:pPr>
+            <a:r>
+              <a:rPr lang="en-US" sz="700" dirty="0"/>
+              <a:t>If confidence is low, state what is known, state what is unknown, recommend next steps.</a:t>
+            </a:r>
+          </a:p>
+          <a:p>
+            <a:pPr marL="171450" indent="-171450">
+              <a:buFont typeface="Arial" panose="020B0604020202020204" pitchFamily="34" charset="0"/>
+              <a:buChar char="•"/>
+            </a:pPr>
+            <a:endParaRPr lang="en-US" sz="700" dirty="0"/>
+          </a:p>
+          <a:p>
+            <a:r>
+              <a:rPr lang="en-US" sz="700" dirty="0">
+                <a:highlight>
+                  <a:srgbClr val="FFFF00"/>
+                </a:highlight>
+              </a:rPr>
+              <a:t>For legal or regulatory topics.</a:t>
+            </a:r>
+          </a:p>
+          <a:p>
+            <a:pPr marL="171450" indent="-171450">
+              <a:buFont typeface="Arial" panose="020B0604020202020204" pitchFamily="34" charset="0"/>
+              <a:buChar char="•"/>
+            </a:pPr>
+            <a:r>
+              <a:rPr lang="en-US" sz="700" dirty="0">
+                <a:highlight>
+                  <a:srgbClr val="FFFF00"/>
+                </a:highlight>
+              </a:rPr>
+              <a:t>Verify jurisdiction.</a:t>
+            </a:r>
+          </a:p>
+          <a:p>
+            <a:pPr marL="171450" indent="-171450">
+              <a:buFont typeface="Arial" panose="020B0604020202020204" pitchFamily="34" charset="0"/>
+              <a:buChar char="•"/>
+            </a:pPr>
+            <a:r>
+              <a:rPr lang="en-US" sz="700" dirty="0">
+                <a:highlight>
+                  <a:srgbClr val="FFFF00"/>
+                </a:highlight>
+              </a:rPr>
+              <a:t>Verify effective dates.</a:t>
+            </a:r>
+          </a:p>
+          <a:p>
+            <a:pPr marL="171450" indent="-171450">
+              <a:buFont typeface="Arial" panose="020B0604020202020204" pitchFamily="34" charset="0"/>
+              <a:buChar char="•"/>
+            </a:pPr>
+            <a:endParaRPr lang="en-US" sz="700" dirty="0"/>
+          </a:p>
+          <a:p>
+            <a:r>
+              <a:rPr lang="en-US" sz="700" dirty="0"/>
+              <a:t>For time sensitive topics.</a:t>
+            </a:r>
+          </a:p>
+          <a:p>
+            <a:pPr marL="171450" indent="-171450">
+              <a:buFont typeface="Arial" panose="020B0604020202020204" pitchFamily="34" charset="0"/>
+              <a:buChar char="•"/>
+            </a:pPr>
+            <a:r>
+              <a:rPr lang="en-US" sz="700" dirty="0"/>
+              <a:t>Check date stamps.</a:t>
+            </a:r>
+          </a:p>
+          <a:p>
+            <a:pPr marL="171450" indent="-171450">
+              <a:buFont typeface="Arial" panose="020B0604020202020204" pitchFamily="34" charset="0"/>
+              <a:buChar char="•"/>
+            </a:pPr>
+            <a:r>
+              <a:rPr lang="en-US" sz="700" dirty="0"/>
+              <a:t>Warn about staleness.</a:t>
+            </a:r>
+          </a:p>
+          <a:p>
+            <a:pPr marL="171450" indent="-171450">
+              <a:buFont typeface="Arial" panose="020B0604020202020204" pitchFamily="34" charset="0"/>
+              <a:buChar char="•"/>
+            </a:pPr>
+            <a:r>
+              <a:rPr lang="en-US" sz="700" dirty="0"/>
+              <a:t>Add freshness disclaimers when appropriate.</a:t>
+            </a:r>
+          </a:p>
+          <a:p>
+            <a:pPr marL="171450" indent="-171450">
+              <a:buFont typeface="Arial" panose="020B0604020202020204" pitchFamily="34" charset="0"/>
+              <a:buChar char="•"/>
+            </a:pPr>
+            <a:endParaRPr lang="en-US" sz="700" dirty="0"/>
+          </a:p>
+          <a:p>
+            <a:r>
+              <a:rPr lang="en-US" sz="700" dirty="0"/>
+              <a:t>If no authoritative source exists.</a:t>
+            </a:r>
+          </a:p>
+          <a:p>
+            <a:pPr marL="171450" indent="-171450">
+              <a:buFont typeface="Arial" panose="020B0604020202020204" pitchFamily="34" charset="0"/>
+              <a:buChar char="•"/>
+            </a:pPr>
+            <a:r>
+              <a:rPr lang="en-US" sz="700" dirty="0"/>
+              <a:t>State No authoritative source found.</a:t>
+            </a:r>
+          </a:p>
+          <a:p>
+            <a:pPr marL="171450" indent="-171450">
+              <a:buFont typeface="Arial" panose="020B0604020202020204" pitchFamily="34" charset="0"/>
+              <a:buChar char="•"/>
+            </a:pPr>
+            <a:r>
+              <a:rPr lang="en-US" sz="700" dirty="0"/>
+              <a:t>Propose next steps such as further internal or external research.</a:t>
+            </a:r>
+          </a:p>
+          <a:p>
+            <a:pPr marL="171450" indent="-171450">
+              <a:buFont typeface="Arial" panose="020B0604020202020204" pitchFamily="34" charset="0"/>
+              <a:buChar char="•"/>
+            </a:pPr>
+            <a:r>
+              <a:rPr lang="en-US" sz="700" dirty="0"/>
+              <a:t>Never present inferences as facts.</a:t>
+            </a:r>
+          </a:p>
+          <a:p>
+            <a:endParaRPr lang="en-US" sz="700" dirty="0"/>
+          </a:p>
+          <a:p>
+            <a:pPr marL="171450" indent="-171450">
+              <a:buFont typeface="Arial" panose="020B0604020202020204" pitchFamily="34" charset="0"/>
+              <a:buChar char="•"/>
+            </a:pPr>
+            <a:r>
+              <a:rPr lang="en-US" sz="700" dirty="0">
+                <a:highlight>
+                  <a:srgbClr val="FFFF00"/>
+                </a:highlight>
+              </a:rPr>
+              <a:t>Always include a TLDR at the top of emails and documents.</a:t>
+            </a:r>
+          </a:p>
+          <a:p>
+            <a:pPr marL="171450" indent="-171450">
+              <a:buFont typeface="Arial" panose="020B0604020202020204" pitchFamily="34" charset="0"/>
+              <a:buChar char="•"/>
+            </a:pPr>
+            <a:r>
+              <a:rPr lang="en-US" sz="700" dirty="0"/>
+              <a:t>Present information in a logical order.</a:t>
+            </a:r>
+          </a:p>
+          <a:p>
+            <a:pPr marL="171450" indent="-171450">
+              <a:buFont typeface="Arial" panose="020B0604020202020204" pitchFamily="34" charset="0"/>
+              <a:buChar char="•"/>
+            </a:pPr>
+            <a:r>
+              <a:rPr lang="en-US" sz="700" dirty="0"/>
+              <a:t>Verified facts first.</a:t>
+            </a:r>
+          </a:p>
+          <a:p>
+            <a:pPr marL="171450" indent="-171450">
+              <a:buFont typeface="Arial" panose="020B0604020202020204" pitchFamily="34" charset="0"/>
+              <a:buChar char="•"/>
+            </a:pPr>
+            <a:r>
+              <a:rPr lang="en-US" sz="700" dirty="0"/>
+              <a:t>Inferences second.</a:t>
+            </a:r>
+          </a:p>
+          <a:p>
+            <a:pPr marL="171450" indent="-171450">
+              <a:buFont typeface="Arial" panose="020B0604020202020204" pitchFamily="34" charset="0"/>
+              <a:buChar char="•"/>
+            </a:pPr>
+            <a:r>
+              <a:rPr lang="en-US" sz="700" dirty="0"/>
+              <a:t>Recommendations and next steps last.</a:t>
+            </a:r>
+          </a:p>
+          <a:p>
+            <a:pPr marL="171450" indent="-171450">
+              <a:buFont typeface="Arial" panose="020B0604020202020204" pitchFamily="34" charset="0"/>
+              <a:buChar char="•"/>
+            </a:pPr>
+            <a:r>
+              <a:rPr lang="en-US" sz="700" dirty="0"/>
+              <a:t>Use clear section headings.</a:t>
+            </a:r>
+          </a:p>
+          <a:p>
+            <a:pPr marL="171450" indent="-171450">
+              <a:buFont typeface="Arial" panose="020B0604020202020204" pitchFamily="34" charset="0"/>
+              <a:buChar char="•"/>
+            </a:pPr>
+            <a:r>
+              <a:rPr lang="en-US" sz="700" dirty="0"/>
+              <a:t>Avoid decorative characters such as hyphens when writing text.</a:t>
+            </a:r>
+          </a:p>
+          <a:p>
+            <a:pPr marL="171450" indent="-171450">
+              <a:buFont typeface="Arial" panose="020B0604020202020204" pitchFamily="34" charset="0"/>
+              <a:buChar char="•"/>
+            </a:pPr>
+            <a:r>
+              <a:rPr lang="en-US" sz="700" dirty="0"/>
+              <a:t>Be concise while preserving precision.</a:t>
+            </a:r>
+          </a:p>
+          <a:p>
+            <a:endParaRPr lang="en-US" sz="700" dirty="0"/>
+          </a:p>
+          <a:p>
+            <a:pPr marL="171450" indent="-171450">
+              <a:buFont typeface="Arial" panose="020B0604020202020204" pitchFamily="34" charset="0"/>
+              <a:buChar char="•"/>
+            </a:pPr>
+            <a:r>
+              <a:rPr lang="en-US" sz="700" dirty="0"/>
+              <a:t>Never guess or fill gaps with plausible language.</a:t>
+            </a:r>
+          </a:p>
+          <a:p>
+            <a:pPr marL="171450" indent="-171450">
+              <a:buFont typeface="Arial" panose="020B0604020202020204" pitchFamily="34" charset="0"/>
+              <a:buChar char="•"/>
+            </a:pPr>
+            <a:r>
+              <a:rPr lang="en-US" sz="700" dirty="0"/>
+              <a:t>State clearly when information is missing.</a:t>
+            </a:r>
+          </a:p>
+          <a:p>
+            <a:pPr marL="171450" indent="-171450">
+              <a:buFont typeface="Arial" panose="020B0604020202020204" pitchFamily="34" charset="0"/>
+              <a:buChar char="•"/>
+            </a:pPr>
+            <a:r>
+              <a:rPr lang="en-US" sz="700" dirty="0"/>
+              <a:t>Surface multiple interpretations when they exist and explain tradeoffs.</a:t>
+            </a:r>
+          </a:p>
+          <a:p>
+            <a:pPr marL="171450" indent="-171450">
+              <a:buFont typeface="Arial" panose="020B0604020202020204" pitchFamily="34" charset="0"/>
+              <a:buChar char="•"/>
+            </a:pPr>
+            <a:r>
+              <a:rPr lang="en-US" sz="700" dirty="0"/>
+              <a:t>Favor clarity and honesty over completeness when certainty is low.</a:t>
+            </a:r>
+          </a:p>
+        </p:txBody>
+      </p:sp>
+    </p:spTree>
+    <p:extLst>
+      <p:ext uri="{BB962C8B-B14F-4D97-AF65-F5344CB8AC3E}">
+        <p14:creationId xmlns:p14="http://schemas.microsoft.com/office/powerpoint/2010/main" val="4172890142"/>
+      </p:ext>
+    </p:extLst>
+  </p:cSld>
+  <p:clrMapOvr>
+    <a:masterClrMapping/>
+  </p:clrMapOvr>
+</p:sld>
+</file>
+
+<file path=ppt/slides/slide25.xml><?xml version="1.0" encoding="utf-8"?>
+<p:sld xmlns:a="http://schemas.openxmlformats.org/drawingml/2006/main" xmlns:r="http://schemas.openxmlformats.org/officeDocument/2006/relationships" xmlns:p="http://schemas.openxmlformats.org/presentationml/2006/main">
+  <p:cSld>
+    <p:bg>
+      <p:bgPr>
+        <a:solidFill>
+          <a:srgbClr val="FFFFFF"/>
+        </a:solidFill>
+        <a:effectLst/>
+      </p:bgPr>
+    </p:bg>
+    <p:spTree>
+      <p:nvGrpSpPr>
+        <p:cNvPr id="1" name="">
+          <a:extLst>
+            <a:ext uri="{FF2B5EF4-FFF2-40B4-BE49-F238E27FC236}">
+              <a16:creationId xmlns:a16="http://schemas.microsoft.com/office/drawing/2014/main" id="{2D2611B9-10AA-2802-5881-FC60C46C7438}"/>
+            </a:ext>
+          </a:extLst>
+        </p:cNvPr>
+        <p:cNvGrpSpPr/>
+        <p:nvPr/>
+      </p:nvGrpSpPr>
+      <p:grpSpPr>
+        <a:xfrm>
+          <a:off x="0" y="0"/>
+          <a:ext cx="0" cy="0"/>
+          <a:chOff x="0" y="0"/>
+          <a:chExt cx="0" cy="0"/>
+        </a:xfrm>
+      </p:grpSpPr>
+      <p:sp>
+        <p:nvSpPr>
+          <p:cNvPr id="2" name="Shape 0">
+            <a:extLst>
+              <a:ext uri="{FF2B5EF4-FFF2-40B4-BE49-F238E27FC236}">
+                <a16:creationId xmlns:a16="http://schemas.microsoft.com/office/drawing/2014/main" id="{E5A9A79C-B6BE-F22A-EEA0-71BE3A64E5CA}"/>
+              </a:ext>
+            </a:extLst>
+          </p:cNvPr>
+          <p:cNvSpPr/>
+          <p:nvPr/>
+        </p:nvSpPr>
+        <p:spPr>
+          <a:xfrm>
+            <a:off x="0" y="0"/>
+            <a:ext cx="9144000" cy="777240"/>
+          </a:xfrm>
+          <a:prstGeom prst="rect">
+            <a:avLst/>
+          </a:prstGeom>
+          <a:solidFill>
+            <a:srgbClr val="0078D4"/>
+          </a:solidFill>
+          <a:ln w="12700">
+            <a:solidFill>
+              <a:srgbClr val="0078D4"/>
+            </a:solidFill>
+            <a:prstDash val="solid"/>
+          </a:ln>
+        </p:spPr>
+        <p:txBody>
+          <a:bodyPr/>
+          <a:lstStyle/>
+          <a:p>
+            <a:endParaRPr lang="en-US"/>
+          </a:p>
+        </p:txBody>
+      </p:sp>
+      <p:sp>
+        <p:nvSpPr>
+          <p:cNvPr id="3" name="Text 1">
+            <a:extLst>
+              <a:ext uri="{FF2B5EF4-FFF2-40B4-BE49-F238E27FC236}">
+                <a16:creationId xmlns:a16="http://schemas.microsoft.com/office/drawing/2014/main" id="{6E0BC3F0-E468-1A9E-1235-4160019057FA}"/>
+              </a:ext>
+            </a:extLst>
+          </p:cNvPr>
+          <p:cNvSpPr/>
+          <p:nvPr/>
+        </p:nvSpPr>
+        <p:spPr>
+          <a:xfrm>
+            <a:off x="502920" y="0"/>
+            <a:ext cx="8046720" cy="777240"/>
+          </a:xfrm>
+          <a:prstGeom prst="rect">
+            <a:avLst/>
+          </a:prstGeom>
+          <a:noFill/>
+          <a:ln/>
+        </p:spPr>
+        <p:txBody>
+          <a:bodyPr wrap="square" lIns="0" tIns="0" rIns="0" bIns="0" rtlCol="0" anchor="ctr"/>
+          <a:lstStyle/>
+          <a:p>
+            <a:pPr marL="0" indent="0" algn="l">
+              <a:buNone/>
+            </a:pPr>
+            <a:r>
+              <a:rPr lang="en-US" sz="2200" b="1" dirty="0">
+                <a:solidFill>
+                  <a:srgbClr val="FFFFFF"/>
+                </a:solidFill>
+                <a:latin typeface="Segoe UI" pitchFamily="34" charset="0"/>
+                <a:ea typeface="Segoe UI" pitchFamily="34" charset="-122"/>
+                <a:cs typeface="Segoe UI" pitchFamily="34" charset="-120"/>
+              </a:rPr>
+              <a:t>Additional Useful Prompts</a:t>
+            </a:r>
+            <a:endParaRPr lang="en-US" sz="800" dirty="0"/>
+          </a:p>
+        </p:txBody>
+      </p:sp>
+      <p:pic>
+        <p:nvPicPr>
+          <p:cNvPr id="4" name="Image 0" descr="preencoded.png">
+            <a:extLst>
+              <a:ext uri="{FF2B5EF4-FFF2-40B4-BE49-F238E27FC236}">
+                <a16:creationId xmlns:a16="http://schemas.microsoft.com/office/drawing/2014/main" id="{38498DE9-F3E5-E1D4-23D9-53827A6B4E2A}"/>
+              </a:ext>
+            </a:extLst>
+          </p:cNvPr>
+          <p:cNvPicPr>
+            <a:picLocks noChangeAspect="1"/>
+          </p:cNvPicPr>
+          <p:nvPr/>
+        </p:nvPicPr>
+        <p:blipFill>
+          <a:blip r:embed="rId3"/>
+          <a:stretch>
+            <a:fillRect/>
+          </a:stretch>
+        </p:blipFill>
+        <p:spPr>
+          <a:xfrm>
+            <a:off x="8503920" y="137160"/>
+            <a:ext cx="502920" cy="502920"/>
+          </a:xfrm>
+          <a:prstGeom prst="rect">
+            <a:avLst/>
+          </a:prstGeom>
+        </p:spPr>
+      </p:pic>
+      <p:sp>
+        <p:nvSpPr>
+          <p:cNvPr id="7" name="TextBox 6">
+            <a:extLst>
+              <a:ext uri="{FF2B5EF4-FFF2-40B4-BE49-F238E27FC236}">
+                <a16:creationId xmlns:a16="http://schemas.microsoft.com/office/drawing/2014/main" id="{0EA851A3-303A-BB04-8510-7DF818B94AF5}"/>
+              </a:ext>
+            </a:extLst>
+          </p:cNvPr>
+          <p:cNvSpPr txBox="1"/>
+          <p:nvPr/>
+        </p:nvSpPr>
+        <p:spPr>
+          <a:xfrm>
+            <a:off x="51196" y="943223"/>
+            <a:ext cx="4579144" cy="1015663"/>
+          </a:xfrm>
+          <a:prstGeom prst="rect">
+            <a:avLst/>
+          </a:prstGeom>
+          <a:noFill/>
+        </p:spPr>
+        <p:txBody>
+          <a:bodyPr wrap="square">
+            <a:spAutoFit/>
+          </a:bodyPr>
+          <a:lstStyle/>
+          <a:p>
+            <a:r>
+              <a:rPr lang="en-US" sz="1200" dirty="0"/>
+              <a:t>When you want the output to be just a block of text:</a:t>
+            </a:r>
+            <a:br>
+              <a:rPr lang="en-US" sz="1200" b="1" dirty="0"/>
+            </a:br>
+            <a:r>
+              <a:rPr lang="en-US" sz="1200" b="1" dirty="0"/>
+              <a:t>“Output the results only as a block of plain text. Do not include any other text. Always treat the block of plain text as a block of code that uses text as the code language. Always include a copy button to copy the contents of the box. Do not include sources.”</a:t>
+            </a:r>
+          </a:p>
+        </p:txBody>
+      </p:sp>
+      <p:sp>
+        <p:nvSpPr>
+          <p:cNvPr id="9" name="TextBox 8">
+            <a:extLst>
+              <a:ext uri="{FF2B5EF4-FFF2-40B4-BE49-F238E27FC236}">
+                <a16:creationId xmlns:a16="http://schemas.microsoft.com/office/drawing/2014/main" id="{AEEE76DA-E52D-9560-4822-ECB4785E5254}"/>
+              </a:ext>
+            </a:extLst>
+          </p:cNvPr>
+          <p:cNvSpPr txBox="1"/>
+          <p:nvPr/>
+        </p:nvSpPr>
+        <p:spPr>
+          <a:xfrm>
+            <a:off x="51196" y="2069327"/>
+            <a:ext cx="4579144" cy="600164"/>
+          </a:xfrm>
+          <a:prstGeom prst="rect">
+            <a:avLst/>
+          </a:prstGeom>
+          <a:noFill/>
+        </p:spPr>
+        <p:txBody>
+          <a:bodyPr wrap="square">
+            <a:spAutoFit/>
+          </a:bodyPr>
+          <a:lstStyle/>
+          <a:p>
+            <a:r>
+              <a:rPr lang="en-US" sz="1100" dirty="0"/>
+              <a:t>To get the prompt that got you to the current result. Useful when running out of iterations (Maximum of 30 Iterations per Chat):</a:t>
+            </a:r>
+            <a:br>
+              <a:rPr lang="en-US" sz="1100" b="1" dirty="0"/>
+            </a:br>
+            <a:r>
+              <a:rPr lang="en-US" sz="1100" b="1" dirty="0"/>
+              <a:t>“What is the resultant prompt so far?”</a:t>
+            </a:r>
+            <a:endParaRPr lang="en-US" sz="1100" dirty="0"/>
+          </a:p>
+        </p:txBody>
+      </p:sp>
+      <p:sp>
+        <p:nvSpPr>
+          <p:cNvPr id="11" name="TextBox 10">
+            <a:extLst>
+              <a:ext uri="{FF2B5EF4-FFF2-40B4-BE49-F238E27FC236}">
+                <a16:creationId xmlns:a16="http://schemas.microsoft.com/office/drawing/2014/main" id="{F9A699ED-65D9-01EC-0579-745D492B21EC}"/>
+              </a:ext>
+            </a:extLst>
+          </p:cNvPr>
+          <p:cNvSpPr txBox="1"/>
+          <p:nvPr/>
+        </p:nvSpPr>
+        <p:spPr>
+          <a:xfrm>
+            <a:off x="84534" y="2871832"/>
+            <a:ext cx="4579144" cy="830997"/>
+          </a:xfrm>
+          <a:prstGeom prst="rect">
+            <a:avLst/>
+          </a:prstGeom>
+          <a:noFill/>
+        </p:spPr>
+        <p:txBody>
+          <a:bodyPr wrap="square">
+            <a:spAutoFit/>
+          </a:bodyPr>
+          <a:lstStyle/>
+          <a:p>
+            <a:r>
+              <a:rPr lang="en-US" sz="1200" dirty="0"/>
+              <a:t>Blocking Off Calendar:</a:t>
+            </a:r>
+            <a:br>
+              <a:rPr lang="en-US" sz="1200" dirty="0">
+                <a:effectLst/>
+              </a:rPr>
+            </a:br>
+            <a:r>
+              <a:rPr lang="en-US" sz="1200" b="1" dirty="0">
+                <a:effectLst/>
+              </a:rPr>
+              <a:t>“Place the following hold on my calendar. Call it 'HOLD: Important Meeting' No agenda, no attendees. Just trying to block time that I offered for a QBR. All day event. The date is 6/15/2026.”</a:t>
+            </a:r>
+            <a:endParaRPr lang="en-US" sz="1200" b="1" dirty="0"/>
+          </a:p>
+        </p:txBody>
+      </p:sp>
+      <p:pic>
+        <p:nvPicPr>
+          <p:cNvPr id="13" name="Picture 12">
+            <a:extLst>
+              <a:ext uri="{FF2B5EF4-FFF2-40B4-BE49-F238E27FC236}">
+                <a16:creationId xmlns:a16="http://schemas.microsoft.com/office/drawing/2014/main" id="{D92D1894-0AFF-A9DC-07F3-958365659231}"/>
+              </a:ext>
+            </a:extLst>
+          </p:cNvPr>
+          <p:cNvPicPr>
+            <a:picLocks noChangeAspect="1"/>
+          </p:cNvPicPr>
+          <p:nvPr/>
+        </p:nvPicPr>
+        <p:blipFill>
+          <a:blip r:embed="rId4"/>
+          <a:stretch>
+            <a:fillRect/>
+          </a:stretch>
+        </p:blipFill>
+        <p:spPr>
+          <a:xfrm>
+            <a:off x="127396" y="3702829"/>
+            <a:ext cx="2149079" cy="657978"/>
+          </a:xfrm>
+          <a:prstGeom prst="rect">
+            <a:avLst/>
+          </a:prstGeom>
+        </p:spPr>
+      </p:pic>
+    </p:spTree>
+    <p:extLst>
+      <p:ext uri="{BB962C8B-B14F-4D97-AF65-F5344CB8AC3E}">
+        <p14:creationId xmlns:p14="http://schemas.microsoft.com/office/powerpoint/2010/main" val="705130868"/>
+      </p:ext>
+    </p:extLst>
+  </p:cSld>
+  <p:clrMapOvr>
+    <a:masterClrMapping/>
+  </p:clrMapOvr>
+</p:sld>
+</file>
+
+<file path=ppt/slides/slide26.xml><?xml version="1.0" encoding="utf-8"?>
 <p:sld xmlns:a="http://schemas.openxmlformats.org/drawingml/2006/main" xmlns:r="http://schemas.openxmlformats.org/officeDocument/2006/relationships" xmlns:p="http://schemas.openxmlformats.org/presentationml/2006/main">
   <p:cSld name="Slide 24">
     <p:bg>
@@ -17442,19 +18983,6 @@
             <a:pPr marL="0" indent="0" algn="l">
               <a:buNone/>
             </a:pPr>
-            <a:r>
-              <a:rPr lang="en-US" sz="14000" b="1" dirty="0">
-                <a:solidFill>
-                  <a:srgbClr val="0078D4">
-                    <a:alpha val="50000"/>
-                  </a:srgbClr>
-                </a:solidFill>
-                <a:latin typeface="Segoe UI" pitchFamily="34" charset="0"/>
-                <a:ea typeface="Segoe UI" pitchFamily="34" charset="-122"/>
-                <a:cs typeface="Segoe UI" pitchFamily="34" charset="-120"/>
-              </a:rPr>
-              <a:t>05</a:t>
-            </a:r>
             <a:endParaRPr lang="en-US" sz="14000" dirty="0"/>
           </a:p>
         </p:txBody>
@@ -17508,7 +19036,7 @@
               <a:buNone/>
             </a:pPr>
             <a:r>
-              <a:rPr lang="en-US" sz="3800" b="1" dirty="0">
+              <a:rPr lang="en-US" sz="3800" b="1">
                 <a:solidFill>
                   <a:srgbClr val="FFFFFF"/>
                 </a:solidFill>
@@ -17587,7 +19115,7 @@
                 <a:ea typeface="Segoe UI" pitchFamily="34" charset="-122"/>
                 <a:cs typeface="Segoe UI" pitchFamily="34" charset="-120"/>
               </a:rPr>
-              <a:t>Edit with Copilot + Cowork  |  10 minutes</a:t>
+              <a:t>Edit with Copilot  |  10 minutes</a:t>
             </a:r>
             <a:endParaRPr lang="en-US" sz="1800" dirty="0"/>
           </a:p>
@@ -17601,7 +19129,7 @@
 </p:sld>
 </file>
 
-<file path=ppt/slides/slide25.xml><?xml version="1.0" encoding="utf-8"?>
+<file path=ppt/slides/slide27.xml><?xml version="1.0" encoding="utf-8"?>
 <p:sld xmlns:a="http://schemas.openxmlformats.org/drawingml/2006/main" xmlns:r="http://schemas.openxmlformats.org/officeDocument/2006/relationships" xmlns:p="http://schemas.openxmlformats.org/presentationml/2006/main">
   <p:cSld name="Slide 25">
     <p:bg>
@@ -17683,7 +19211,7 @@
               <a:buNone/>
             </a:pPr>
             <a:r>
-              <a:rPr lang="en-US" sz="2200" b="1" dirty="0">
+              <a:rPr lang="en-US" sz="2200" b="1">
                 <a:solidFill>
                   <a:srgbClr val="FFFFFF"/>
                 </a:solidFill>
@@ -17746,7 +19274,7 @@
               <a:buNone/>
             </a:pPr>
             <a:r>
-              <a:rPr lang="en-US" sz="1400" b="1" dirty="0">
+              <a:rPr lang="en-US" sz="1400" b="1">
                 <a:solidFill>
                   <a:srgbClr val="0078D4"/>
                 </a:solidFill>
@@ -17785,7 +19313,7 @@
               <a:buNone/>
             </a:pPr>
             <a:r>
-              <a:rPr lang="en-US" sz="1200" i="1" dirty="0">
+              <a:rPr lang="en-US" sz="1200" i="1">
                 <a:solidFill>
                   <a:srgbClr val="605E5C"/>
                 </a:solidFill>
@@ -17828,7 +19356,7 @@
               <a:buChar char="•"/>
             </a:pPr>
             <a:r>
-              <a:rPr lang="en-US" sz="1300" dirty="0">
+              <a:rPr lang="en-US" sz="1300">
                 <a:solidFill>
                   <a:srgbClr val="201F1E"/>
                 </a:solidFill>
@@ -17838,7 +19366,7 @@
               </a:rPr>
               <a:t>Rewrite for tone, length, or clarity</a:t>
             </a:r>
-            <a:endParaRPr lang="en-US" sz="1300" dirty="0"/>
+            <a:endParaRPr lang="en-US" sz="1300"/>
           </a:p>
           <a:p>
             <a:pPr marL="342900" indent="-342900">
@@ -17849,7 +19377,7 @@
               <a:buChar char="•"/>
             </a:pPr>
             <a:r>
-              <a:rPr lang="en-US" sz="1300" dirty="0">
+              <a:rPr lang="en-US" sz="1300">
                 <a:solidFill>
                   <a:srgbClr val="201F1E"/>
                 </a:solidFill>
@@ -17859,7 +19387,7 @@
               </a:rPr>
               <a:t>Expand or condense any selection</a:t>
             </a:r>
-            <a:endParaRPr lang="en-US" sz="1300" dirty="0"/>
+            <a:endParaRPr lang="en-US" sz="1300"/>
           </a:p>
           <a:p>
             <a:pPr marL="342900" indent="-342900">
@@ -17870,7 +19398,7 @@
               <a:buChar char="•"/>
             </a:pPr>
             <a:r>
-              <a:rPr lang="en-US" sz="1300" dirty="0">
+              <a:rPr lang="en-US" sz="1300">
                 <a:solidFill>
                   <a:srgbClr val="201F1E"/>
                 </a:solidFill>
@@ -17880,7 +19408,7 @@
               </a:rPr>
               <a:t>Fix grammar and polish language</a:t>
             </a:r>
-            <a:endParaRPr lang="en-US" sz="1300" dirty="0"/>
+            <a:endParaRPr lang="en-US" sz="1300"/>
           </a:p>
           <a:p>
             <a:pPr marL="342900" indent="-342900">
@@ -17891,7 +19419,7 @@
               <a:buChar char="•"/>
             </a:pPr>
             <a:r>
-              <a:rPr lang="en-US" sz="1300" dirty="0">
+              <a:rPr lang="en-US" sz="1300">
                 <a:solidFill>
                   <a:srgbClr val="201F1E"/>
                 </a:solidFill>
@@ -18001,7 +19529,7 @@
               <a:buNone/>
             </a:pPr>
             <a:r>
-              <a:rPr lang="en-US" sz="900" b="1" dirty="0">
+              <a:rPr lang="en-US" sz="900" b="1">
                 <a:solidFill>
                   <a:srgbClr val="C0392B"/>
                 </a:solidFill>
@@ -18040,7 +19568,7 @@
               <a:buNone/>
             </a:pPr>
             <a:r>
-              <a:rPr lang="en-US" sz="1100" i="1" dirty="0">
+              <a:rPr lang="en-US" sz="1100" i="1">
                 <a:solidFill>
                   <a:srgbClr val="605E5C"/>
                 </a:solidFill>
@@ -18079,7 +19607,7 @@
               <a:buNone/>
             </a:pPr>
             <a:r>
-              <a:rPr lang="en-US" sz="1000" b="1" dirty="0">
+              <a:rPr lang="en-US" sz="1000" b="1">
                 <a:solidFill>
                   <a:srgbClr val="0078D4"/>
                 </a:solidFill>
@@ -18150,7 +19678,7 @@
               <a:buNone/>
             </a:pPr>
             <a:r>
-              <a:rPr lang="en-US" sz="900" b="1" dirty="0">
+              <a:rPr lang="en-US" sz="900" b="1">
                 <a:solidFill>
                   <a:srgbClr val="1E8449"/>
                 </a:solidFill>
@@ -18189,7 +19717,7 @@
               <a:buNone/>
             </a:pPr>
             <a:r>
-              <a:rPr lang="en-US" sz="1100" dirty="0">
+              <a:rPr lang="en-US" sz="1100">
                 <a:solidFill>
                   <a:srgbClr val="201F1E"/>
                 </a:solidFill>
@@ -18260,7 +19788,7 @@
               <a:buNone/>
             </a:pPr>
             <a:r>
-              <a:rPr lang="en-US" sz="1200" b="1" dirty="0">
+              <a:rPr lang="en-US" sz="1200" b="1">
                 <a:solidFill>
                   <a:srgbClr val="FFFFFF"/>
                 </a:solidFill>
@@ -18282,755 +19810,7 @@
 </p:sld>
 </file>
 
-<file path=ppt/slides/slide26.xml><?xml version="1.0" encoding="utf-8"?>
-<p:sld xmlns:a="http://schemas.openxmlformats.org/drawingml/2006/main" xmlns:r="http://schemas.openxmlformats.org/officeDocument/2006/relationships" xmlns:p="http://schemas.openxmlformats.org/presentationml/2006/main">
-  <p:cSld name="Slide 26">
-    <p:bg>
-      <p:bgPr>
-        <a:solidFill>
-          <a:srgbClr val="FFFFFF"/>
-        </a:solidFill>
-        <a:effectLst/>
-      </p:bgPr>
-    </p:bg>
-    <p:spTree>
-      <p:nvGrpSpPr>
-        <p:cNvPr id="1" name=""/>
-        <p:cNvGrpSpPr/>
-        <p:nvPr/>
-      </p:nvGrpSpPr>
-      <p:grpSpPr>
-        <a:xfrm>
-          <a:off x="0" y="0"/>
-          <a:ext cx="0" cy="0"/>
-          <a:chOff x="0" y="0"/>
-          <a:chExt cx="0" cy="0"/>
-        </a:xfrm>
-      </p:grpSpPr>
-      <p:sp>
-        <p:nvSpPr>
-          <p:cNvPr id="2" name="Shape 0"/>
-          <p:cNvSpPr/>
-          <p:nvPr/>
-        </p:nvSpPr>
-        <p:spPr>
-          <a:xfrm>
-            <a:off x="0" y="0"/>
-            <a:ext cx="9144000" cy="777240"/>
-          </a:xfrm>
-          <a:prstGeom prst="rect">
-            <a:avLst/>
-          </a:prstGeom>
-          <a:solidFill>
-            <a:srgbClr val="0078D4"/>
-          </a:solidFill>
-          <a:ln w="12700">
-            <a:solidFill>
-              <a:srgbClr val="0078D4"/>
-            </a:solidFill>
-            <a:prstDash val="solid"/>
-          </a:ln>
-        </p:spPr>
-        <p:txBody>
-          <a:bodyPr/>
-          <a:lstStyle/>
-          <a:p>
-            <a:endParaRPr lang="en-US"/>
-          </a:p>
-        </p:txBody>
-      </p:sp>
-      <p:sp>
-        <p:nvSpPr>
-          <p:cNvPr id="3" name="Text 1"/>
-          <p:cNvSpPr/>
-          <p:nvPr/>
-        </p:nvSpPr>
-        <p:spPr>
-          <a:xfrm>
-            <a:off x="502920" y="0"/>
-            <a:ext cx="8046720" cy="777240"/>
-          </a:xfrm>
-          <a:prstGeom prst="rect">
-            <a:avLst/>
-          </a:prstGeom>
-          <a:noFill/>
-          <a:ln/>
-        </p:spPr>
-        <p:txBody>
-          <a:bodyPr wrap="square" lIns="0" tIns="0" rIns="0" bIns="0" rtlCol="0" anchor="ctr"/>
-          <a:lstStyle/>
-          <a:p>
-            <a:pPr marL="0" indent="0" algn="l">
-              <a:buNone/>
-            </a:pPr>
-            <a:r>
-              <a:rPr lang="en-US" sz="2200" b="1" dirty="0">
-                <a:solidFill>
-                  <a:srgbClr val="FFFFFF"/>
-                </a:solidFill>
-                <a:latin typeface="Segoe UI" pitchFamily="34" charset="0"/>
-                <a:ea typeface="Segoe UI" pitchFamily="34" charset="-122"/>
-                <a:cs typeface="Segoe UI" pitchFamily="34" charset="-120"/>
-              </a:rPr>
-              <a:t>Introducing Cowork</a:t>
-            </a:r>
-            <a:endParaRPr lang="en-US" sz="2200" dirty="0"/>
-          </a:p>
-        </p:txBody>
-      </p:sp>
-      <p:pic>
-        <p:nvPicPr>
-          <p:cNvPr id="4" name="Image 0" descr="preencoded.png"/>
-          <p:cNvPicPr>
-            <a:picLocks noChangeAspect="1"/>
-          </p:cNvPicPr>
-          <p:nvPr/>
-        </p:nvPicPr>
-        <p:blipFill>
-          <a:blip r:embed="rId3"/>
-          <a:stretch>
-            <a:fillRect/>
-          </a:stretch>
-        </p:blipFill>
-        <p:spPr>
-          <a:xfrm>
-            <a:off x="8503920" y="137160"/>
-            <a:ext cx="502920" cy="502920"/>
-          </a:xfrm>
-          <a:prstGeom prst="rect">
-            <a:avLst/>
-          </a:prstGeom>
-        </p:spPr>
-      </p:pic>
-      <p:sp>
-        <p:nvSpPr>
-          <p:cNvPr id="5" name="Text 2"/>
-          <p:cNvSpPr/>
-          <p:nvPr/>
-        </p:nvSpPr>
-        <p:spPr>
-          <a:xfrm>
-            <a:off x="365760" y="932688"/>
-            <a:ext cx="8412480" cy="502920"/>
-          </a:xfrm>
-          <a:prstGeom prst="rect">
-            <a:avLst/>
-          </a:prstGeom>
-          <a:noFill/>
-          <a:ln/>
-        </p:spPr>
-        <p:txBody>
-          <a:bodyPr wrap="square" lIns="0" tIns="0" rIns="0" bIns="0" rtlCol="0" anchor="ctr"/>
-          <a:lstStyle/>
-          <a:p>
-            <a:pPr marL="0" indent="0" algn="l">
-              <a:buNone/>
-            </a:pPr>
-            <a:r>
-              <a:rPr lang="en-US" sz="1500" dirty="0">
-                <a:solidFill>
-                  <a:srgbClr val="201F1E"/>
-                </a:solidFill>
-                <a:latin typeface="Segoe UI" pitchFamily="34" charset="0"/>
-                <a:ea typeface="Segoe UI" pitchFamily="34" charset="-122"/>
-                <a:cs typeface="Segoe UI" pitchFamily="34" charset="-120"/>
-              </a:rPr>
-              <a:t>Your AI-powered productivity assistant embedded directly in M365</a:t>
-            </a:r>
-            <a:endParaRPr lang="en-US" sz="1500" dirty="0"/>
-          </a:p>
-        </p:txBody>
-      </p:sp>
-      <p:sp>
-        <p:nvSpPr>
-          <p:cNvPr id="6" name="Shape 3"/>
-          <p:cNvSpPr/>
-          <p:nvPr/>
-        </p:nvSpPr>
-        <p:spPr>
-          <a:xfrm>
-            <a:off x="365760" y="1572768"/>
-            <a:ext cx="2468880" cy="1508760"/>
-          </a:xfrm>
-          <a:prstGeom prst="rect">
-            <a:avLst/>
-          </a:prstGeom>
-          <a:solidFill>
-            <a:srgbClr val="004578"/>
-          </a:solidFill>
-          <a:ln w="12700">
-            <a:solidFill>
-              <a:srgbClr val="004578"/>
-            </a:solidFill>
-            <a:prstDash val="solid"/>
-          </a:ln>
-          <a:effectLst>
-            <a:outerShdw blurRad="101600" dist="38100" dir="8100000" algn="bl" rotWithShape="0">
-              <a:srgbClr val="000000">
-                <a:alpha val="12000"/>
-              </a:srgbClr>
-            </a:outerShdw>
-          </a:effectLst>
-        </p:spPr>
-        <p:txBody>
-          <a:bodyPr/>
-          <a:lstStyle/>
-          <a:p>
-            <a:endParaRPr lang="en-US"/>
-          </a:p>
-        </p:txBody>
-      </p:sp>
-      <p:pic>
-        <p:nvPicPr>
-          <p:cNvPr id="7" name="Image 1" descr="preencoded.png"/>
-          <p:cNvPicPr>
-            <a:picLocks noChangeAspect="1"/>
-          </p:cNvPicPr>
-          <p:nvPr/>
-        </p:nvPicPr>
-        <p:blipFill>
-          <a:blip r:embed="rId4"/>
-          <a:stretch>
-            <a:fillRect/>
-          </a:stretch>
-        </p:blipFill>
-        <p:spPr>
-          <a:xfrm>
-            <a:off x="1353312" y="1755648"/>
-            <a:ext cx="502920" cy="502920"/>
-          </a:xfrm>
-          <a:prstGeom prst="rect">
-            <a:avLst/>
-          </a:prstGeom>
-        </p:spPr>
-      </p:pic>
-      <p:sp>
-        <p:nvSpPr>
-          <p:cNvPr id="8" name="Text 4"/>
-          <p:cNvSpPr/>
-          <p:nvPr/>
-        </p:nvSpPr>
-        <p:spPr>
-          <a:xfrm>
-            <a:off x="475488" y="2350008"/>
-            <a:ext cx="2249424" cy="685800"/>
-          </a:xfrm>
-          <a:prstGeom prst="rect">
-            <a:avLst/>
-          </a:prstGeom>
-          <a:noFill/>
-          <a:ln/>
-        </p:spPr>
-        <p:txBody>
-          <a:bodyPr wrap="square" lIns="0" tIns="0" rIns="0" bIns="0" rtlCol="0" anchor="t"/>
-          <a:lstStyle/>
-          <a:p>
-            <a:pPr marL="0" indent="0" algn="ctr">
-              <a:buNone/>
-            </a:pPr>
-            <a:r>
-              <a:rPr lang="en-US" sz="1150" b="1" dirty="0">
-                <a:solidFill>
-                  <a:srgbClr val="FFFFFF"/>
-                </a:solidFill>
-                <a:latin typeface="Segoe UI" pitchFamily="34" charset="0"/>
-                <a:ea typeface="Segoe UI" pitchFamily="34" charset="-122"/>
-                <a:cs typeface="Segoe UI" pitchFamily="34" charset="-120"/>
-              </a:rPr>
-              <a:t>Inbox triage and email drafting</a:t>
-            </a:r>
-            <a:endParaRPr lang="en-US" sz="1150" dirty="0"/>
-          </a:p>
-        </p:txBody>
-      </p:sp>
-      <p:sp>
-        <p:nvSpPr>
-          <p:cNvPr id="9" name="Shape 5"/>
-          <p:cNvSpPr/>
-          <p:nvPr/>
-        </p:nvSpPr>
-        <p:spPr>
-          <a:xfrm>
-            <a:off x="3017520" y="1572768"/>
-            <a:ext cx="2468880" cy="1508760"/>
-          </a:xfrm>
-          <a:prstGeom prst="rect">
-            <a:avLst/>
-          </a:prstGeom>
-          <a:solidFill>
-            <a:srgbClr val="004578"/>
-          </a:solidFill>
-          <a:ln w="12700">
-            <a:solidFill>
-              <a:srgbClr val="004578"/>
-            </a:solidFill>
-            <a:prstDash val="solid"/>
-          </a:ln>
-          <a:effectLst>
-            <a:outerShdw blurRad="101600" dist="38100" dir="8100000" algn="bl" rotWithShape="0">
-              <a:srgbClr val="000000">
-                <a:alpha val="12000"/>
-              </a:srgbClr>
-            </a:outerShdw>
-          </a:effectLst>
-        </p:spPr>
-        <p:txBody>
-          <a:bodyPr/>
-          <a:lstStyle/>
-          <a:p>
-            <a:endParaRPr lang="en-US"/>
-          </a:p>
-        </p:txBody>
-      </p:sp>
-      <p:pic>
-        <p:nvPicPr>
-          <p:cNvPr id="10" name="Image 2" descr="preencoded.png"/>
-          <p:cNvPicPr>
-            <a:picLocks noChangeAspect="1"/>
-          </p:cNvPicPr>
-          <p:nvPr/>
-        </p:nvPicPr>
-        <p:blipFill>
-          <a:blip r:embed="rId5"/>
-          <a:stretch>
-            <a:fillRect/>
-          </a:stretch>
-        </p:blipFill>
-        <p:spPr>
-          <a:xfrm>
-            <a:off x="4005072" y="1755648"/>
-            <a:ext cx="502920" cy="502920"/>
-          </a:xfrm>
-          <a:prstGeom prst="rect">
-            <a:avLst/>
-          </a:prstGeom>
-        </p:spPr>
-      </p:pic>
-      <p:sp>
-        <p:nvSpPr>
-          <p:cNvPr id="11" name="Text 6"/>
-          <p:cNvSpPr/>
-          <p:nvPr/>
-        </p:nvSpPr>
-        <p:spPr>
-          <a:xfrm>
-            <a:off x="3127248" y="2350008"/>
-            <a:ext cx="2249424" cy="685800"/>
-          </a:xfrm>
-          <a:prstGeom prst="rect">
-            <a:avLst/>
-          </a:prstGeom>
-          <a:noFill/>
-          <a:ln/>
-        </p:spPr>
-        <p:txBody>
-          <a:bodyPr wrap="square" lIns="0" tIns="0" rIns="0" bIns="0" rtlCol="0" anchor="t"/>
-          <a:lstStyle/>
-          <a:p>
-            <a:pPr marL="0" indent="0" algn="ctr">
-              <a:buNone/>
-            </a:pPr>
-            <a:r>
-              <a:rPr lang="en-US" sz="1150" b="1" dirty="0">
-                <a:solidFill>
-                  <a:srgbClr val="FFFFFF"/>
-                </a:solidFill>
-                <a:latin typeface="Segoe UI" pitchFamily="34" charset="0"/>
-                <a:ea typeface="Segoe UI" pitchFamily="34" charset="-122"/>
-                <a:cs typeface="Segoe UI" pitchFamily="34" charset="-120"/>
-              </a:rPr>
-              <a:t>Calendar management and scheduling</a:t>
-            </a:r>
-            <a:endParaRPr lang="en-US" sz="1150" dirty="0"/>
-          </a:p>
-        </p:txBody>
-      </p:sp>
-      <p:sp>
-        <p:nvSpPr>
-          <p:cNvPr id="12" name="Shape 7"/>
-          <p:cNvSpPr/>
-          <p:nvPr/>
-        </p:nvSpPr>
-        <p:spPr>
-          <a:xfrm>
-            <a:off x="5669280" y="1572768"/>
-            <a:ext cx="2468880" cy="1508760"/>
-          </a:xfrm>
-          <a:prstGeom prst="rect">
-            <a:avLst/>
-          </a:prstGeom>
-          <a:solidFill>
-            <a:srgbClr val="004578"/>
-          </a:solidFill>
-          <a:ln w="12700">
-            <a:solidFill>
-              <a:srgbClr val="004578"/>
-            </a:solidFill>
-            <a:prstDash val="solid"/>
-          </a:ln>
-          <a:effectLst>
-            <a:outerShdw blurRad="101600" dist="38100" dir="8100000" algn="bl" rotWithShape="0">
-              <a:srgbClr val="000000">
-                <a:alpha val="12000"/>
-              </a:srgbClr>
-            </a:outerShdw>
-          </a:effectLst>
-        </p:spPr>
-        <p:txBody>
-          <a:bodyPr/>
-          <a:lstStyle/>
-          <a:p>
-            <a:endParaRPr lang="en-US"/>
-          </a:p>
-        </p:txBody>
-      </p:sp>
-      <p:pic>
-        <p:nvPicPr>
-          <p:cNvPr id="13" name="Image 3" descr="preencoded.png"/>
-          <p:cNvPicPr>
-            <a:picLocks noChangeAspect="1"/>
-          </p:cNvPicPr>
-          <p:nvPr/>
-        </p:nvPicPr>
-        <p:blipFill>
-          <a:blip r:embed="rId6"/>
-          <a:stretch>
-            <a:fillRect/>
-          </a:stretch>
-        </p:blipFill>
-        <p:spPr>
-          <a:xfrm>
-            <a:off x="6656832" y="1755648"/>
-            <a:ext cx="502920" cy="502920"/>
-          </a:xfrm>
-          <a:prstGeom prst="rect">
-            <a:avLst/>
-          </a:prstGeom>
-        </p:spPr>
-      </p:pic>
-      <p:sp>
-        <p:nvSpPr>
-          <p:cNvPr id="14" name="Text 8"/>
-          <p:cNvSpPr/>
-          <p:nvPr/>
-        </p:nvSpPr>
-        <p:spPr>
-          <a:xfrm>
-            <a:off x="5779008" y="2350008"/>
-            <a:ext cx="2249424" cy="685800"/>
-          </a:xfrm>
-          <a:prstGeom prst="rect">
-            <a:avLst/>
-          </a:prstGeom>
-          <a:noFill/>
-          <a:ln/>
-        </p:spPr>
-        <p:txBody>
-          <a:bodyPr wrap="square" lIns="0" tIns="0" rIns="0" bIns="0" rtlCol="0" anchor="t"/>
-          <a:lstStyle/>
-          <a:p>
-            <a:pPr marL="0" indent="0" algn="ctr">
-              <a:buNone/>
-            </a:pPr>
-            <a:r>
-              <a:rPr lang="en-US" sz="1150" b="1" dirty="0">
-                <a:solidFill>
-                  <a:srgbClr val="FFFFFF"/>
-                </a:solidFill>
-                <a:latin typeface="Segoe UI" pitchFamily="34" charset="0"/>
-                <a:ea typeface="Segoe UI" pitchFamily="34" charset="-122"/>
-                <a:cs typeface="Segoe UI" pitchFamily="34" charset="-120"/>
-              </a:rPr>
-              <a:t>Cross-app search and knowledge retrieval</a:t>
-            </a:r>
-            <a:endParaRPr lang="en-US" sz="1150" dirty="0"/>
-          </a:p>
-        </p:txBody>
-      </p:sp>
-      <p:sp>
-        <p:nvSpPr>
-          <p:cNvPr id="15" name="Shape 9"/>
-          <p:cNvSpPr/>
-          <p:nvPr/>
-        </p:nvSpPr>
-        <p:spPr>
-          <a:xfrm>
-            <a:off x="1691640" y="3246120"/>
-            <a:ext cx="2468880" cy="1508760"/>
-          </a:xfrm>
-          <a:prstGeom prst="rect">
-            <a:avLst/>
-          </a:prstGeom>
-          <a:solidFill>
-            <a:srgbClr val="004578"/>
-          </a:solidFill>
-          <a:ln w="12700">
-            <a:solidFill>
-              <a:srgbClr val="004578"/>
-            </a:solidFill>
-            <a:prstDash val="solid"/>
-          </a:ln>
-          <a:effectLst>
-            <a:outerShdw blurRad="101600" dist="38100" dir="8100000" algn="bl" rotWithShape="0">
-              <a:srgbClr val="000000">
-                <a:alpha val="12000"/>
-              </a:srgbClr>
-            </a:outerShdw>
-          </a:effectLst>
-        </p:spPr>
-        <p:txBody>
-          <a:bodyPr/>
-          <a:lstStyle/>
-          <a:p>
-            <a:endParaRPr lang="en-US"/>
-          </a:p>
-        </p:txBody>
-      </p:sp>
-      <p:pic>
-        <p:nvPicPr>
-          <p:cNvPr id="16" name="Image 4" descr="preencoded.png"/>
-          <p:cNvPicPr>
-            <a:picLocks noChangeAspect="1"/>
-          </p:cNvPicPr>
-          <p:nvPr/>
-        </p:nvPicPr>
-        <p:blipFill>
-          <a:blip r:embed="rId7"/>
-          <a:stretch>
-            <a:fillRect/>
-          </a:stretch>
-        </p:blipFill>
-        <p:spPr>
-          <a:xfrm>
-            <a:off x="2679192" y="3429000"/>
-            <a:ext cx="502920" cy="502920"/>
-          </a:xfrm>
-          <a:prstGeom prst="rect">
-            <a:avLst/>
-          </a:prstGeom>
-        </p:spPr>
-      </p:pic>
-      <p:sp>
-        <p:nvSpPr>
-          <p:cNvPr id="17" name="Text 10"/>
-          <p:cNvSpPr/>
-          <p:nvPr/>
-        </p:nvSpPr>
-        <p:spPr>
-          <a:xfrm>
-            <a:off x="1801368" y="4023360"/>
-            <a:ext cx="2249424" cy="685800"/>
-          </a:xfrm>
-          <a:prstGeom prst="rect">
-            <a:avLst/>
-          </a:prstGeom>
-          <a:noFill/>
-          <a:ln/>
-        </p:spPr>
-        <p:txBody>
-          <a:bodyPr wrap="square" lIns="0" tIns="0" rIns="0" bIns="0" rtlCol="0" anchor="t"/>
-          <a:lstStyle/>
-          <a:p>
-            <a:pPr marL="0" indent="0" algn="ctr">
-              <a:buNone/>
-            </a:pPr>
-            <a:r>
-              <a:rPr lang="en-US" sz="1150" b="1" dirty="0">
-                <a:solidFill>
-                  <a:srgbClr val="FFFFFF"/>
-                </a:solidFill>
-                <a:latin typeface="Segoe UI" pitchFamily="34" charset="0"/>
-                <a:ea typeface="Segoe UI" pitchFamily="34" charset="-122"/>
-                <a:cs typeface="Segoe UI" pitchFamily="34" charset="-120"/>
-              </a:rPr>
-              <a:t>Automated daily briefings</a:t>
-            </a:r>
-            <a:endParaRPr lang="en-US" sz="1150" dirty="0"/>
-          </a:p>
-        </p:txBody>
-      </p:sp>
-      <p:sp>
-        <p:nvSpPr>
-          <p:cNvPr id="18" name="Shape 11"/>
-          <p:cNvSpPr/>
-          <p:nvPr/>
-        </p:nvSpPr>
-        <p:spPr>
-          <a:xfrm>
-            <a:off x="4343400" y="3246120"/>
-            <a:ext cx="2468880" cy="1508760"/>
-          </a:xfrm>
-          <a:prstGeom prst="rect">
-            <a:avLst/>
-          </a:prstGeom>
-          <a:solidFill>
-            <a:srgbClr val="004578"/>
-          </a:solidFill>
-          <a:ln w="12700">
-            <a:solidFill>
-              <a:srgbClr val="004578"/>
-            </a:solidFill>
-            <a:prstDash val="solid"/>
-          </a:ln>
-          <a:effectLst>
-            <a:outerShdw blurRad="101600" dist="38100" dir="8100000" algn="bl" rotWithShape="0">
-              <a:srgbClr val="000000">
-                <a:alpha val="12000"/>
-              </a:srgbClr>
-            </a:outerShdw>
-          </a:effectLst>
-        </p:spPr>
-        <p:txBody>
-          <a:bodyPr/>
-          <a:lstStyle/>
-          <a:p>
-            <a:endParaRPr lang="en-US"/>
-          </a:p>
-        </p:txBody>
-      </p:sp>
-      <p:pic>
-        <p:nvPicPr>
-          <p:cNvPr id="19" name="Image 5" descr="preencoded.png"/>
-          <p:cNvPicPr>
-            <a:picLocks noChangeAspect="1"/>
-          </p:cNvPicPr>
-          <p:nvPr/>
-        </p:nvPicPr>
-        <p:blipFill>
-          <a:blip r:embed="rId8"/>
-          <a:stretch>
-            <a:fillRect/>
-          </a:stretch>
-        </p:blipFill>
-        <p:spPr>
-          <a:xfrm>
-            <a:off x="5330952" y="3429000"/>
-            <a:ext cx="502920" cy="502920"/>
-          </a:xfrm>
-          <a:prstGeom prst="rect">
-            <a:avLst/>
-          </a:prstGeom>
-        </p:spPr>
-      </p:pic>
-      <p:sp>
-        <p:nvSpPr>
-          <p:cNvPr id="20" name="Text 12"/>
-          <p:cNvSpPr/>
-          <p:nvPr/>
-        </p:nvSpPr>
-        <p:spPr>
-          <a:xfrm>
-            <a:off x="4453128" y="4023360"/>
-            <a:ext cx="2249424" cy="685800"/>
-          </a:xfrm>
-          <a:prstGeom prst="rect">
-            <a:avLst/>
-          </a:prstGeom>
-          <a:noFill/>
-          <a:ln/>
-        </p:spPr>
-        <p:txBody>
-          <a:bodyPr wrap="square" lIns="0" tIns="0" rIns="0" bIns="0" rtlCol="0" anchor="t"/>
-          <a:lstStyle/>
-          <a:p>
-            <a:pPr marL="0" indent="0" algn="ctr">
-              <a:buNone/>
-            </a:pPr>
-            <a:r>
-              <a:rPr lang="en-US" sz="1150" b="1" dirty="0">
-                <a:solidFill>
-                  <a:srgbClr val="FFFFFF"/>
-                </a:solidFill>
-                <a:latin typeface="Segoe UI" pitchFamily="34" charset="0"/>
-                <a:ea typeface="Segoe UI" pitchFamily="34" charset="-122"/>
-                <a:cs typeface="Segoe UI" pitchFamily="34" charset="-120"/>
-              </a:rPr>
-              <a:t>Scheduled tasks that run automatically</a:t>
-            </a:r>
-            <a:endParaRPr lang="en-US" sz="1150" dirty="0"/>
-          </a:p>
-        </p:txBody>
-      </p:sp>
-      <p:sp>
-        <p:nvSpPr>
-          <p:cNvPr id="21" name="Shape 13"/>
-          <p:cNvSpPr/>
-          <p:nvPr/>
-        </p:nvSpPr>
-        <p:spPr>
-          <a:xfrm>
-            <a:off x="365760" y="4681728"/>
-            <a:ext cx="8412480" cy="292608"/>
-          </a:xfrm>
-          <a:prstGeom prst="rect">
-            <a:avLst/>
-          </a:prstGeom>
-          <a:solidFill>
-            <a:srgbClr val="0078D4"/>
-          </a:solidFill>
-          <a:ln w="12700">
-            <a:solidFill>
-              <a:srgbClr val="0078D4"/>
-            </a:solidFill>
-            <a:prstDash val="solid"/>
-          </a:ln>
-        </p:spPr>
-        <p:txBody>
-          <a:bodyPr/>
-          <a:lstStyle/>
-          <a:p>
-            <a:endParaRPr lang="en-US"/>
-          </a:p>
-        </p:txBody>
-      </p:sp>
-      <p:sp>
-        <p:nvSpPr>
-          <p:cNvPr id="22" name="Text 14"/>
-          <p:cNvSpPr/>
-          <p:nvPr/>
-        </p:nvSpPr>
-        <p:spPr>
-          <a:xfrm>
-            <a:off x="365760" y="4681728"/>
-            <a:ext cx="8412480" cy="292608"/>
-          </a:xfrm>
-          <a:prstGeom prst="rect">
-            <a:avLst/>
-          </a:prstGeom>
-          <a:noFill/>
-          <a:ln/>
-        </p:spPr>
-        <p:txBody>
-          <a:bodyPr wrap="square" lIns="0" tIns="0" rIns="0" bIns="0" rtlCol="0" anchor="ctr"/>
-          <a:lstStyle/>
-          <a:p>
-            <a:pPr marL="0" indent="0" algn="ctr">
-              <a:buNone/>
-            </a:pPr>
-            <a:r>
-              <a:rPr lang="en-US" sz="1300" b="1" i="1" dirty="0">
-                <a:solidFill>
-                  <a:srgbClr val="FFFFFF"/>
-                </a:solidFill>
-                <a:latin typeface="Segoe UI" pitchFamily="34" charset="0"/>
-                <a:ea typeface="Segoe UI" pitchFamily="34" charset="-122"/>
-                <a:cs typeface="Segoe UI" pitchFamily="34" charset="-120"/>
-              </a:rPr>
-              <a:t>Cowork doesn't just assist — it acts.</a:t>
-            </a:r>
-            <a:endParaRPr lang="en-US" sz="1300" dirty="0"/>
-          </a:p>
-        </p:txBody>
-      </p:sp>
-    </p:spTree>
-  </p:cSld>
-  <p:clrMapOvr>
-    <a:masterClrMapping/>
-  </p:clrMapOvr>
-</p:sld>
-</file>
-
-<file path=ppt/slides/slide27.xml><?xml version="1.0" encoding="utf-8"?>
+<file path=ppt/slides/slide28.xml><?xml version="1.0" encoding="utf-8"?>
 <p:sld xmlns:a="http://schemas.openxmlformats.org/drawingml/2006/main" xmlns:r="http://schemas.openxmlformats.org/officeDocument/2006/relationships" xmlns:p="http://schemas.openxmlformats.org/presentationml/2006/main">
   <p:cSld name="Slide 27">
     <p:bg>
@@ -19112,7 +19892,7 @@
               <a:buNone/>
             </a:pPr>
             <a:r>
-              <a:rPr lang="en-US" sz="2200" b="1" dirty="0">
+              <a:rPr lang="en-US" sz="2200" b="1">
                 <a:solidFill>
                   <a:srgbClr val="FFFFFF"/>
                 </a:solidFill>
@@ -19175,7 +19955,7 @@
               <a:buNone/>
             </a:pPr>
             <a:r>
-              <a:rPr lang="en-US" sz="1300" i="1" dirty="0">
+              <a:rPr lang="en-US" sz="1300" i="1">
                 <a:solidFill>
                   <a:srgbClr val="605E5C"/>
                 </a:solidFill>
@@ -19278,7 +20058,7 @@
               <a:buNone/>
             </a:pPr>
             <a:r>
-              <a:rPr lang="en-US" sz="900" b="1" dirty="0">
+              <a:rPr lang="en-US" sz="900" b="1">
                 <a:solidFill>
                   <a:srgbClr val="FFFFFF"/>
                 </a:solidFill>
@@ -19288,14 +20068,14 @@
               </a:rPr>
               <a:t>COMING</a:t>
             </a:r>
-            <a:endParaRPr lang="en-US" sz="900" dirty="0"/>
+            <a:endParaRPr lang="en-US" sz="900"/>
           </a:p>
           <a:p>
             <a:pPr marL="0" indent="0" algn="ctr">
               <a:buNone/>
             </a:pPr>
             <a:r>
-              <a:rPr lang="en-US" sz="900" b="1" dirty="0">
+              <a:rPr lang="en-US" sz="900" b="1">
                 <a:solidFill>
                   <a:srgbClr val="FFFFFF"/>
                 </a:solidFill>
@@ -19358,7 +20138,7 @@
               <a:buNone/>
             </a:pPr>
             <a:r>
-              <a:rPr lang="en-US" sz="1300" b="1" dirty="0">
+              <a:rPr lang="en-US" sz="1300" b="1">
                 <a:solidFill>
                   <a:srgbClr val="201F1E"/>
                 </a:solidFill>
@@ -19397,7 +20177,7 @@
               <a:buNone/>
             </a:pPr>
             <a:r>
-              <a:rPr lang="en-US" sz="1100" dirty="0">
+              <a:rPr lang="en-US" sz="1100">
                 <a:solidFill>
                   <a:srgbClr val="605E5C"/>
                 </a:solidFill>
@@ -19500,7 +20280,7 @@
               <a:buNone/>
             </a:pPr>
             <a:r>
-              <a:rPr lang="en-US" sz="900" b="1" dirty="0">
+              <a:rPr lang="en-US" sz="900" b="1">
                 <a:solidFill>
                   <a:srgbClr val="FFFFFF"/>
                 </a:solidFill>
@@ -19510,14 +20290,14 @@
               </a:rPr>
               <a:t>COMING</a:t>
             </a:r>
-            <a:endParaRPr lang="en-US" sz="900" dirty="0"/>
+            <a:endParaRPr lang="en-US" sz="900"/>
           </a:p>
           <a:p>
             <a:pPr marL="0" indent="0" algn="ctr">
               <a:buNone/>
             </a:pPr>
             <a:r>
-              <a:rPr lang="en-US" sz="900" b="1" dirty="0">
+              <a:rPr lang="en-US" sz="900" b="1">
                 <a:solidFill>
                   <a:srgbClr val="FFFFFF"/>
                 </a:solidFill>
@@ -19580,7 +20360,7 @@
               <a:buNone/>
             </a:pPr>
             <a:r>
-              <a:rPr lang="en-US" sz="1300" b="1" dirty="0">
+              <a:rPr lang="en-US" sz="1300" b="1">
                 <a:solidFill>
                   <a:srgbClr val="201F1E"/>
                 </a:solidFill>
@@ -19619,7 +20399,7 @@
               <a:buNone/>
             </a:pPr>
             <a:r>
-              <a:rPr lang="en-US" sz="1100" dirty="0">
+              <a:rPr lang="en-US" sz="1100">
                 <a:solidFill>
                   <a:srgbClr val="605E5C"/>
                 </a:solidFill>
@@ -19722,7 +20502,7 @@
               <a:buNone/>
             </a:pPr>
             <a:r>
-              <a:rPr lang="en-US" sz="900" b="1" dirty="0">
+              <a:rPr lang="en-US" sz="900" b="1">
                 <a:solidFill>
                   <a:srgbClr val="FFFFFF"/>
                 </a:solidFill>
@@ -19732,14 +20512,14 @@
               </a:rPr>
               <a:t>COMING</a:t>
             </a:r>
-            <a:endParaRPr lang="en-US" sz="900" dirty="0"/>
+            <a:endParaRPr lang="en-US" sz="900"/>
           </a:p>
           <a:p>
             <a:pPr marL="0" indent="0" algn="ctr">
               <a:buNone/>
             </a:pPr>
             <a:r>
-              <a:rPr lang="en-US" sz="900" b="1" dirty="0">
+              <a:rPr lang="en-US" sz="900" b="1">
                 <a:solidFill>
                   <a:srgbClr val="FFFFFF"/>
                 </a:solidFill>
@@ -19802,7 +20582,7 @@
               <a:buNone/>
             </a:pPr>
             <a:r>
-              <a:rPr lang="en-US" sz="1300" b="1" dirty="0">
+              <a:rPr lang="en-US" sz="1300" b="1">
                 <a:solidFill>
                   <a:srgbClr val="201F1E"/>
                 </a:solidFill>
@@ -19841,7 +20621,7 @@
               <a:buNone/>
             </a:pPr>
             <a:r>
-              <a:rPr lang="en-US" sz="1100" dirty="0">
+              <a:rPr lang="en-US" sz="1100">
                 <a:solidFill>
                   <a:srgbClr val="605E5C"/>
                 </a:solidFill>
@@ -19944,7 +20724,7 @@
               <a:buNone/>
             </a:pPr>
             <a:r>
-              <a:rPr lang="en-US" sz="900" b="1" dirty="0">
+              <a:rPr lang="en-US" sz="900" b="1">
                 <a:solidFill>
                   <a:srgbClr val="FFFFFF"/>
                 </a:solidFill>
@@ -19954,14 +20734,14 @@
               </a:rPr>
               <a:t>COMING</a:t>
             </a:r>
-            <a:endParaRPr lang="en-US" sz="900" dirty="0"/>
+            <a:endParaRPr lang="en-US" sz="900"/>
           </a:p>
           <a:p>
             <a:pPr marL="0" indent="0" algn="ctr">
               <a:buNone/>
             </a:pPr>
             <a:r>
-              <a:rPr lang="en-US" sz="900" b="1" dirty="0">
+              <a:rPr lang="en-US" sz="900" b="1">
                 <a:solidFill>
                   <a:srgbClr val="FFFFFF"/>
                 </a:solidFill>
@@ -20024,7 +20804,7 @@
               <a:buNone/>
             </a:pPr>
             <a:r>
-              <a:rPr lang="en-US" sz="1300" b="1" dirty="0">
+              <a:rPr lang="en-US" sz="1300" b="1">
                 <a:solidFill>
                   <a:srgbClr val="201F1E"/>
                 </a:solidFill>
@@ -20063,7 +20843,7 @@
               <a:buNone/>
             </a:pPr>
             <a:r>
-              <a:rPr lang="en-US" sz="1100" dirty="0">
+              <a:rPr lang="en-US" sz="1100">
                 <a:solidFill>
                   <a:srgbClr val="605E5C"/>
                 </a:solidFill>
@@ -20085,7 +20865,7 @@
 </p:sld>
 </file>
 
-<file path=ppt/slides/slide28.xml><?xml version="1.0" encoding="utf-8"?>
+<file path=ppt/slides/slide29.xml><?xml version="1.0" encoding="utf-8"?>
 <p:sld xmlns:a="http://schemas.openxmlformats.org/drawingml/2006/main" xmlns:r="http://schemas.openxmlformats.org/officeDocument/2006/relationships" xmlns:p="http://schemas.openxmlformats.org/presentationml/2006/main">
   <p:cSld name="Slide 28">
     <p:bg>
@@ -20199,7 +20979,7 @@
               <a:buNone/>
             </a:pPr>
             <a:r>
-              <a:rPr lang="en-US" sz="3000" b="1" dirty="0">
+              <a:rPr lang="en-US" sz="3000" b="1">
                 <a:solidFill>
                   <a:srgbClr val="FFFFFF"/>
                 </a:solidFill>
@@ -20302,7 +21082,7 @@
               <a:buNone/>
             </a:pPr>
             <a:r>
-              <a:rPr lang="en-US" sz="1600" b="1" dirty="0">
+              <a:rPr lang="en-US" sz="1600" b="1">
                 <a:solidFill>
                   <a:srgbClr val="FFFFFF"/>
                 </a:solidFill>
@@ -20341,7 +21121,7 @@
               <a:buNone/>
             </a:pPr>
             <a:r>
-              <a:rPr lang="en-US" sz="1400" b="1" dirty="0">
+              <a:rPr lang="en-US" sz="1400" b="1">
                 <a:solidFill>
                   <a:srgbClr val="FFFFFF"/>
                 </a:solidFill>
@@ -20444,7 +21224,7 @@
               <a:buNone/>
             </a:pPr>
             <a:r>
-              <a:rPr lang="en-US" sz="1600" b="1" dirty="0">
+              <a:rPr lang="en-US" sz="1600" b="1">
                 <a:solidFill>
                   <a:srgbClr val="FFFFFF"/>
                 </a:solidFill>
@@ -20483,7 +21263,7 @@
               <a:buNone/>
             </a:pPr>
             <a:r>
-              <a:rPr lang="en-US" sz="1400" b="1" dirty="0">
+              <a:rPr lang="en-US" sz="1400" b="1">
                 <a:solidFill>
                   <a:srgbClr val="FFFFFF"/>
                 </a:solidFill>
@@ -20586,7 +21366,7 @@
               <a:buNone/>
             </a:pPr>
             <a:r>
-              <a:rPr lang="en-US" sz="1600" b="1" dirty="0">
+              <a:rPr lang="en-US" sz="1600" b="1">
                 <a:solidFill>
                   <a:srgbClr val="FFFFFF"/>
                 </a:solidFill>
@@ -20625,7 +21405,7 @@
               <a:buNone/>
             </a:pPr>
             <a:r>
-              <a:rPr lang="en-US" sz="1400" b="1" dirty="0">
+              <a:rPr lang="en-US" sz="1400" b="1">
                 <a:solidFill>
                   <a:srgbClr val="FFFFFF"/>
                 </a:solidFill>
@@ -20696,7 +21476,7 @@
               <a:buNone/>
             </a:pPr>
             <a:r>
-              <a:rPr lang="en-US" sz="1200" b="1" kern="0" spc="200" dirty="0">
+              <a:rPr lang="en-US" sz="1200" b="1" kern="0" spc="200">
                 <a:solidFill>
                   <a:srgbClr val="D2D0CE"/>
                 </a:solidFill>
@@ -20767,7 +21547,7 @@
               <a:buNone/>
             </a:pPr>
             <a:r>
-              <a:rPr lang="en-US" sz="1100" b="1" dirty="0">
+              <a:rPr lang="en-US" sz="1100" b="1">
                 <a:solidFill>
                   <a:srgbClr val="D2D0CE"/>
                 </a:solidFill>
@@ -20779,7 +21559,7 @@
 </a:t>
             </a:r>
             <a:r>
-              <a:rPr lang="en-US" sz="1000" dirty="0">
+              <a:rPr lang="en-US" sz="1000">
                 <a:solidFill>
                   <a:srgbClr val="7EC8E3"/>
                 </a:solidFill>
@@ -20791,7 +21571,7 @@
 </a:t>
             </a:r>
             <a:r>
-              <a:rPr lang="en-US" sz="1100" b="1" dirty="0">
+              <a:rPr lang="en-US" sz="1100" b="1">
                 <a:solidFill>
                   <a:srgbClr val="D2D0CE"/>
                 </a:solidFill>
@@ -20803,7 +21583,7 @@
 </a:t>
             </a:r>
             <a:r>
-              <a:rPr lang="en-US" sz="1000" dirty="0">
+              <a:rPr lang="en-US" sz="1000">
                 <a:solidFill>
                   <a:srgbClr val="7EC8E3"/>
                 </a:solidFill>
@@ -20842,7 +21622,7 @@
               <a:buNone/>
             </a:pPr>
             <a:r>
-              <a:rPr lang="en-US" sz="2200" b="1" dirty="0">
+              <a:rPr lang="en-US" sz="2200" b="1">
                 <a:solidFill>
                   <a:srgbClr val="FFFFFF"/>
                 </a:solidFill>
@@ -20881,7 +21661,7 @@
               <a:buNone/>
             </a:pPr>
             <a:r>
-              <a:rPr lang="en-US" sz="1100" dirty="0">
+              <a:rPr lang="en-US" sz="1100">
                 <a:solidFill>
                   <a:srgbClr val="FFFFFF"/>
                 </a:solidFill>
@@ -20984,19 +21764,6 @@
             <a:pPr marL="0" indent="0" algn="l">
               <a:buNone/>
             </a:pPr>
-            <a:r>
-              <a:rPr lang="en-US" sz="14000" b="1" dirty="0">
-                <a:solidFill>
-                  <a:srgbClr val="0078D4">
-                    <a:alpha val="50000"/>
-                  </a:srgbClr>
-                </a:solidFill>
-                <a:latin typeface="Segoe UI" pitchFamily="34" charset="0"/>
-                <a:ea typeface="Segoe UI" pitchFamily="34" charset="-122"/>
-                <a:cs typeface="Segoe UI" pitchFamily="34" charset="-120"/>
-              </a:rPr>
-              <a:t>01</a:t>
-            </a:r>
             <a:endParaRPr lang="en-US" sz="14000" dirty="0"/>
           </a:p>
         </p:txBody>
@@ -21050,7 +21817,7 @@
               <a:buNone/>
             </a:pPr>
             <a:r>
-              <a:rPr lang="en-US" sz="3800" b="1" dirty="0">
+              <a:rPr lang="en-US" sz="3800" b="1">
                 <a:solidFill>
                   <a:srgbClr val="FFFFFF"/>
                 </a:solidFill>
@@ -21060,14 +21827,14 @@
               </a:rPr>
               <a:t>What Makes a Great</a:t>
             </a:r>
-            <a:endParaRPr lang="en-US" sz="3800" dirty="0"/>
+            <a:endParaRPr lang="en-US" sz="3800"/>
           </a:p>
           <a:p>
             <a:pPr marL="0" indent="0" algn="l">
               <a:buNone/>
             </a:pPr>
             <a:r>
-              <a:rPr lang="en-US" sz="3800" b="1" dirty="0">
+              <a:rPr lang="en-US" sz="3800" b="1">
                 <a:solidFill>
                   <a:srgbClr val="FFFFFF"/>
                 </a:solidFill>
@@ -21138,7 +21905,7 @@
               <a:buNone/>
             </a:pPr>
             <a:r>
-              <a:rPr lang="en-US" sz="1800" dirty="0">
+              <a:rPr lang="en-US" sz="1800">
                 <a:solidFill>
                   <a:srgbClr val="D2D0CE"/>
                 </a:solidFill>
@@ -21242,7 +22009,7 @@
               <a:buNone/>
             </a:pPr>
             <a:r>
-              <a:rPr lang="en-US" sz="2200" b="1" dirty="0">
+              <a:rPr lang="en-US" sz="2200" b="1">
                 <a:solidFill>
                   <a:srgbClr val="FFFFFF"/>
                 </a:solidFill>
@@ -21341,7 +22108,7 @@
               <a:buChar char="•"/>
             </a:pPr>
             <a:r>
-              <a:rPr lang="en-US" sz="1700" dirty="0">
+              <a:rPr lang="en-US" sz="1700">
                 <a:solidFill>
                   <a:srgbClr val="201F1E"/>
                 </a:solidFill>
@@ -21351,7 +22118,7 @@
               </a:rPr>
               <a:t>Copilot is only as good as what you ask</a:t>
             </a:r>
-            <a:endParaRPr lang="en-US" sz="1700" dirty="0"/>
+            <a:endParaRPr lang="en-US" sz="1700"/>
           </a:p>
           <a:p>
             <a:pPr marL="0" indent="0">
@@ -21360,7 +22127,7 @@
               </a:spcAft>
               <a:buNone/>
             </a:pPr>
-            <a:endParaRPr lang="en-US" sz="1700" dirty="0"/>
+            <a:endParaRPr lang="en-US" sz="1700"/>
           </a:p>
           <a:p>
             <a:pPr marL="342900" indent="-342900">
@@ -21371,7 +22138,7 @@
               <a:buChar char="•"/>
             </a:pPr>
             <a:r>
-              <a:rPr lang="en-US" sz="1700" b="1" dirty="0">
+              <a:rPr lang="en-US" sz="1700" b="1">
                 <a:solidFill>
                   <a:srgbClr val="201F1E"/>
                 </a:solidFill>
@@ -21382,7 +22149,7 @@
               <a:t>Vague prompts</a:t>
             </a:r>
             <a:r>
-              <a:rPr lang="en-US" sz="1700" dirty="0">
+              <a:rPr lang="en-US" sz="1700">
                 <a:solidFill>
                   <a:srgbClr val="605E5C"/>
                 </a:solidFill>
@@ -21392,7 +22159,7 @@
               </a:rPr>
               <a:t>  →  generic, unhelpful responses</a:t>
             </a:r>
-            <a:endParaRPr lang="en-US" sz="1700" dirty="0"/>
+            <a:endParaRPr lang="en-US" sz="1700"/>
           </a:p>
           <a:p>
             <a:pPr marL="0" indent="0">
@@ -21401,7 +22168,7 @@
               </a:spcAft>
               <a:buNone/>
             </a:pPr>
-            <a:endParaRPr lang="en-US" sz="1700" dirty="0"/>
+            <a:endParaRPr lang="en-US" sz="1700"/>
           </a:p>
           <a:p>
             <a:pPr marL="342900" indent="-342900">
@@ -21412,7 +22179,7 @@
               <a:buChar char="•"/>
             </a:pPr>
             <a:r>
-              <a:rPr lang="en-US" sz="1700" b="1" dirty="0">
+              <a:rPr lang="en-US" sz="1700" b="1">
                 <a:solidFill>
                   <a:srgbClr val="201F1E"/>
                 </a:solidFill>
@@ -21423,7 +22190,7 @@
               <a:t>Specific prompts</a:t>
             </a:r>
             <a:r>
-              <a:rPr lang="en-US" sz="1700" dirty="0">
+              <a:rPr lang="en-US" sz="1700">
                 <a:solidFill>
                   <a:srgbClr val="605E5C"/>
                 </a:solidFill>
@@ -21494,7 +22261,7 @@
               <a:buNone/>
             </a:pPr>
             <a:r>
-              <a:rPr lang="en-US" sz="1800" b="1" dirty="0">
+              <a:rPr lang="en-US" sz="1800" b="1">
                 <a:solidFill>
                   <a:srgbClr val="E74C3C"/>
                 </a:solidFill>
@@ -21533,7 +22300,7 @@
               <a:buNone/>
             </a:pPr>
             <a:r>
-              <a:rPr lang="en-US" sz="1100" dirty="0">
+              <a:rPr lang="en-US" sz="1100">
                 <a:solidFill>
                   <a:srgbClr val="D2D0CE"/>
                 </a:solidFill>
@@ -21604,7 +22371,7 @@
               <a:buNone/>
             </a:pPr>
             <a:r>
-              <a:rPr lang="en-US" sz="1800" b="1" dirty="0">
+              <a:rPr lang="en-US" sz="1800" b="1">
                 <a:solidFill>
                   <a:srgbClr val="FFB900"/>
                 </a:solidFill>
@@ -21643,7 +22410,7 @@
               <a:buNone/>
             </a:pPr>
             <a:r>
-              <a:rPr lang="en-US" sz="1100" dirty="0">
+              <a:rPr lang="en-US" sz="1100">
                 <a:solidFill>
                   <a:srgbClr val="D2D0CE"/>
                 </a:solidFill>
@@ -21714,7 +22481,7 @@
               <a:buNone/>
             </a:pPr>
             <a:r>
-              <a:rPr lang="en-US" sz="1800" b="1" dirty="0">
+              <a:rPr lang="en-US" sz="1800" b="1">
                 <a:solidFill>
                   <a:srgbClr val="27AE60"/>
                 </a:solidFill>
@@ -21753,7 +22520,7 @@
               <a:buNone/>
             </a:pPr>
             <a:r>
-              <a:rPr lang="en-US" sz="1100" dirty="0">
+              <a:rPr lang="en-US" sz="1100">
                 <a:solidFill>
                   <a:srgbClr val="D2D0CE"/>
                 </a:solidFill>
@@ -21792,7 +22559,7 @@
               <a:buNone/>
             </a:pPr>
             <a:r>
-              <a:rPr lang="en-US" sz="1000" i="1" dirty="0">
+              <a:rPr lang="en-US" sz="1000" i="1">
                 <a:solidFill>
                   <a:srgbClr val="D2D0CE"/>
                 </a:solidFill>
@@ -21896,7 +22663,7 @@
               <a:buNone/>
             </a:pPr>
             <a:r>
-              <a:rPr lang="en-US" sz="2200" b="1" dirty="0">
+              <a:rPr lang="en-US" sz="2200" b="1">
                 <a:solidFill>
                   <a:srgbClr val="FFFFFF"/>
                 </a:solidFill>
@@ -22062,7 +22829,7 @@
               <a:buNone/>
             </a:pPr>
             <a:r>
-              <a:rPr lang="en-US" sz="1600" b="1" dirty="0">
+              <a:rPr lang="en-US" sz="1600" b="1">
                 <a:solidFill>
                   <a:srgbClr val="FFFFFF"/>
                 </a:solidFill>
@@ -22125,7 +22892,7 @@
               <a:buNone/>
             </a:pPr>
             <a:r>
-              <a:rPr lang="en-US" sz="1700" b="1" dirty="0">
+              <a:rPr lang="en-US" sz="1700" b="1">
                 <a:solidFill>
                   <a:srgbClr val="0078D4"/>
                 </a:solidFill>
@@ -22164,7 +22931,7 @@
               <a:buNone/>
             </a:pPr>
             <a:r>
-              <a:rPr lang="en-US" sz="1300" dirty="0">
+              <a:rPr lang="en-US" sz="1300">
                 <a:solidFill>
                   <a:srgbClr val="605E5C"/>
                 </a:solidFill>
@@ -22174,14 +22941,14 @@
               </a:rPr>
               <a:t>What do you want</a:t>
             </a:r>
-            <a:endParaRPr lang="en-US" sz="1300" dirty="0"/>
+            <a:endParaRPr lang="en-US" sz="1300"/>
           </a:p>
           <a:p>
             <a:pPr marL="0" indent="0" algn="l">
               <a:buNone/>
             </a:pPr>
             <a:r>
-              <a:rPr lang="en-US" sz="1300" dirty="0">
+              <a:rPr lang="en-US" sz="1300">
                 <a:solidFill>
                   <a:srgbClr val="605E5C"/>
                 </a:solidFill>
@@ -22323,7 +23090,7 @@
               <a:buNone/>
             </a:pPr>
             <a:r>
-              <a:rPr lang="en-US" sz="1600" b="1" dirty="0">
+              <a:rPr lang="en-US" sz="1600" b="1">
                 <a:solidFill>
                   <a:srgbClr val="FFFFFF"/>
                 </a:solidFill>
@@ -22386,7 +23153,7 @@
               <a:buNone/>
             </a:pPr>
             <a:r>
-              <a:rPr lang="en-US" sz="1700" b="1" dirty="0">
+              <a:rPr lang="en-US" sz="1700" b="1">
                 <a:solidFill>
                   <a:srgbClr val="0078D4"/>
                 </a:solidFill>
@@ -22425,7 +23192,7 @@
               <a:buNone/>
             </a:pPr>
             <a:r>
-              <a:rPr lang="en-US" sz="1300" dirty="0">
+              <a:rPr lang="en-US" sz="1300">
                 <a:solidFill>
                   <a:srgbClr val="605E5C"/>
                 </a:solidFill>
@@ -22435,14 +23202,14 @@
               </a:rPr>
               <a:t>Who's the audience?</a:t>
             </a:r>
-            <a:endParaRPr lang="en-US" sz="1300" dirty="0"/>
+            <a:endParaRPr lang="en-US" sz="1300"/>
           </a:p>
           <a:p>
             <a:pPr marL="0" indent="0" algn="l">
               <a:buNone/>
             </a:pPr>
             <a:r>
-              <a:rPr lang="en-US" sz="1300" dirty="0">
+              <a:rPr lang="en-US" sz="1300">
                 <a:solidFill>
                   <a:srgbClr val="605E5C"/>
                 </a:solidFill>
@@ -22584,7 +23351,7 @@
               <a:buNone/>
             </a:pPr>
             <a:r>
-              <a:rPr lang="en-US" sz="1600" b="1" dirty="0">
+              <a:rPr lang="en-US" sz="1600" b="1">
                 <a:solidFill>
                   <a:srgbClr val="FFFFFF"/>
                 </a:solidFill>
@@ -22647,7 +23414,7 @@
               <a:buNone/>
             </a:pPr>
             <a:r>
-              <a:rPr lang="en-US" sz="1700" b="1" dirty="0">
+              <a:rPr lang="en-US" sz="1700" b="1">
                 <a:solidFill>
                   <a:srgbClr val="0078D4"/>
                 </a:solidFill>
@@ -22686,7 +23453,7 @@
               <a:buNone/>
             </a:pPr>
             <a:r>
-              <a:rPr lang="en-US" sz="1300" dirty="0">
+              <a:rPr lang="en-US" sz="1300">
                 <a:solidFill>
                   <a:srgbClr val="605E5C"/>
                 </a:solidFill>
@@ -22696,14 +23463,14 @@
               </a:rPr>
               <a:t>Format, length,</a:t>
             </a:r>
-            <a:endParaRPr lang="en-US" sz="1300" dirty="0"/>
+            <a:endParaRPr lang="en-US" sz="1300"/>
           </a:p>
           <a:p>
             <a:pPr marL="0" indent="0" algn="l">
               <a:buNone/>
             </a:pPr>
             <a:r>
-              <a:rPr lang="en-US" sz="1300" dirty="0">
+              <a:rPr lang="en-US" sz="1300">
                 <a:solidFill>
                   <a:srgbClr val="605E5C"/>
                 </a:solidFill>
@@ -22845,7 +23612,7 @@
               <a:buNone/>
             </a:pPr>
             <a:r>
-              <a:rPr lang="en-US" sz="1600" b="1" dirty="0">
+              <a:rPr lang="en-US" sz="1600" b="1">
                 <a:solidFill>
                   <a:srgbClr val="FFFFFF"/>
                 </a:solidFill>
@@ -22908,7 +23675,7 @@
               <a:buNone/>
             </a:pPr>
             <a:r>
-              <a:rPr lang="en-US" sz="1700" b="1" dirty="0">
+              <a:rPr lang="en-US" sz="1700" b="1">
                 <a:solidFill>
                   <a:srgbClr val="0078D4"/>
                 </a:solidFill>
@@ -22947,7 +23714,7 @@
               <a:buNone/>
             </a:pPr>
             <a:r>
-              <a:rPr lang="en-US" sz="1300" dirty="0">
+              <a:rPr lang="en-US" sz="1300">
                 <a:solidFill>
                   <a:srgbClr val="605E5C"/>
                 </a:solidFill>
@@ -22957,14 +23724,14 @@
               </a:rPr>
               <a:t>Which data, files,</a:t>
             </a:r>
-            <a:endParaRPr lang="en-US" sz="1300" dirty="0"/>
+            <a:endParaRPr lang="en-US" sz="1300"/>
           </a:p>
           <a:p>
             <a:pPr marL="0" indent="0" algn="l">
               <a:buNone/>
             </a:pPr>
             <a:r>
-              <a:rPr lang="en-US" sz="1300" dirty="0">
+              <a:rPr lang="en-US" sz="1300">
                 <a:solidFill>
                   <a:srgbClr val="605E5C"/>
                 </a:solidFill>
@@ -23132,7 +23899,7 @@
               <a:buNone/>
             </a:pPr>
             <a:r>
-              <a:rPr lang="en-US" sz="2200" b="1" dirty="0">
+              <a:rPr lang="en-US" sz="2200" b="1">
                 <a:solidFill>
                   <a:srgbClr val="FFFFFF"/>
                 </a:solidFill>
@@ -23290,7 +24057,7 @@
               <a:buNone/>
             </a:pPr>
             <a:r>
-              <a:rPr lang="en-US" sz="1300" b="1" dirty="0">
+              <a:rPr lang="en-US" sz="1300" b="1">
                 <a:solidFill>
                   <a:srgbClr val="FFFFFF"/>
                 </a:solidFill>
@@ -23361,7 +24128,7 @@
               <a:buNone/>
             </a:pPr>
             <a:r>
-              <a:rPr lang="en-US" sz="900" b="1" dirty="0">
+              <a:rPr lang="en-US" sz="900" b="1">
                 <a:solidFill>
                   <a:srgbClr val="C0392B"/>
                 </a:solidFill>
@@ -23400,7 +24167,7 @@
               <a:buNone/>
             </a:pPr>
             <a:r>
-              <a:rPr lang="en-US" sz="1100" i="1" dirty="0">
+              <a:rPr lang="en-US" sz="1100" i="1">
                 <a:solidFill>
                   <a:srgbClr val="605E5C"/>
                 </a:solidFill>
@@ -23439,7 +24206,7 @@
               <a:buNone/>
             </a:pPr>
             <a:r>
-              <a:rPr lang="en-US" sz="1400" b="1" dirty="0">
+              <a:rPr lang="en-US" sz="1400" b="1">
                 <a:solidFill>
                   <a:srgbClr val="0078D4"/>
                 </a:solidFill>
@@ -23510,7 +24277,7 @@
               <a:buNone/>
             </a:pPr>
             <a:r>
-              <a:rPr lang="en-US" sz="900" b="1" dirty="0">
+              <a:rPr lang="en-US" sz="900" b="1">
                 <a:solidFill>
                   <a:srgbClr val="1E8449"/>
                 </a:solidFill>
@@ -23549,7 +24316,7 @@
               <a:buNone/>
             </a:pPr>
             <a:r>
-              <a:rPr lang="en-US" sz="1000" dirty="0">
+              <a:rPr lang="en-US" sz="1000">
                 <a:solidFill>
                   <a:srgbClr val="201F1E"/>
                 </a:solidFill>
@@ -23683,7 +24450,7 @@
               <a:buNone/>
             </a:pPr>
             <a:r>
-              <a:rPr lang="en-US" sz="1300" b="1" dirty="0">
+              <a:rPr lang="en-US" sz="1300" b="1">
                 <a:solidFill>
                   <a:srgbClr val="FFFFFF"/>
                 </a:solidFill>
@@ -23754,7 +24521,7 @@
               <a:buNone/>
             </a:pPr>
             <a:r>
-              <a:rPr lang="en-US" sz="900" b="1" dirty="0">
+              <a:rPr lang="en-US" sz="900" b="1">
                 <a:solidFill>
                   <a:srgbClr val="C0392B"/>
                 </a:solidFill>
@@ -23793,7 +24560,7 @@
               <a:buNone/>
             </a:pPr>
             <a:r>
-              <a:rPr lang="en-US" sz="1100" i="1" dirty="0">
+              <a:rPr lang="en-US" sz="1100" i="1">
                 <a:solidFill>
                   <a:srgbClr val="605E5C"/>
                 </a:solidFill>
@@ -23832,7 +24599,7 @@
               <a:buNone/>
             </a:pPr>
             <a:r>
-              <a:rPr lang="en-US" sz="1400" b="1" dirty="0">
+              <a:rPr lang="en-US" sz="1400" b="1">
                 <a:solidFill>
                   <a:srgbClr val="0078D4"/>
                 </a:solidFill>
@@ -23903,7 +24670,7 @@
               <a:buNone/>
             </a:pPr>
             <a:r>
-              <a:rPr lang="en-US" sz="900" b="1" dirty="0">
+              <a:rPr lang="en-US" sz="900" b="1">
                 <a:solidFill>
                   <a:srgbClr val="1E8449"/>
                 </a:solidFill>
@@ -23942,7 +24709,7 @@
               <a:buNone/>
             </a:pPr>
             <a:r>
-              <a:rPr lang="en-US" sz="1000" dirty="0">
+              <a:rPr lang="en-US" sz="1000">
                 <a:solidFill>
                   <a:srgbClr val="201F1E"/>
                 </a:solidFill>
@@ -24076,7 +24843,7 @@
               <a:buNone/>
             </a:pPr>
             <a:r>
-              <a:rPr lang="en-US" sz="1300" b="1" dirty="0">
+              <a:rPr lang="en-US" sz="1300" b="1">
                 <a:solidFill>
                   <a:srgbClr val="FFFFFF"/>
                 </a:solidFill>
@@ -24147,7 +24914,7 @@
               <a:buNone/>
             </a:pPr>
             <a:r>
-              <a:rPr lang="en-US" sz="900" b="1" dirty="0">
+              <a:rPr lang="en-US" sz="900" b="1">
                 <a:solidFill>
                   <a:srgbClr val="C0392B"/>
                 </a:solidFill>
@@ -24186,7 +24953,7 @@
               <a:buNone/>
             </a:pPr>
             <a:r>
-              <a:rPr lang="en-US" sz="1100" i="1" dirty="0">
+              <a:rPr lang="en-US" sz="1100" i="1">
                 <a:solidFill>
                   <a:srgbClr val="605E5C"/>
                 </a:solidFill>
@@ -24225,7 +24992,7 @@
               <a:buNone/>
             </a:pPr>
             <a:r>
-              <a:rPr lang="en-US" sz="1400" b="1" dirty="0">
+              <a:rPr lang="en-US" sz="1400" b="1">
                 <a:solidFill>
                   <a:srgbClr val="0078D4"/>
                 </a:solidFill>
@@ -24296,7 +25063,7 @@
               <a:buNone/>
             </a:pPr>
             <a:r>
-              <a:rPr lang="en-US" sz="900" b="1" dirty="0">
+              <a:rPr lang="en-US" sz="900" b="1">
                 <a:solidFill>
                   <a:srgbClr val="1E8449"/>
                 </a:solidFill>
@@ -24335,7 +25102,7 @@
               <a:buNone/>
             </a:pPr>
             <a:r>
-              <a:rPr lang="en-US" sz="1000" dirty="0">
+              <a:rPr lang="en-US" sz="1000">
                 <a:solidFill>
                   <a:srgbClr val="201F1E"/>
                 </a:solidFill>
@@ -24439,7 +25206,7 @@
               <a:buNone/>
             </a:pPr>
             <a:r>
-              <a:rPr lang="en-US" sz="2200" b="1" dirty="0">
+              <a:rPr lang="en-US" sz="2200" b="1">
                 <a:solidFill>
                   <a:srgbClr val="FFFFFF"/>
                 </a:solidFill>
@@ -24493,7 +25260,7 @@
         </p:nvGraphicFramePr>
         <p:xfrm>
           <a:off x="457200" y="960120"/>
-          <a:ext cx="8229600" cy="3886200"/>
+          <a:ext cx="8229600" cy="3712464"/>
         </p:xfrm>
         <a:graphic>
           <a:graphicData uri="http://schemas.openxmlformats.org/drawingml/2006/table">
@@ -25511,19 +26278,6 @@
             <a:pPr marL="0" indent="0" algn="l">
               <a:buNone/>
             </a:pPr>
-            <a:r>
-              <a:rPr lang="en-US" sz="14000" b="1" dirty="0">
-                <a:solidFill>
-                  <a:srgbClr val="0078D4">
-                    <a:alpha val="50000"/>
-                  </a:srgbClr>
-                </a:solidFill>
-                <a:latin typeface="Segoe UI" pitchFamily="34" charset="0"/>
-                <a:ea typeface="Segoe UI" pitchFamily="34" charset="-122"/>
-                <a:cs typeface="Segoe UI" pitchFamily="34" charset="-120"/>
-              </a:rPr>
-              <a:t>02</a:t>
-            </a:r>
             <a:endParaRPr lang="en-US" sz="14000" dirty="0"/>
           </a:p>
         </p:txBody>
@@ -25577,7 +26331,7 @@
               <a:buNone/>
             </a:pPr>
             <a:r>
-              <a:rPr lang="en-US" sz="3800" b="1" dirty="0">
+              <a:rPr lang="en-US" sz="3800" b="1">
                 <a:solidFill>
                   <a:srgbClr val="FFFFFF"/>
                 </a:solidFill>
@@ -25587,14 +26341,14 @@
               </a:rPr>
               <a:t>M365 Copilot Tips &amp; Tricks</a:t>
             </a:r>
-            <a:endParaRPr lang="en-US" sz="3800" dirty="0"/>
+            <a:endParaRPr lang="en-US" sz="3800"/>
           </a:p>
           <a:p>
             <a:pPr marL="0" indent="0" algn="l">
               <a:buNone/>
             </a:pPr>
             <a:r>
-              <a:rPr lang="en-US" sz="3800" b="1" dirty="0">
+              <a:rPr lang="en-US" sz="3800" b="1">
                 <a:solidFill>
                   <a:srgbClr val="FFFFFF"/>
                 </a:solidFill>
@@ -25665,7 +26419,7 @@
               <a:buNone/>
             </a:pPr>
             <a:r>
-              <a:rPr lang="en-US" sz="1800" dirty="0">
+              <a:rPr lang="en-US" sz="1800">
                 <a:solidFill>
                   <a:srgbClr val="D2D0CE"/>
                 </a:solidFill>
@@ -25769,7 +26523,7 @@
               <a:buNone/>
             </a:pPr>
             <a:r>
-              <a:rPr lang="en-US" sz="2200" b="1" dirty="0">
+              <a:rPr lang="en-US" sz="2200" b="1">
                 <a:solidFill>
                   <a:srgbClr val="FFFFFF"/>
                 </a:solidFill>
@@ -25903,7 +26657,7 @@
               <a:buNone/>
             </a:pPr>
             <a:r>
-              <a:rPr lang="en-US" sz="1300" b="1" dirty="0">
+              <a:rPr lang="en-US" sz="1300" b="1">
                 <a:solidFill>
                   <a:srgbClr val="FFFFFF"/>
                 </a:solidFill>
@@ -25942,7 +26696,7 @@
               <a:buNone/>
             </a:pPr>
             <a:r>
-              <a:rPr lang="en-US" sz="1400" b="1" dirty="0">
+              <a:rPr lang="en-US" sz="1400" b="1">
                 <a:solidFill>
                   <a:srgbClr val="201F1E"/>
                 </a:solidFill>
@@ -25981,7 +26735,7 @@
               <a:buNone/>
             </a:pPr>
             <a:r>
-              <a:rPr lang="en-US" sz="1200" dirty="0">
+              <a:rPr lang="en-US" sz="1200">
                 <a:solidFill>
                   <a:srgbClr val="605E5C"/>
                 </a:solidFill>
@@ -26091,7 +26845,7 @@
               <a:buNone/>
             </a:pPr>
             <a:r>
-              <a:rPr lang="en-US" sz="1300" b="1" dirty="0">
+              <a:rPr lang="en-US" sz="1300" b="1">
                 <a:solidFill>
                   <a:srgbClr val="FFFFFF"/>
                 </a:solidFill>
@@ -26130,7 +26884,7 @@
               <a:buNone/>
             </a:pPr>
             <a:r>
-              <a:rPr lang="en-US" sz="1400" b="1" dirty="0">
+              <a:rPr lang="en-US" sz="1400" b="1">
                 <a:solidFill>
                   <a:srgbClr val="201F1E"/>
                 </a:solidFill>
@@ -26169,7 +26923,7 @@
               <a:buNone/>
             </a:pPr>
             <a:r>
-              <a:rPr lang="en-US" sz="1200" dirty="0">
+              <a:rPr lang="en-US" sz="1200">
                 <a:solidFill>
                   <a:srgbClr val="605E5C"/>
                 </a:solidFill>
@@ -26279,7 +27033,7 @@
               <a:buNone/>
             </a:pPr>
             <a:r>
-              <a:rPr lang="en-US" sz="1300" b="1" dirty="0">
+              <a:rPr lang="en-US" sz="1300" b="1">
                 <a:solidFill>
                   <a:srgbClr val="FFFFFF"/>
                 </a:solidFill>
@@ -26318,7 +27072,7 @@
               <a:buNone/>
             </a:pPr>
             <a:r>
-              <a:rPr lang="en-US" sz="1400" b="1" dirty="0">
+              <a:rPr lang="en-US" sz="1400" b="1">
                 <a:solidFill>
                   <a:srgbClr val="201F1E"/>
                 </a:solidFill>
@@ -26357,7 +27111,7 @@
               <a:buNone/>
             </a:pPr>
             <a:r>
-              <a:rPr lang="en-US" sz="1200" dirty="0">
+              <a:rPr lang="en-US" sz="1200">
                 <a:solidFill>
                   <a:srgbClr val="605E5C"/>
                 </a:solidFill>
@@ -26467,7 +27221,7 @@
               <a:buNone/>
             </a:pPr>
             <a:r>
-              <a:rPr lang="en-US" sz="1300" b="1" dirty="0">
+              <a:rPr lang="en-US" sz="1300" b="1">
                 <a:solidFill>
                   <a:srgbClr val="FFFFFF"/>
                 </a:solidFill>
@@ -26506,7 +27260,7 @@
               <a:buNone/>
             </a:pPr>
             <a:r>
-              <a:rPr lang="en-US" sz="1400" b="1" dirty="0">
+              <a:rPr lang="en-US" sz="1400" b="1">
                 <a:solidFill>
                   <a:srgbClr val="201F1E"/>
                 </a:solidFill>
@@ -26545,7 +27299,7 @@
               <a:buNone/>
             </a:pPr>
             <a:r>
-              <a:rPr lang="en-US" sz="1200" dirty="0">
+              <a:rPr lang="en-US" sz="1200">
                 <a:solidFill>
                   <a:srgbClr val="605E5C"/>
                 </a:solidFill>
@@ -26672,7 +27426,7 @@
               <a:buNone/>
             </a:pPr>
             <a:r>
-              <a:rPr lang="en-US" sz="1200" b="1" dirty="0">
+              <a:rPr lang="en-US" sz="1200" b="1">
                 <a:solidFill>
                   <a:srgbClr val="7A5200"/>
                 </a:solidFill>
@@ -26683,7 +27437,7 @@
               <a:t>Pro Tip: </a:t>
             </a:r>
             <a:r>
-              <a:rPr lang="en-US" sz="1200" dirty="0">
+              <a:rPr lang="en-US" sz="1200">
                 <a:solidFill>
                   <a:srgbClr val="201F1E"/>
                 </a:solidFill>
@@ -27315,8 +28069,51 @@
 </a:theme>
 </file>
 
+<file path=ppt/theme/themeOverride1.xml><?xml version="1.0" encoding="utf-8"?>
+<a:themeOverride xmlns:a="http://schemas.openxmlformats.org/drawingml/2006/main">
+  <a:clrScheme name="Office">
+    <a:dk1>
+      <a:sysClr val="windowText" lastClr="000000"/>
+    </a:dk1>
+    <a:lt1>
+      <a:sysClr val="window" lastClr="FFFFFF"/>
+    </a:lt1>
+    <a:dk2>
+      <a:srgbClr val="44546A"/>
+    </a:dk2>
+    <a:lt2>
+      <a:srgbClr val="E7E6E6"/>
+    </a:lt2>
+    <a:accent1>
+      <a:srgbClr val="4472C4"/>
+    </a:accent1>
+    <a:accent2>
+      <a:srgbClr val="ED7D31"/>
+    </a:accent2>
+    <a:accent3>
+      <a:srgbClr val="A5A5A5"/>
+    </a:accent3>
+    <a:accent4>
+      <a:srgbClr val="FFC000"/>
+    </a:accent4>
+    <a:accent5>
+      <a:srgbClr val="5B9BD5"/>
+    </a:accent5>
+    <a:accent6>
+      <a:srgbClr val="70AD47"/>
+    </a:accent6>
+    <a:hlink>
+      <a:srgbClr val="0563C1"/>
+    </a:hlink>
+    <a:folHlink>
+      <a:srgbClr val="954F72"/>
+    </a:folHlink>
+  </a:clrScheme>
+</a:themeOverride>
+</file>
+
 <file path=docMetadata/LabelInfo.xml><?xml version="1.0" encoding="utf-8"?>
 <clbl:labelList xmlns:clbl="http://schemas.microsoft.com/office/2020/mipLabelMetadata">
-  <clbl:label id="{87ba5c36-b7cf-4793-bbc2-bd5b3a9f95ca}" enabled="1" method="Privileged" siteId="{72f988bf-86f1-41af-91ab-2d7cd011db47}" contentBits="0" removed="0"/>
+  <clbl:label id="{f42aa342-8706-4288-bd11-ebb85995028c}" enabled="1" method="Privileged" siteId="{72f988bf-86f1-41af-91ab-2d7cd011db47}" removed="0"/>
 </clbl:labelList>
 </file>